--- a/deal-status-onepager/US-Investment-Accelerator-Deal-Status.pptx
+++ b/deal-status-onepager/US-Investment-Accelerator-Deal-Status.pptx
@@ -503,10 +503,10 @@
             <a:r>
               <a:rPr lang="en-US" dirty="0"/>
               <a:t>FILL-IN GUIDE
-1. Type over every gray/placeholder value: Company 1-18, $X.X B deal sizes, First Last (owner's rep), the summary tiles, and the two '$XX.X B total' figures next to JAPAN and KOREA.
-2. Stage tags: each row has a colored tag (green Announced, blue Active, gray Consultation). To change a row's stage, delete its tag and Ctrl/Cmd-drag a spare tag from the right of the page into place. The spares sit off the page and never print.
-3. Add/remove rows: click in a table, use Table Layout &gt; Insert/Delete Rows. If you change row counts, drag the pills to keep them aligned with their rows, and update the counts in the summary strip.
-4. Rows are grouped by stage (Announced first, then Active, then Consultation) so wins read first.
+1. Type over every gray/placeholder value: Company 1-19, the $X.X B deal sizes (all in billions), First Last (owner's rep), the summary tiles, and the two '$XX.X B total' figures next to JAPAN and KOREA.
+2. Stage tags are already set to the plan: Japan = 6 Announced, 3 Consultation, 4 Active. Korea = 3 Consultation, 3 Active (none announced). To change one anyway, delete it and Ctrl/Cmd-drag a spare tag from the right of the page into place. The spares sit off the page and never print.
+3. Add/remove rows: click in a table, use Table Layout &gt; Insert/Delete Rows. If you change row counts, drag the tags to keep them aligned with their rows, and update the counts in the summary strip.
+4. Rows are grouped by stage: Announced first, then Consultation, then Active.
 5. Export for the meeting: File &gt; Export/Save As &gt; PDF. The page is exactly US Letter landscape, so it also prints 1:1.</a:t>
             </a:r>
             <a:endParaRPr lang="en-US" dirty="0"/>
@@ -889,7 +889,7 @@
         <p:spPr>
           <a:xfrm>
             <a:off x="0" y="0"/>
-            <a:ext cx="10058400" cy="1115568"/>
+            <a:ext cx="10058400" cy="960120"/>
           </a:xfrm>
           <a:prstGeom prst="rect">
             <a:avLst/>
@@ -908,7 +908,7 @@
         </p:nvSpPr>
         <p:spPr>
           <a:xfrm>
-            <a:off x="0" y="1115568"/>
+            <a:off x="0" y="960120"/>
             <a:ext cx="10058400" cy="32004"/>
           </a:xfrm>
           <a:prstGeom prst="rect">
@@ -928,7 +928,7 @@
         </p:nvSpPr>
         <p:spPr>
           <a:xfrm>
-            <a:off x="384048" y="118872"/>
+            <a:off x="384048" y="155448"/>
             <a:ext cx="6949440" cy="219456"/>
           </a:xfrm>
           <a:prstGeom prst="rect">
@@ -967,7 +967,7 @@
         </p:nvSpPr>
         <p:spPr>
           <a:xfrm>
-            <a:off x="365760" y="338328"/>
+            <a:off x="365760" y="411480"/>
             <a:ext cx="7132320" cy="420624"/>
           </a:xfrm>
           <a:prstGeom prst="rect">
@@ -1000,52 +1000,13 @@
       </p:sp>
       <p:sp>
         <p:nvSpPr>
-          <p:cNvPr id="6" name="Text 4"/>
-          <p:cNvSpPr/>
-          <p:nvPr/>
-        </p:nvSpPr>
-        <p:spPr>
-          <a:xfrm>
-            <a:off x="384048" y="777240"/>
-            <a:ext cx="7132320" cy="237744"/>
-          </a:xfrm>
-          <a:prstGeom prst="rect">
-            <a:avLst/>
-          </a:prstGeom>
-          <a:noFill/>
-          <a:ln/>
-        </p:spPr>
-        <p:txBody>
-          <a:bodyPr wrap="square" lIns="0" tIns="0" rIns="0" bIns="0" rtlCol="0" anchor="ctr"/>
-          <a:lstStyle/>
-          <a:p>
-            <a:pPr indent="0" marL="0">
-              <a:buNone/>
-            </a:pPr>
-            <a:r>
-              <a:rPr lang="en-US" sz="1100" dirty="0">
-                <a:solidFill>
-                  <a:srgbClr val="C9D7EC"/>
-                </a:solidFill>
-                <a:latin typeface="Arial" pitchFamily="34" charset="0"/>
-                <a:ea typeface="Arial" pitchFamily="34" charset="-122"/>
-                <a:cs typeface="Arial" pitchFamily="34" charset="-120"/>
-              </a:rPr>
-              <a:t>Prepared for the Secretary of Commerce   ·   July 29, 2026   ·   Organized by funding source</a:t>
-            </a:r>
-            <a:endParaRPr lang="en-US" sz="1100" dirty="0"/>
-          </a:p>
-        </p:txBody>
-      </p:sp>
-      <p:sp>
-        <p:nvSpPr>
-          <p:cNvPr id="7" name="Shape 5"/>
-          <p:cNvSpPr/>
-          <p:nvPr/>
-        </p:nvSpPr>
-        <p:spPr>
-          <a:xfrm>
-            <a:off x="7424928" y="402336"/>
+          <p:cNvPr id="6" name="Shape 4"/>
+          <p:cNvSpPr/>
+          <p:nvPr/>
+        </p:nvSpPr>
+        <p:spPr>
+          <a:xfrm>
+            <a:off x="7424928" y="324612"/>
             <a:ext cx="2267712" cy="310896"/>
           </a:xfrm>
           <a:prstGeom prst="roundRect">
@@ -1063,13 +1024,13 @@
       </p:sp>
       <p:sp>
         <p:nvSpPr>
-          <p:cNvPr id="8" name="Text 6"/>
-          <p:cNvSpPr/>
-          <p:nvPr/>
-        </p:nvSpPr>
-        <p:spPr>
-          <a:xfrm>
-            <a:off x="7424928" y="402336"/>
+          <p:cNvPr id="7" name="Text 5"/>
+          <p:cNvSpPr/>
+          <p:nvPr/>
+        </p:nvSpPr>
+        <p:spPr>
+          <a:xfrm>
+            <a:off x="7424928" y="324612"/>
             <a:ext cx="2267712" cy="310896"/>
           </a:xfrm>
           <a:prstGeom prst="rect">
@@ -1102,13 +1063,13 @@
       </p:sp>
       <p:sp>
         <p:nvSpPr>
-          <p:cNvPr id="9" name="Shape 7"/>
-          <p:cNvSpPr/>
-          <p:nvPr/>
-        </p:nvSpPr>
-        <p:spPr>
-          <a:xfrm>
-            <a:off x="0" y="1147572"/>
+          <p:cNvPr id="8" name="Shape 6"/>
+          <p:cNvSpPr/>
+          <p:nvPr/>
+        </p:nvSpPr>
+        <p:spPr>
+          <a:xfrm>
+            <a:off x="0" y="992124"/>
             <a:ext cx="10058400" cy="969264"/>
           </a:xfrm>
           <a:prstGeom prst="rect">
@@ -1122,13 +1083,13 @@
       </p:sp>
       <p:sp>
         <p:nvSpPr>
-          <p:cNvPr id="10" name="Shape 8"/>
-          <p:cNvSpPr/>
-          <p:nvPr/>
-        </p:nvSpPr>
-        <p:spPr>
-          <a:xfrm>
-            <a:off x="0" y="2116836"/>
+          <p:cNvPr id="9" name="Shape 7"/>
+          <p:cNvSpPr/>
+          <p:nvPr/>
+        </p:nvSpPr>
+        <p:spPr>
+          <a:xfrm>
+            <a:off x="0" y="1961388"/>
             <a:ext cx="10058400" cy="9144"/>
           </a:xfrm>
           <a:prstGeom prst="rect">
@@ -1142,13 +1103,13 @@
       </p:sp>
       <p:sp>
         <p:nvSpPr>
-          <p:cNvPr id="11" name="Shape 9"/>
-          <p:cNvSpPr/>
-          <p:nvPr/>
-        </p:nvSpPr>
-        <p:spPr>
-          <a:xfrm>
-            <a:off x="1600200" y="1316736"/>
+          <p:cNvPr id="10" name="Shape 8"/>
+          <p:cNvSpPr/>
+          <p:nvPr/>
+        </p:nvSpPr>
+        <p:spPr>
+          <a:xfrm>
+            <a:off x="1600200" y="1161288"/>
             <a:ext cx="7315" cy="658368"/>
           </a:xfrm>
           <a:prstGeom prst="rect">
@@ -1162,13 +1123,13 @@
       </p:sp>
       <p:sp>
         <p:nvSpPr>
-          <p:cNvPr id="12" name="Shape 10"/>
-          <p:cNvSpPr/>
-          <p:nvPr/>
-        </p:nvSpPr>
-        <p:spPr>
-          <a:xfrm>
-            <a:off x="3611880" y="1316736"/>
+          <p:cNvPr id="11" name="Shape 9"/>
+          <p:cNvSpPr/>
+          <p:nvPr/>
+        </p:nvSpPr>
+        <p:spPr>
+          <a:xfrm>
+            <a:off x="3611880" y="1161288"/>
             <a:ext cx="7315" cy="658368"/>
           </a:xfrm>
           <a:prstGeom prst="rect">
@@ -1182,13 +1143,13 @@
       </p:sp>
       <p:sp>
         <p:nvSpPr>
-          <p:cNvPr id="13" name="Shape 11"/>
-          <p:cNvSpPr/>
-          <p:nvPr/>
-        </p:nvSpPr>
-        <p:spPr>
-          <a:xfrm>
-            <a:off x="5669280" y="1316736"/>
+          <p:cNvPr id="12" name="Shape 10"/>
+          <p:cNvSpPr/>
+          <p:nvPr/>
+        </p:nvSpPr>
+        <p:spPr>
+          <a:xfrm>
+            <a:off x="5669280" y="1161288"/>
             <a:ext cx="7315" cy="658368"/>
           </a:xfrm>
           <a:prstGeom prst="rect">
@@ -1202,13 +1163,13 @@
       </p:sp>
       <p:sp>
         <p:nvSpPr>
-          <p:cNvPr id="14" name="Shape 12"/>
-          <p:cNvSpPr/>
-          <p:nvPr/>
-        </p:nvSpPr>
-        <p:spPr>
-          <a:xfrm>
-            <a:off x="7543800" y="1316736"/>
+          <p:cNvPr id="13" name="Shape 11"/>
+          <p:cNvSpPr/>
+          <p:nvPr/>
+        </p:nvSpPr>
+        <p:spPr>
+          <a:xfrm>
+            <a:off x="7543800" y="1161288"/>
             <a:ext cx="7315" cy="658368"/>
           </a:xfrm>
           <a:prstGeom prst="rect">
@@ -1222,13 +1183,13 @@
       </p:sp>
       <p:sp>
         <p:nvSpPr>
-          <p:cNvPr id="15" name="Text 13"/>
-          <p:cNvSpPr/>
-          <p:nvPr/>
-        </p:nvSpPr>
-        <p:spPr>
-          <a:xfrm>
-            <a:off x="384048" y="1298448"/>
+          <p:cNvPr id="14" name="Text 12"/>
+          <p:cNvSpPr/>
+          <p:nvPr/>
+        </p:nvSpPr>
+        <p:spPr>
+          <a:xfrm>
+            <a:off x="384048" y="1143000"/>
             <a:ext cx="1188720" cy="182880"/>
           </a:xfrm>
           <a:prstGeom prst="rect">
@@ -1261,13 +1222,13 @@
       </p:sp>
       <p:sp>
         <p:nvSpPr>
-          <p:cNvPr id="16" name="Text 14"/>
-          <p:cNvSpPr/>
-          <p:nvPr/>
-        </p:nvSpPr>
-        <p:spPr>
-          <a:xfrm>
-            <a:off x="384048" y="1499616"/>
+          <p:cNvPr id="15" name="Text 13"/>
+          <p:cNvSpPr/>
+          <p:nvPr/>
+        </p:nvSpPr>
+        <p:spPr>
+          <a:xfrm>
+            <a:off x="384048" y="1344168"/>
             <a:ext cx="1188720" cy="365760"/>
           </a:xfrm>
           <a:prstGeom prst="rect">
@@ -1292,7 +1253,7 @@
                 <a:ea typeface="Arial" pitchFamily="34" charset="-122"/>
                 <a:cs typeface="Arial" pitchFamily="34" charset="-120"/>
               </a:rPr>
-              <a:t>18</a:t>
+              <a:t>19</a:t>
             </a:r>
             <a:endParaRPr lang="en-US" sz="1900" dirty="0"/>
           </a:p>
@@ -1300,13 +1261,13 @@
       </p:sp>
       <p:sp>
         <p:nvSpPr>
-          <p:cNvPr id="17" name="Text 15"/>
-          <p:cNvSpPr/>
-          <p:nvPr/>
-        </p:nvSpPr>
-        <p:spPr>
-          <a:xfrm>
-            <a:off x="1810512" y="1298448"/>
+          <p:cNvPr id="16" name="Text 14"/>
+          <p:cNvSpPr/>
+          <p:nvPr/>
+        </p:nvSpPr>
+        <p:spPr>
+          <a:xfrm>
+            <a:off x="1810512" y="1143000"/>
             <a:ext cx="1737360" cy="182880"/>
           </a:xfrm>
           <a:prstGeom prst="rect">
@@ -1339,13 +1300,13 @@
       </p:sp>
       <p:sp>
         <p:nvSpPr>
-          <p:cNvPr id="18" name="Text 16"/>
-          <p:cNvSpPr/>
-          <p:nvPr/>
-        </p:nvSpPr>
-        <p:spPr>
-          <a:xfrm>
-            <a:off x="1810512" y="1499616"/>
+          <p:cNvPr id="17" name="Text 15"/>
+          <p:cNvSpPr/>
+          <p:nvPr/>
+        </p:nvSpPr>
+        <p:spPr>
+          <a:xfrm>
+            <a:off x="1810512" y="1344168"/>
             <a:ext cx="1737360" cy="365760"/>
           </a:xfrm>
           <a:prstGeom prst="rect">
@@ -1378,13 +1339,13 @@
       </p:sp>
       <p:sp>
         <p:nvSpPr>
-          <p:cNvPr id="19" name="Shape 17"/>
-          <p:cNvSpPr/>
-          <p:nvPr/>
-        </p:nvSpPr>
-        <p:spPr>
-          <a:xfrm>
-            <a:off x="3822192" y="1298448"/>
+          <p:cNvPr id="18" name="Shape 16"/>
+          <p:cNvSpPr/>
+          <p:nvPr/>
+        </p:nvSpPr>
+        <p:spPr>
+          <a:xfrm>
+            <a:off x="3822192" y="1143000"/>
             <a:ext cx="201168" cy="141732"/>
           </a:xfrm>
           <a:prstGeom prst="roundRect">
@@ -1405,13 +1366,13 @@
       </p:sp>
       <p:sp>
         <p:nvSpPr>
-          <p:cNvPr id="20" name="Shape 18"/>
-          <p:cNvSpPr/>
-          <p:nvPr/>
-        </p:nvSpPr>
-        <p:spPr>
-          <a:xfrm>
-            <a:off x="3883091" y="1329629"/>
+          <p:cNvPr id="19" name="Shape 17"/>
+          <p:cNvSpPr/>
+          <p:nvPr/>
+        </p:nvSpPr>
+        <p:spPr>
+          <a:xfrm>
+            <a:off x="3883091" y="1174181"/>
             <a:ext cx="79370" cy="79370"/>
           </a:xfrm>
           <a:prstGeom prst="ellipse">
@@ -1425,13 +1386,13 @@
       </p:sp>
       <p:sp>
         <p:nvSpPr>
-          <p:cNvPr id="21" name="Text 19"/>
-          <p:cNvSpPr/>
-          <p:nvPr/>
-        </p:nvSpPr>
-        <p:spPr>
-          <a:xfrm>
-            <a:off x="4087368" y="1298448"/>
+          <p:cNvPr id="20" name="Text 18"/>
+          <p:cNvSpPr/>
+          <p:nvPr/>
+        </p:nvSpPr>
+        <p:spPr>
+          <a:xfrm>
+            <a:off x="4087368" y="1143000"/>
             <a:ext cx="1463040" cy="182880"/>
           </a:xfrm>
           <a:prstGeom prst="rect">
@@ -1464,13 +1425,13 @@
       </p:sp>
       <p:sp>
         <p:nvSpPr>
-          <p:cNvPr id="22" name="Text 20"/>
-          <p:cNvSpPr/>
-          <p:nvPr/>
-        </p:nvSpPr>
-        <p:spPr>
-          <a:xfrm>
-            <a:off x="3822192" y="1499616"/>
+          <p:cNvPr id="21" name="Text 19"/>
+          <p:cNvSpPr/>
+          <p:nvPr/>
+        </p:nvSpPr>
+        <p:spPr>
+          <a:xfrm>
+            <a:off x="3822192" y="1344168"/>
             <a:ext cx="1783080" cy="365760"/>
           </a:xfrm>
           <a:prstGeom prst="rect">
@@ -1517,13 +1478,13 @@
       </p:sp>
       <p:sp>
         <p:nvSpPr>
-          <p:cNvPr id="23" name="Shape 21"/>
-          <p:cNvSpPr/>
-          <p:nvPr/>
-        </p:nvSpPr>
-        <p:spPr>
-          <a:xfrm>
-            <a:off x="5879592" y="1298448"/>
+          <p:cNvPr id="22" name="Shape 20"/>
+          <p:cNvSpPr/>
+          <p:nvPr/>
+        </p:nvSpPr>
+        <p:spPr>
+          <a:xfrm>
+            <a:off x="5879592" y="1143000"/>
             <a:ext cx="201168" cy="141732"/>
           </a:xfrm>
           <a:prstGeom prst="roundRect">
@@ -1544,13 +1505,13 @@
       </p:sp>
       <p:sp>
         <p:nvSpPr>
-          <p:cNvPr id="24" name="Shape 22"/>
-          <p:cNvSpPr/>
-          <p:nvPr/>
-        </p:nvSpPr>
-        <p:spPr>
-          <a:xfrm>
-            <a:off x="5940491" y="1329629"/>
+          <p:cNvPr id="23" name="Shape 21"/>
+          <p:cNvSpPr/>
+          <p:nvPr/>
+        </p:nvSpPr>
+        <p:spPr>
+          <a:xfrm>
+            <a:off x="5940491" y="1174181"/>
             <a:ext cx="79370" cy="79370"/>
           </a:xfrm>
           <a:prstGeom prst="ellipse">
@@ -1564,13 +1525,13 @@
       </p:sp>
       <p:sp>
         <p:nvSpPr>
-          <p:cNvPr id="25" name="Shape 23"/>
-          <p:cNvSpPr/>
-          <p:nvPr/>
-        </p:nvSpPr>
-        <p:spPr>
-          <a:xfrm>
-            <a:off x="5940491" y="1329629"/>
+          <p:cNvPr id="24" name="Shape 22"/>
+          <p:cNvSpPr/>
+          <p:nvPr/>
+        </p:nvSpPr>
+        <p:spPr>
+          <a:xfrm>
+            <a:off x="5940491" y="1174181"/>
             <a:ext cx="79370" cy="79370"/>
           </a:xfrm>
           <a:prstGeom prst="pie">
@@ -1587,13 +1548,13 @@
       </p:sp>
       <p:sp>
         <p:nvSpPr>
-          <p:cNvPr id="26" name="Text 24"/>
-          <p:cNvSpPr/>
-          <p:nvPr/>
-        </p:nvSpPr>
-        <p:spPr>
-          <a:xfrm>
-            <a:off x="6144768" y="1298448"/>
+          <p:cNvPr id="25" name="Text 23"/>
+          <p:cNvSpPr/>
+          <p:nvPr/>
+        </p:nvSpPr>
+        <p:spPr>
+          <a:xfrm>
+            <a:off x="6144768" y="1143000"/>
             <a:ext cx="1371600" cy="182880"/>
           </a:xfrm>
           <a:prstGeom prst="rect">
@@ -1626,13 +1587,13 @@
       </p:sp>
       <p:sp>
         <p:nvSpPr>
-          <p:cNvPr id="27" name="Text 25"/>
-          <p:cNvSpPr/>
-          <p:nvPr/>
-        </p:nvSpPr>
-        <p:spPr>
-          <a:xfrm>
-            <a:off x="5879592" y="1499616"/>
+          <p:cNvPr id="26" name="Text 24"/>
+          <p:cNvSpPr/>
+          <p:nvPr/>
+        </p:nvSpPr>
+        <p:spPr>
+          <a:xfrm>
+            <a:off x="5879592" y="1344168"/>
             <a:ext cx="1645920" cy="365760"/>
           </a:xfrm>
           <a:prstGeom prst="rect">
@@ -1657,7 +1618,7 @@
                 <a:ea typeface="Arial" pitchFamily="34" charset="-122"/>
                 <a:cs typeface="Arial" pitchFamily="34" charset="-120"/>
               </a:rPr>
-              <a:t>5</a:t>
+              <a:t>6</a:t>
             </a:r>
             <a:pPr indent="0" marL="0">
               <a:buNone/>
@@ -1679,13 +1640,13 @@
       </p:sp>
       <p:sp>
         <p:nvSpPr>
-          <p:cNvPr id="28" name="Text 26"/>
-          <p:cNvSpPr/>
-          <p:nvPr/>
-        </p:nvSpPr>
-        <p:spPr>
-          <a:xfrm>
-            <a:off x="7754112" y="1298448"/>
+          <p:cNvPr id="27" name="Text 25"/>
+          <p:cNvSpPr/>
+          <p:nvPr/>
+        </p:nvSpPr>
+        <p:spPr>
+          <a:xfrm>
+            <a:off x="7754112" y="1143000"/>
             <a:ext cx="1920240" cy="182880"/>
           </a:xfrm>
           <a:prstGeom prst="rect">
@@ -1718,13 +1679,13 @@
       </p:sp>
       <p:sp>
         <p:nvSpPr>
-          <p:cNvPr id="29" name="Text 27"/>
-          <p:cNvSpPr/>
-          <p:nvPr/>
-        </p:nvSpPr>
-        <p:spPr>
-          <a:xfrm>
-            <a:off x="7754112" y="1513332"/>
+          <p:cNvPr id="28" name="Text 26"/>
+          <p:cNvSpPr/>
+          <p:nvPr/>
+        </p:nvSpPr>
+        <p:spPr>
+          <a:xfrm>
+            <a:off x="7754112" y="1357884"/>
             <a:ext cx="1920240" cy="192024"/>
           </a:xfrm>
           <a:prstGeom prst="rect">
@@ -1785,13 +1746,80 @@
       </p:sp>
       <p:sp>
         <p:nvSpPr>
+          <p:cNvPr id="29" name="Text 27"/>
+          <p:cNvSpPr/>
+          <p:nvPr/>
+        </p:nvSpPr>
+        <p:spPr>
+          <a:xfrm>
+            <a:off x="7754112" y="1554480"/>
+            <a:ext cx="1920240" cy="192024"/>
+          </a:xfrm>
+          <a:prstGeom prst="rect">
+            <a:avLst/>
+          </a:prstGeom>
+          <a:noFill/>
+          <a:ln/>
+        </p:spPr>
+        <p:txBody>
+          <a:bodyPr wrap="square" lIns="0" tIns="0" rIns="0" bIns="0" rtlCol="0" anchor="ctr"/>
+          <a:lstStyle/>
+          <a:p>
+            <a:pPr indent="0" marL="0">
+              <a:buNone/>
+            </a:pPr>
+            <a:r>
+              <a:rPr lang="en-US" sz="800" dirty="0">
+                <a:solidFill>
+                  <a:srgbClr val="898781"/>
+                </a:solidFill>
+                <a:latin typeface="Arial" pitchFamily="34" charset="0"/>
+                <a:ea typeface="Arial" pitchFamily="34" charset="-122"/>
+                <a:cs typeface="Arial" pitchFamily="34" charset="-120"/>
+              </a:rPr>
+              <a:t>● </a:t>
+            </a:r>
+            <a:pPr indent="0" marL="0">
+              <a:buNone/>
+            </a:pPr>
+            <a:r>
+              <a:rPr lang="en-US" sz="1000" b="1" dirty="0">
+                <a:solidFill>
+                  <a:srgbClr val="0B0B0B"/>
+                </a:solidFill>
+                <a:latin typeface="Arial" pitchFamily="34" charset="0"/>
+                <a:ea typeface="Arial" pitchFamily="34" charset="-122"/>
+                <a:cs typeface="Arial" pitchFamily="34" charset="-120"/>
+              </a:rPr>
+              <a:t>6  </a:t>
+            </a:r>
+            <a:pPr indent="0" marL="0">
+              <a:buNone/>
+            </a:pPr>
+            <a:r>
+              <a:rPr lang="en-US" sz="950" dirty="0">
+                <a:solidFill>
+                  <a:srgbClr val="52514E"/>
+                </a:solidFill>
+                <a:latin typeface="Arial" pitchFamily="34" charset="0"/>
+                <a:ea typeface="Arial" pitchFamily="34" charset="-122"/>
+                <a:cs typeface="Arial" pitchFamily="34" charset="-120"/>
+              </a:rPr>
+              <a:t>Consultation</a:t>
+            </a:r>
+            <a:endParaRPr lang="en-US" sz="800" dirty="0"/>
+          </a:p>
+        </p:txBody>
+      </p:sp>
+      <p:sp>
+        <p:nvSpPr>
           <p:cNvPr id="30" name="Text 28"/>
           <p:cNvSpPr/>
           <p:nvPr/>
         </p:nvSpPr>
         <p:spPr>
           <a:xfrm>
-            <a:off x="7754112" y="1709928"/>
+            <a:off x="7754112" y="1751076"/>
             <a:ext cx="1920240" cy="192024"/>
           </a:xfrm>
           <a:prstGeom prst="rect">
@@ -1852,80 +1880,13 @@
       </p:sp>
       <p:sp>
         <p:nvSpPr>
-          <p:cNvPr id="31" name="Text 29"/>
-          <p:cNvSpPr/>
-          <p:nvPr/>
-        </p:nvSpPr>
-        <p:spPr>
-          <a:xfrm>
-            <a:off x="7754112" y="1906524"/>
-            <a:ext cx="1920240" cy="192024"/>
-          </a:xfrm>
-          <a:prstGeom prst="rect">
-            <a:avLst/>
-          </a:prstGeom>
-          <a:noFill/>
-          <a:ln/>
-        </p:spPr>
-        <p:txBody>
-          <a:bodyPr wrap="square" lIns="0" tIns="0" rIns="0" bIns="0" rtlCol="0" anchor="ctr"/>
-          <a:lstStyle/>
-          <a:p>
-            <a:pPr indent="0" marL="0">
-              <a:buNone/>
-            </a:pPr>
-            <a:r>
-              <a:rPr lang="en-US" sz="800" dirty="0">
-                <a:solidFill>
-                  <a:srgbClr val="898781"/>
-                </a:solidFill>
-                <a:latin typeface="Arial" pitchFamily="34" charset="0"/>
-                <a:ea typeface="Arial" pitchFamily="34" charset="-122"/>
-                <a:cs typeface="Arial" pitchFamily="34" charset="-120"/>
-              </a:rPr>
-              <a:t>● </a:t>
-            </a:r>
-            <a:pPr indent="0" marL="0">
-              <a:buNone/>
-            </a:pPr>
-            <a:r>
-              <a:rPr lang="en-US" sz="1000" b="1" dirty="0">
-                <a:solidFill>
-                  <a:srgbClr val="0B0B0B"/>
-                </a:solidFill>
-                <a:latin typeface="Arial" pitchFamily="34" charset="0"/>
-                <a:ea typeface="Arial" pitchFamily="34" charset="-122"/>
-                <a:cs typeface="Arial" pitchFamily="34" charset="-120"/>
-              </a:rPr>
-              <a:t>5  </a:t>
-            </a:r>
-            <a:pPr indent="0" marL="0">
-              <a:buNone/>
-            </a:pPr>
-            <a:r>
-              <a:rPr lang="en-US" sz="950" dirty="0">
-                <a:solidFill>
-                  <a:srgbClr val="52514E"/>
-                </a:solidFill>
-                <a:latin typeface="Arial" pitchFamily="34" charset="0"/>
-                <a:ea typeface="Arial" pitchFamily="34" charset="-122"/>
-                <a:cs typeface="Arial" pitchFamily="34" charset="-120"/>
-              </a:rPr>
-              <a:t>Consultation</a:t>
-            </a:r>
-            <a:endParaRPr lang="en-US" sz="800" dirty="0"/>
-          </a:p>
-        </p:txBody>
-      </p:sp>
-      <p:sp>
-        <p:nvSpPr>
-          <p:cNvPr id="32" name="Shape 30"/>
-          <p:cNvSpPr/>
-          <p:nvPr/>
-        </p:nvSpPr>
-        <p:spPr>
-          <a:xfrm>
-            <a:off x="384048" y="2318004"/>
+          <p:cNvPr id="31" name="Shape 29"/>
+          <p:cNvSpPr/>
+          <p:nvPr/>
+        </p:nvSpPr>
+        <p:spPr>
+          <a:xfrm>
+            <a:off x="384048" y="2162556"/>
             <a:ext cx="274320" cy="187452"/>
           </a:xfrm>
           <a:prstGeom prst="roundRect">
@@ -1946,13 +1907,13 @@
       </p:sp>
       <p:sp>
         <p:nvSpPr>
-          <p:cNvPr id="33" name="Shape 31"/>
-          <p:cNvSpPr/>
-          <p:nvPr/>
-        </p:nvSpPr>
-        <p:spPr>
-          <a:xfrm>
-            <a:off x="468721" y="2359243"/>
+          <p:cNvPr id="32" name="Shape 30"/>
+          <p:cNvSpPr/>
+          <p:nvPr/>
+        </p:nvSpPr>
+        <p:spPr>
+          <a:xfrm>
+            <a:off x="468721" y="2203795"/>
             <a:ext cx="104973" cy="104973"/>
           </a:xfrm>
           <a:prstGeom prst="ellipse">
@@ -1966,13 +1927,13 @@
       </p:sp>
       <p:sp>
         <p:nvSpPr>
-          <p:cNvPr id="34" name="Text 32"/>
-          <p:cNvSpPr/>
-          <p:nvPr/>
-        </p:nvSpPr>
-        <p:spPr>
-          <a:xfrm>
-            <a:off x="731520" y="2276856"/>
+          <p:cNvPr id="33" name="Text 31"/>
+          <p:cNvSpPr/>
+          <p:nvPr/>
+        </p:nvSpPr>
+        <p:spPr>
+          <a:xfrm>
+            <a:off x="731520" y="2121408"/>
             <a:ext cx="1463040" cy="274320"/>
           </a:xfrm>
           <a:prstGeom prst="rect">
@@ -2005,13 +1966,13 @@
       </p:sp>
       <p:sp>
         <p:nvSpPr>
-          <p:cNvPr id="35" name="Text 33"/>
-          <p:cNvSpPr/>
-          <p:nvPr/>
-        </p:nvSpPr>
-        <p:spPr>
-          <a:xfrm>
-            <a:off x="3054096" y="2327148"/>
+          <p:cNvPr id="34" name="Text 32"/>
+          <p:cNvSpPr/>
+          <p:nvPr/>
+        </p:nvSpPr>
+        <p:spPr>
+          <a:xfrm>
+            <a:off x="3054096" y="2171700"/>
             <a:ext cx="2743200" cy="201168"/>
           </a:xfrm>
           <a:prstGeom prst="rect">
@@ -2058,13 +2019,13 @@
       </p:sp>
       <p:sp>
         <p:nvSpPr>
-          <p:cNvPr id="36" name="Shape 34"/>
-          <p:cNvSpPr/>
-          <p:nvPr/>
-        </p:nvSpPr>
-        <p:spPr>
-          <a:xfrm>
-            <a:off x="384048" y="2615184"/>
+          <p:cNvPr id="35" name="Shape 33"/>
+          <p:cNvSpPr/>
+          <p:nvPr/>
+        </p:nvSpPr>
+        <p:spPr>
+          <a:xfrm>
+            <a:off x="384048" y="2459736"/>
             <a:ext cx="5413248" cy="25603"/>
           </a:xfrm>
           <a:prstGeom prst="rect">
@@ -2091,7 +2052,7 @@
           </p:nvPr>
         </p:nvGraphicFramePr>
         <p:xfrm>
-          <a:off x="384048" y="2724912"/>
+          <a:off x="384048" y="2569464"/>
           <a:ext cx="5413248" cy="914400"/>
         </p:xfrm>
         <a:graphic>
@@ -2294,7 +2255,7 @@
                   </a:tcPr>
                 </a:tc>
               </a:tr>
-              <a:tr h="329184">
+              <a:tr h="342900">
                 <a:tc>
                   <a:txBody>
                     <a:bodyPr/>
@@ -2473,7 +2434,7 @@
                   </a:tcPr>
                 </a:tc>
               </a:tr>
-              <a:tr h="329184">
+              <a:tr h="342900">
                 <a:tc>
                   <a:txBody>
                     <a:bodyPr/>
@@ -2652,7 +2613,7 @@
                   </a:tcPr>
                 </a:tc>
               </a:tr>
-              <a:tr h="329184">
+              <a:tr h="342900">
                 <a:tc>
                   <a:txBody>
                     <a:bodyPr/>
@@ -2753,7 +2714,7 @@
                           <a:ea typeface="Arial" pitchFamily="34" charset="-122"/>
                           <a:cs typeface="Arial" pitchFamily="34" charset="-120"/>
                         </a:rPr>
-                        <a:t>$XXX M</a:t>
+                        <a:t>$X.X B</a:t>
                       </a:r>
                       <a:endParaRPr lang="en-US" sz="950" dirty="0">
                         <a:latin typeface="Arial" charset="0"/>
@@ -2831,7 +2792,7 @@
                   </a:tcPr>
                 </a:tc>
               </a:tr>
-              <a:tr h="329184">
+              <a:tr h="342900">
                 <a:tc>
                   <a:txBody>
                     <a:bodyPr/>
@@ -3010,7 +2971,7 @@
                   </a:tcPr>
                 </a:tc>
               </a:tr>
-              <a:tr h="329184">
+              <a:tr h="342900">
                 <a:tc>
                   <a:txBody>
                     <a:bodyPr/>
@@ -3189,7 +3150,7 @@
                   </a:tcPr>
                 </a:tc>
               </a:tr>
-              <a:tr h="329184">
+              <a:tr h="342900">
                 <a:tc>
                   <a:txBody>
                     <a:bodyPr/>
@@ -3368,7 +3329,7 @@
                   </a:tcPr>
                 </a:tc>
               </a:tr>
-              <a:tr h="329184">
+              <a:tr h="342900">
                 <a:tc>
                   <a:txBody>
                     <a:bodyPr/>
@@ -3469,7 +3430,7 @@
                           <a:ea typeface="Arial" pitchFamily="34" charset="-122"/>
                           <a:cs typeface="Arial" pitchFamily="34" charset="-120"/>
                         </a:rPr>
-                        <a:t>$XXX M</a:t>
+                        <a:t>$X.X B</a:t>
                       </a:r>
                       <a:endParaRPr lang="en-US" sz="950" dirty="0">
                         <a:latin typeface="Arial" charset="0"/>
@@ -3547,7 +3508,7 @@
                   </a:tcPr>
                 </a:tc>
               </a:tr>
-              <a:tr h="329184">
+              <a:tr h="342900">
                 <a:tc>
                   <a:txBody>
                     <a:bodyPr/>
@@ -3726,7 +3687,7 @@
                   </a:tcPr>
                 </a:tc>
               </a:tr>
-              <a:tr h="329184">
+              <a:tr h="342900">
                 <a:tc>
                   <a:txBody>
                     <a:bodyPr/>
@@ -3905,7 +3866,7 @@
                   </a:tcPr>
                 </a:tc>
               </a:tr>
-              <a:tr h="329184">
+              <a:tr h="342900">
                 <a:tc>
                   <a:txBody>
                     <a:bodyPr/>
@@ -4006,7 +3967,7 @@
                           <a:ea typeface="Arial" pitchFamily="34" charset="-122"/>
                           <a:cs typeface="Arial" pitchFamily="34" charset="-120"/>
                         </a:rPr>
-                        <a:t>$XXX M</a:t>
+                        <a:t>$X.X B</a:t>
                       </a:r>
                       <a:endParaRPr lang="en-US" sz="950" dirty="0">
                         <a:latin typeface="Arial" charset="0"/>
@@ -4084,7 +4045,7 @@
                   </a:tcPr>
                 </a:tc>
               </a:tr>
-              <a:tr h="329184">
+              <a:tr h="342900">
                 <a:tc>
                   <a:txBody>
                     <a:bodyPr/>
@@ -4263,7 +4224,7 @@
                   </a:tcPr>
                 </a:tc>
               </a:tr>
-              <a:tr h="329184">
+              <a:tr h="342900">
                 <a:tc>
                   <a:txBody>
                     <a:bodyPr/>
@@ -4442,7 +4403,7 @@
                   </a:tcPr>
                 </a:tc>
               </a:tr>
-              <a:tr h="329184">
+              <a:tr h="342900">
                 <a:tc>
                   <a:txBody>
                     <a:bodyPr/>
@@ -4543,7 +4504,7 @@
                           <a:ea typeface="Arial" pitchFamily="34" charset="-122"/>
                           <a:cs typeface="Arial" pitchFamily="34" charset="-120"/>
                         </a:rPr>
-                        <a:t>$XXX M</a:t>
+                        <a:t>$X.X B</a:t>
                       </a:r>
                       <a:endParaRPr lang="en-US" sz="950" dirty="0">
                         <a:latin typeface="Arial" charset="0"/>
@@ -4627,13 +4588,13 @@
       </p:graphicFrame>
       <p:sp>
         <p:nvSpPr>
-          <p:cNvPr id="38" name="Shape 35"/>
-          <p:cNvSpPr/>
-          <p:nvPr/>
-        </p:nvSpPr>
-        <p:spPr>
-          <a:xfrm>
-            <a:off x="2286000" y="3035808"/>
+          <p:cNvPr id="37" name="Shape 34"/>
+          <p:cNvSpPr/>
+          <p:nvPr/>
+        </p:nvSpPr>
+        <p:spPr>
+          <a:xfrm>
+            <a:off x="2286000" y="2887218"/>
             <a:ext cx="932688" cy="219456"/>
           </a:xfrm>
           <a:prstGeom prst="roundRect">
@@ -4649,13 +4610,13 @@
       </p:sp>
       <p:sp>
         <p:nvSpPr>
-          <p:cNvPr id="39" name="Text 36"/>
-          <p:cNvSpPr/>
-          <p:nvPr/>
-        </p:nvSpPr>
-        <p:spPr>
-          <a:xfrm>
-            <a:off x="2286000" y="3035808"/>
+          <p:cNvPr id="38" name="Text 35"/>
+          <p:cNvSpPr/>
+          <p:nvPr/>
+        </p:nvSpPr>
+        <p:spPr>
+          <a:xfrm>
+            <a:off x="2286000" y="2887218"/>
             <a:ext cx="932688" cy="219456"/>
           </a:xfrm>
           <a:prstGeom prst="rect">
@@ -4702,13 +4663,13 @@
       </p:sp>
       <p:sp>
         <p:nvSpPr>
-          <p:cNvPr id="40" name="Shape 37"/>
-          <p:cNvSpPr/>
-          <p:nvPr/>
-        </p:nvSpPr>
-        <p:spPr>
-          <a:xfrm>
-            <a:off x="2286000" y="3364992"/>
+          <p:cNvPr id="39" name="Shape 36"/>
+          <p:cNvSpPr/>
+          <p:nvPr/>
+        </p:nvSpPr>
+        <p:spPr>
+          <a:xfrm>
+            <a:off x="2286000" y="3230118"/>
             <a:ext cx="932688" cy="219456"/>
           </a:xfrm>
           <a:prstGeom prst="roundRect">
@@ -4724,13 +4685,13 @@
       </p:sp>
       <p:sp>
         <p:nvSpPr>
-          <p:cNvPr id="41" name="Text 38"/>
-          <p:cNvSpPr/>
-          <p:nvPr/>
-        </p:nvSpPr>
-        <p:spPr>
-          <a:xfrm>
-            <a:off x="2286000" y="3364992"/>
+          <p:cNvPr id="40" name="Text 37"/>
+          <p:cNvSpPr/>
+          <p:nvPr/>
+        </p:nvSpPr>
+        <p:spPr>
+          <a:xfrm>
+            <a:off x="2286000" y="3230118"/>
             <a:ext cx="932688" cy="219456"/>
           </a:xfrm>
           <a:prstGeom prst="rect">
@@ -4777,13 +4738,13 @@
       </p:sp>
       <p:sp>
         <p:nvSpPr>
-          <p:cNvPr id="42" name="Shape 39"/>
-          <p:cNvSpPr/>
-          <p:nvPr/>
-        </p:nvSpPr>
-        <p:spPr>
-          <a:xfrm>
-            <a:off x="2286000" y="3694176"/>
+          <p:cNvPr id="41" name="Shape 38"/>
+          <p:cNvSpPr/>
+          <p:nvPr/>
+        </p:nvSpPr>
+        <p:spPr>
+          <a:xfrm>
+            <a:off x="2286000" y="3573018"/>
             <a:ext cx="932688" cy="219456"/>
           </a:xfrm>
           <a:prstGeom prst="roundRect">
@@ -4799,13 +4760,13 @@
       </p:sp>
       <p:sp>
         <p:nvSpPr>
-          <p:cNvPr id="43" name="Text 40"/>
-          <p:cNvSpPr/>
-          <p:nvPr/>
-        </p:nvSpPr>
-        <p:spPr>
-          <a:xfrm>
-            <a:off x="2286000" y="3694176"/>
+          <p:cNvPr id="42" name="Text 39"/>
+          <p:cNvSpPr/>
+          <p:nvPr/>
+        </p:nvSpPr>
+        <p:spPr>
+          <a:xfrm>
+            <a:off x="2286000" y="3573018"/>
             <a:ext cx="932688" cy="219456"/>
           </a:xfrm>
           <a:prstGeom prst="rect">
@@ -4852,13 +4813,13 @@
       </p:sp>
       <p:sp>
         <p:nvSpPr>
-          <p:cNvPr id="44" name="Shape 41"/>
-          <p:cNvSpPr/>
-          <p:nvPr/>
-        </p:nvSpPr>
-        <p:spPr>
-          <a:xfrm>
-            <a:off x="2286000" y="4023360"/>
+          <p:cNvPr id="43" name="Shape 40"/>
+          <p:cNvSpPr/>
+          <p:nvPr/>
+        </p:nvSpPr>
+        <p:spPr>
+          <a:xfrm>
+            <a:off x="2286000" y="3915918"/>
             <a:ext cx="932688" cy="219456"/>
           </a:xfrm>
           <a:prstGeom prst="roundRect">
@@ -4874,13 +4835,13 @@
       </p:sp>
       <p:sp>
         <p:nvSpPr>
-          <p:cNvPr id="45" name="Text 42"/>
-          <p:cNvSpPr/>
-          <p:nvPr/>
-        </p:nvSpPr>
-        <p:spPr>
-          <a:xfrm>
-            <a:off x="2286000" y="4023360"/>
+          <p:cNvPr id="44" name="Text 41"/>
+          <p:cNvSpPr/>
+          <p:nvPr/>
+        </p:nvSpPr>
+        <p:spPr>
+          <a:xfrm>
+            <a:off x="2286000" y="3915918"/>
             <a:ext cx="932688" cy="219456"/>
           </a:xfrm>
           <a:prstGeom prst="rect">
@@ -4927,13 +4888,13 @@
       </p:sp>
       <p:sp>
         <p:nvSpPr>
-          <p:cNvPr id="46" name="Shape 43"/>
-          <p:cNvSpPr/>
-          <p:nvPr/>
-        </p:nvSpPr>
-        <p:spPr>
-          <a:xfrm>
-            <a:off x="2286000" y="4352544"/>
+          <p:cNvPr id="45" name="Shape 42"/>
+          <p:cNvSpPr/>
+          <p:nvPr/>
+        </p:nvSpPr>
+        <p:spPr>
+          <a:xfrm>
+            <a:off x="2286000" y="4258818"/>
             <a:ext cx="932688" cy="219456"/>
           </a:xfrm>
           <a:prstGeom prst="roundRect">
@@ -4949,13 +4910,13 @@
       </p:sp>
       <p:sp>
         <p:nvSpPr>
-          <p:cNvPr id="47" name="Text 44"/>
-          <p:cNvSpPr/>
-          <p:nvPr/>
-        </p:nvSpPr>
-        <p:spPr>
-          <a:xfrm>
-            <a:off x="2286000" y="4352544"/>
+          <p:cNvPr id="46" name="Text 43"/>
+          <p:cNvSpPr/>
+          <p:nvPr/>
+        </p:nvSpPr>
+        <p:spPr>
+          <a:xfrm>
+            <a:off x="2286000" y="4258818"/>
             <a:ext cx="932688" cy="219456"/>
           </a:xfrm>
           <a:prstGeom prst="rect">
@@ -5002,14 +4963,14 @@
       </p:sp>
       <p:sp>
         <p:nvSpPr>
-          <p:cNvPr id="48" name="Shape 45"/>
-          <p:cNvSpPr/>
-          <p:nvPr/>
-        </p:nvSpPr>
-        <p:spPr>
-          <a:xfrm>
-            <a:off x="2286000" y="4681728"/>
-            <a:ext cx="731520" cy="219456"/>
+          <p:cNvPr id="47" name="Shape 44"/>
+          <p:cNvSpPr/>
+          <p:nvPr/>
+        </p:nvSpPr>
+        <p:spPr>
+          <a:xfrm>
+            <a:off x="2286000" y="4601718"/>
+            <a:ext cx="932688" cy="219456"/>
           </a:xfrm>
           <a:prstGeom prst="roundRect">
             <a:avLst>
@@ -5017,6 +4978,306 @@
             </a:avLst>
           </a:prstGeom>
           <a:solidFill>
+            <a:srgbClr val="E7F3E7"/>
+          </a:solidFill>
+          <a:ln/>
+        </p:spPr>
+      </p:sp>
+      <p:sp>
+        <p:nvSpPr>
+          <p:cNvPr id="48" name="Text 45"/>
+          <p:cNvSpPr/>
+          <p:nvPr/>
+        </p:nvSpPr>
+        <p:spPr>
+          <a:xfrm>
+            <a:off x="2286000" y="4601718"/>
+            <a:ext cx="932688" cy="219456"/>
+          </a:xfrm>
+          <a:prstGeom prst="rect">
+            <a:avLst/>
+          </a:prstGeom>
+          <a:noFill/>
+          <a:ln/>
+        </p:spPr>
+        <p:txBody>
+          <a:bodyPr wrap="square" lIns="0" tIns="0" rIns="0" bIns="0" rtlCol="0" anchor="ctr"/>
+          <a:lstStyle/>
+          <a:p>
+            <a:pPr algn="ctr" indent="0" marL="0">
+              <a:buNone/>
+            </a:pPr>
+            <a:r>
+              <a:rPr lang="en-US" sz="650" dirty="0">
+                <a:solidFill>
+                  <a:srgbClr val="0CA30C"/>
+                </a:solidFill>
+                <a:latin typeface="Arial" pitchFamily="34" charset="0"/>
+                <a:ea typeface="Arial" pitchFamily="34" charset="-122"/>
+                <a:cs typeface="Arial" pitchFamily="34" charset="-120"/>
+              </a:rPr>
+              <a:t>● </a:t>
+            </a:r>
+            <a:pPr algn="ctr" indent="0" marL="0">
+              <a:buNone/>
+            </a:pPr>
+            <a:r>
+              <a:rPr lang="en-US" sz="800" b="1" dirty="0">
+                <a:solidFill>
+                  <a:srgbClr val="006300"/>
+                </a:solidFill>
+                <a:latin typeface="Arial" pitchFamily="34" charset="0"/>
+                <a:ea typeface="Arial" pitchFamily="34" charset="-122"/>
+                <a:cs typeface="Arial" pitchFamily="34" charset="-120"/>
+              </a:rPr>
+              <a:t>Announced</a:t>
+            </a:r>
+            <a:endParaRPr lang="en-US" sz="650" dirty="0"/>
+          </a:p>
+        </p:txBody>
+      </p:sp>
+      <p:sp>
+        <p:nvSpPr>
+          <p:cNvPr id="49" name="Shape 46"/>
+          <p:cNvSpPr/>
+          <p:nvPr/>
+        </p:nvSpPr>
+        <p:spPr>
+          <a:xfrm>
+            <a:off x="2286000" y="4944618"/>
+            <a:ext cx="1060704" cy="219456"/>
+          </a:xfrm>
+          <a:prstGeom prst="roundRect">
+            <a:avLst>
+              <a:gd name="adj" fmla="val 50000"/>
+            </a:avLst>
+          </a:prstGeom>
+          <a:solidFill>
+            <a:srgbClr val="F0EFEC"/>
+          </a:solidFill>
+          <a:ln/>
+        </p:spPr>
+      </p:sp>
+      <p:sp>
+        <p:nvSpPr>
+          <p:cNvPr id="50" name="Text 47"/>
+          <p:cNvSpPr/>
+          <p:nvPr/>
+        </p:nvSpPr>
+        <p:spPr>
+          <a:xfrm>
+            <a:off x="2286000" y="4944618"/>
+            <a:ext cx="1060704" cy="219456"/>
+          </a:xfrm>
+          <a:prstGeom prst="rect">
+            <a:avLst/>
+          </a:prstGeom>
+          <a:noFill/>
+          <a:ln/>
+        </p:spPr>
+        <p:txBody>
+          <a:bodyPr wrap="square" lIns="0" tIns="0" rIns="0" bIns="0" rtlCol="0" anchor="ctr"/>
+          <a:lstStyle/>
+          <a:p>
+            <a:pPr algn="ctr" indent="0" marL="0">
+              <a:buNone/>
+            </a:pPr>
+            <a:r>
+              <a:rPr lang="en-US" sz="650" dirty="0">
+                <a:solidFill>
+                  <a:srgbClr val="898781"/>
+                </a:solidFill>
+                <a:latin typeface="Arial" pitchFamily="34" charset="0"/>
+                <a:ea typeface="Arial" pitchFamily="34" charset="-122"/>
+                <a:cs typeface="Arial" pitchFamily="34" charset="-120"/>
+              </a:rPr>
+              <a:t>● </a:t>
+            </a:r>
+            <a:pPr algn="ctr" indent="0" marL="0">
+              <a:buNone/>
+            </a:pPr>
+            <a:r>
+              <a:rPr lang="en-US" sz="800" b="1" dirty="0">
+                <a:solidFill>
+                  <a:srgbClr val="52514E"/>
+                </a:solidFill>
+                <a:latin typeface="Arial" pitchFamily="34" charset="0"/>
+                <a:ea typeface="Arial" pitchFamily="34" charset="-122"/>
+                <a:cs typeface="Arial" pitchFamily="34" charset="-120"/>
+              </a:rPr>
+              <a:t>Consultation</a:t>
+            </a:r>
+            <a:endParaRPr lang="en-US" sz="650" dirty="0"/>
+          </a:p>
+        </p:txBody>
+      </p:sp>
+      <p:sp>
+        <p:nvSpPr>
+          <p:cNvPr id="51" name="Shape 48"/>
+          <p:cNvSpPr/>
+          <p:nvPr/>
+        </p:nvSpPr>
+        <p:spPr>
+          <a:xfrm>
+            <a:off x="2286000" y="5287518"/>
+            <a:ext cx="1060704" cy="219456"/>
+          </a:xfrm>
+          <a:prstGeom prst="roundRect">
+            <a:avLst>
+              <a:gd name="adj" fmla="val 50000"/>
+            </a:avLst>
+          </a:prstGeom>
+          <a:solidFill>
+            <a:srgbClr val="F0EFEC"/>
+          </a:solidFill>
+          <a:ln/>
+        </p:spPr>
+      </p:sp>
+      <p:sp>
+        <p:nvSpPr>
+          <p:cNvPr id="52" name="Text 49"/>
+          <p:cNvSpPr/>
+          <p:nvPr/>
+        </p:nvSpPr>
+        <p:spPr>
+          <a:xfrm>
+            <a:off x="2286000" y="5287518"/>
+            <a:ext cx="1060704" cy="219456"/>
+          </a:xfrm>
+          <a:prstGeom prst="rect">
+            <a:avLst/>
+          </a:prstGeom>
+          <a:noFill/>
+          <a:ln/>
+        </p:spPr>
+        <p:txBody>
+          <a:bodyPr wrap="square" lIns="0" tIns="0" rIns="0" bIns="0" rtlCol="0" anchor="ctr"/>
+          <a:lstStyle/>
+          <a:p>
+            <a:pPr algn="ctr" indent="0" marL="0">
+              <a:buNone/>
+            </a:pPr>
+            <a:r>
+              <a:rPr lang="en-US" sz="650" dirty="0">
+                <a:solidFill>
+                  <a:srgbClr val="898781"/>
+                </a:solidFill>
+                <a:latin typeface="Arial" pitchFamily="34" charset="0"/>
+                <a:ea typeface="Arial" pitchFamily="34" charset="-122"/>
+                <a:cs typeface="Arial" pitchFamily="34" charset="-120"/>
+              </a:rPr>
+              <a:t>● </a:t>
+            </a:r>
+            <a:pPr algn="ctr" indent="0" marL="0">
+              <a:buNone/>
+            </a:pPr>
+            <a:r>
+              <a:rPr lang="en-US" sz="800" b="1" dirty="0">
+                <a:solidFill>
+                  <a:srgbClr val="52514E"/>
+                </a:solidFill>
+                <a:latin typeface="Arial" pitchFamily="34" charset="0"/>
+                <a:ea typeface="Arial" pitchFamily="34" charset="-122"/>
+                <a:cs typeface="Arial" pitchFamily="34" charset="-120"/>
+              </a:rPr>
+              <a:t>Consultation</a:t>
+            </a:r>
+            <a:endParaRPr lang="en-US" sz="650" dirty="0"/>
+          </a:p>
+        </p:txBody>
+      </p:sp>
+      <p:sp>
+        <p:nvSpPr>
+          <p:cNvPr id="53" name="Shape 50"/>
+          <p:cNvSpPr/>
+          <p:nvPr/>
+        </p:nvSpPr>
+        <p:spPr>
+          <a:xfrm>
+            <a:off x="2286000" y="5630418"/>
+            <a:ext cx="1060704" cy="219456"/>
+          </a:xfrm>
+          <a:prstGeom prst="roundRect">
+            <a:avLst>
+              <a:gd name="adj" fmla="val 50000"/>
+            </a:avLst>
+          </a:prstGeom>
+          <a:solidFill>
+            <a:srgbClr val="F0EFEC"/>
+          </a:solidFill>
+          <a:ln/>
+        </p:spPr>
+      </p:sp>
+      <p:sp>
+        <p:nvSpPr>
+          <p:cNvPr id="54" name="Text 51"/>
+          <p:cNvSpPr/>
+          <p:nvPr/>
+        </p:nvSpPr>
+        <p:spPr>
+          <a:xfrm>
+            <a:off x="2286000" y="5630418"/>
+            <a:ext cx="1060704" cy="219456"/>
+          </a:xfrm>
+          <a:prstGeom prst="rect">
+            <a:avLst/>
+          </a:prstGeom>
+          <a:noFill/>
+          <a:ln/>
+        </p:spPr>
+        <p:txBody>
+          <a:bodyPr wrap="square" lIns="0" tIns="0" rIns="0" bIns="0" rtlCol="0" anchor="ctr"/>
+          <a:lstStyle/>
+          <a:p>
+            <a:pPr algn="ctr" indent="0" marL="0">
+              <a:buNone/>
+            </a:pPr>
+            <a:r>
+              <a:rPr lang="en-US" sz="650" dirty="0">
+                <a:solidFill>
+                  <a:srgbClr val="898781"/>
+                </a:solidFill>
+                <a:latin typeface="Arial" pitchFamily="34" charset="0"/>
+                <a:ea typeface="Arial" pitchFamily="34" charset="-122"/>
+                <a:cs typeface="Arial" pitchFamily="34" charset="-120"/>
+              </a:rPr>
+              <a:t>● </a:t>
+            </a:r>
+            <a:pPr algn="ctr" indent="0" marL="0">
+              <a:buNone/>
+            </a:pPr>
+            <a:r>
+              <a:rPr lang="en-US" sz="800" b="1" dirty="0">
+                <a:solidFill>
+                  <a:srgbClr val="52514E"/>
+                </a:solidFill>
+                <a:latin typeface="Arial" pitchFamily="34" charset="0"/>
+                <a:ea typeface="Arial" pitchFamily="34" charset="-122"/>
+                <a:cs typeface="Arial" pitchFamily="34" charset="-120"/>
+              </a:rPr>
+              <a:t>Consultation</a:t>
+            </a:r>
+            <a:endParaRPr lang="en-US" sz="650" dirty="0"/>
+          </a:p>
+        </p:txBody>
+      </p:sp>
+      <p:sp>
+        <p:nvSpPr>
+          <p:cNvPr id="55" name="Shape 52"/>
+          <p:cNvSpPr/>
+          <p:nvPr/>
+        </p:nvSpPr>
+        <p:spPr>
+          <a:xfrm>
+            <a:off x="2286000" y="5973318"/>
+            <a:ext cx="731520" cy="219456"/>
+          </a:xfrm>
+          <a:prstGeom prst="roundRect">
+            <a:avLst>
+              <a:gd name="adj" fmla="val 50000"/>
+            </a:avLst>
+          </a:prstGeom>
+          <a:solidFill>
             <a:srgbClr val="E5EEFB"/>
           </a:solidFill>
           <a:ln/>
@@ -5024,13 +5285,13 @@
       </p:sp>
       <p:sp>
         <p:nvSpPr>
-          <p:cNvPr id="49" name="Text 46"/>
-          <p:cNvSpPr/>
-          <p:nvPr/>
-        </p:nvSpPr>
-        <p:spPr>
-          <a:xfrm>
-            <a:off x="2286000" y="4681728"/>
+          <p:cNvPr id="56" name="Text 53"/>
+          <p:cNvSpPr/>
+          <p:nvPr/>
+        </p:nvSpPr>
+        <p:spPr>
+          <a:xfrm>
+            <a:off x="2286000" y="5973318"/>
             <a:ext cx="731520" cy="219456"/>
           </a:xfrm>
           <a:prstGeom prst="rect">
@@ -5077,13 +5338,13 @@
       </p:sp>
       <p:sp>
         <p:nvSpPr>
-          <p:cNvPr id="50" name="Shape 47"/>
-          <p:cNvSpPr/>
-          <p:nvPr/>
-        </p:nvSpPr>
-        <p:spPr>
-          <a:xfrm>
-            <a:off x="2286000" y="5010912"/>
+          <p:cNvPr id="57" name="Shape 54"/>
+          <p:cNvSpPr/>
+          <p:nvPr/>
+        </p:nvSpPr>
+        <p:spPr>
+          <a:xfrm>
+            <a:off x="2286000" y="6316218"/>
             <a:ext cx="731520" cy="219456"/>
           </a:xfrm>
           <a:prstGeom prst="roundRect">
@@ -5099,13 +5360,13 @@
       </p:sp>
       <p:sp>
         <p:nvSpPr>
-          <p:cNvPr id="51" name="Text 48"/>
-          <p:cNvSpPr/>
-          <p:nvPr/>
-        </p:nvSpPr>
-        <p:spPr>
-          <a:xfrm>
-            <a:off x="2286000" y="5010912"/>
+          <p:cNvPr id="58" name="Text 55"/>
+          <p:cNvSpPr/>
+          <p:nvPr/>
+        </p:nvSpPr>
+        <p:spPr>
+          <a:xfrm>
+            <a:off x="2286000" y="6316218"/>
             <a:ext cx="731520" cy="219456"/>
           </a:xfrm>
           <a:prstGeom prst="rect">
@@ -5152,13 +5413,13 @@
       </p:sp>
       <p:sp>
         <p:nvSpPr>
-          <p:cNvPr id="52" name="Shape 49"/>
-          <p:cNvSpPr/>
-          <p:nvPr/>
-        </p:nvSpPr>
-        <p:spPr>
-          <a:xfrm>
-            <a:off x="2286000" y="5340096"/>
+          <p:cNvPr id="59" name="Shape 56"/>
+          <p:cNvSpPr/>
+          <p:nvPr/>
+        </p:nvSpPr>
+        <p:spPr>
+          <a:xfrm>
+            <a:off x="2286000" y="6659118"/>
             <a:ext cx="731520" cy="219456"/>
           </a:xfrm>
           <a:prstGeom prst="roundRect">
@@ -5174,13 +5435,13 @@
       </p:sp>
       <p:sp>
         <p:nvSpPr>
-          <p:cNvPr id="53" name="Text 50"/>
-          <p:cNvSpPr/>
-          <p:nvPr/>
-        </p:nvSpPr>
-        <p:spPr>
-          <a:xfrm>
-            <a:off x="2286000" y="5340096"/>
+          <p:cNvPr id="60" name="Text 57"/>
+          <p:cNvSpPr/>
+          <p:nvPr/>
+        </p:nvSpPr>
+        <p:spPr>
+          <a:xfrm>
+            <a:off x="2286000" y="6659118"/>
             <a:ext cx="731520" cy="219456"/>
           </a:xfrm>
           <a:prstGeom prst="rect">
@@ -5227,13 +5488,13 @@
       </p:sp>
       <p:sp>
         <p:nvSpPr>
-          <p:cNvPr id="54" name="Shape 51"/>
-          <p:cNvSpPr/>
-          <p:nvPr/>
-        </p:nvSpPr>
-        <p:spPr>
-          <a:xfrm>
-            <a:off x="2286000" y="5669280"/>
+          <p:cNvPr id="61" name="Shape 58"/>
+          <p:cNvSpPr/>
+          <p:nvPr/>
+        </p:nvSpPr>
+        <p:spPr>
+          <a:xfrm>
+            <a:off x="2286000" y="7002018"/>
             <a:ext cx="731520" cy="219456"/>
           </a:xfrm>
           <a:prstGeom prst="roundRect">
@@ -5249,13 +5510,13 @@
       </p:sp>
       <p:sp>
         <p:nvSpPr>
-          <p:cNvPr id="55" name="Text 52"/>
-          <p:cNvSpPr/>
-          <p:nvPr/>
-        </p:nvSpPr>
-        <p:spPr>
-          <a:xfrm>
-            <a:off x="2286000" y="5669280"/>
+          <p:cNvPr id="62" name="Text 59"/>
+          <p:cNvSpPr/>
+          <p:nvPr/>
+        </p:nvSpPr>
+        <p:spPr>
+          <a:xfrm>
+            <a:off x="2286000" y="7002018"/>
             <a:ext cx="731520" cy="219456"/>
           </a:xfrm>
           <a:prstGeom prst="rect">
@@ -5302,14 +5563,1492 @@
       </p:sp>
       <p:sp>
         <p:nvSpPr>
-          <p:cNvPr id="56" name="Shape 53"/>
-          <p:cNvSpPr/>
-          <p:nvPr/>
-        </p:nvSpPr>
-        <p:spPr>
-          <a:xfrm>
-            <a:off x="2286000" y="5998464"/>
-            <a:ext cx="731520" cy="219456"/>
+          <p:cNvPr id="63" name="Shape 60"/>
+          <p:cNvSpPr/>
+          <p:nvPr/>
+        </p:nvSpPr>
+        <p:spPr>
+          <a:xfrm>
+            <a:off x="6126480" y="2162556"/>
+            <a:ext cx="274320" cy="187452"/>
+          </a:xfrm>
+          <a:prstGeom prst="roundRect">
+            <a:avLst>
+              <a:gd name="adj" fmla="val 9756"/>
+            </a:avLst>
+          </a:prstGeom>
+          <a:solidFill>
+            <a:srgbClr val="FFFFFF"/>
+          </a:solidFill>
+          <a:ln w="9525">
+            <a:solidFill>
+              <a:srgbClr val="D5D3CC"/>
+            </a:solidFill>
+            <a:prstDash val="solid"/>
+          </a:ln>
+        </p:spPr>
+      </p:sp>
+      <p:sp>
+        <p:nvSpPr>
+          <p:cNvPr id="64" name="Shape 61"/>
+          <p:cNvSpPr/>
+          <p:nvPr/>
+        </p:nvSpPr>
+        <p:spPr>
+          <a:xfrm>
+            <a:off x="6211153" y="2203795"/>
+            <a:ext cx="104973" cy="104973"/>
+          </a:xfrm>
+          <a:prstGeom prst="ellipse">
+            <a:avLst/>
+          </a:prstGeom>
+          <a:solidFill>
+            <a:srgbClr val="003478"/>
+          </a:solidFill>
+          <a:ln/>
+        </p:spPr>
+      </p:sp>
+      <p:sp>
+        <p:nvSpPr>
+          <p:cNvPr id="65" name="Shape 62"/>
+          <p:cNvSpPr/>
+          <p:nvPr/>
+        </p:nvSpPr>
+        <p:spPr>
+          <a:xfrm>
+            <a:off x="6211153" y="2203795"/>
+            <a:ext cx="104973" cy="104973"/>
+          </a:xfrm>
+          <a:prstGeom prst="pie">
+            <a:avLst>
+              <a:gd name="adj1" fmla="val 10800000"/>
+              <a:gd name="adj2" fmla="val 21600000"/>
+            </a:avLst>
+          </a:prstGeom>
+          <a:solidFill>
+            <a:srgbClr val="C60C30"/>
+          </a:solidFill>
+          <a:ln/>
+        </p:spPr>
+      </p:sp>
+      <p:sp>
+        <p:nvSpPr>
+          <p:cNvPr id="66" name="Text 63"/>
+          <p:cNvSpPr/>
+          <p:nvPr/>
+        </p:nvSpPr>
+        <p:spPr>
+          <a:xfrm>
+            <a:off x="6473952" y="2121408"/>
+            <a:ext cx="1463040" cy="274320"/>
+          </a:xfrm>
+          <a:prstGeom prst="rect">
+            <a:avLst/>
+          </a:prstGeom>
+          <a:noFill/>
+          <a:ln/>
+        </p:spPr>
+        <p:txBody>
+          <a:bodyPr wrap="square" lIns="0" tIns="0" rIns="0" bIns="0" rtlCol="0" anchor="ctr"/>
+          <a:lstStyle/>
+          <a:p>
+            <a:pPr indent="0" marL="0">
+              <a:buNone/>
+            </a:pPr>
+            <a:r>
+              <a:rPr lang="en-US" sz="1400" b="1" spc="100" kern="0" dirty="0">
+                <a:solidFill>
+                  <a:srgbClr val="0B0B0B"/>
+                </a:solidFill>
+                <a:latin typeface="Arial" pitchFamily="34" charset="0"/>
+                <a:ea typeface="Arial" pitchFamily="34" charset="-122"/>
+                <a:cs typeface="Arial" pitchFamily="34" charset="-120"/>
+              </a:rPr>
+              <a:t>KOREA</a:t>
+            </a:r>
+            <a:endParaRPr lang="en-US" sz="1400" dirty="0"/>
+          </a:p>
+        </p:txBody>
+      </p:sp>
+      <p:sp>
+        <p:nvSpPr>
+          <p:cNvPr id="67" name="Text 64"/>
+          <p:cNvSpPr/>
+          <p:nvPr/>
+        </p:nvSpPr>
+        <p:spPr>
+          <a:xfrm>
+            <a:off x="6931152" y="2171700"/>
+            <a:ext cx="2743200" cy="201168"/>
+          </a:xfrm>
+          <a:prstGeom prst="rect">
+            <a:avLst/>
+          </a:prstGeom>
+          <a:noFill/>
+          <a:ln/>
+        </p:spPr>
+        <p:txBody>
+          <a:bodyPr wrap="square" lIns="0" tIns="0" rIns="0" bIns="0" rtlCol="0" anchor="ctr"/>
+          <a:lstStyle/>
+          <a:p>
+            <a:pPr algn="r" indent="0" marL="0">
+              <a:buNone/>
+            </a:pPr>
+            <a:r>
+              <a:rPr lang="en-US" sz="1000" b="1" dirty="0">
+                <a:solidFill>
+                  <a:srgbClr val="0B0B0B"/>
+                </a:solidFill>
+                <a:latin typeface="Arial" pitchFamily="34" charset="0"/>
+                <a:ea typeface="Arial" pitchFamily="34" charset="-122"/>
+                <a:cs typeface="Arial" pitchFamily="34" charset="-120"/>
+              </a:rPr>
+              <a:t>6 deals</a:t>
+            </a:r>
+            <a:pPr algn="r" indent="0" marL="0">
+              <a:buNone/>
+            </a:pPr>
+            <a:r>
+              <a:rPr lang="en-US" sz="1000" dirty="0">
+                <a:solidFill>
+                  <a:srgbClr val="52514E"/>
+                </a:solidFill>
+                <a:latin typeface="Arial" pitchFamily="34" charset="0"/>
+                <a:ea typeface="Arial" pitchFamily="34" charset="-122"/>
+                <a:cs typeface="Arial" pitchFamily="34" charset="-120"/>
+              </a:rPr>
+              <a:t>  ·  $XX.X B total</a:t>
+            </a:r>
+            <a:endParaRPr lang="en-US" sz="1000" dirty="0"/>
+          </a:p>
+        </p:txBody>
+      </p:sp>
+      <p:sp>
+        <p:nvSpPr>
+          <p:cNvPr id="68" name="Shape 65"/>
+          <p:cNvSpPr/>
+          <p:nvPr/>
+        </p:nvSpPr>
+        <p:spPr>
+          <a:xfrm>
+            <a:off x="6126480" y="2459736"/>
+            <a:ext cx="3547872" cy="25603"/>
+          </a:xfrm>
+          <a:prstGeom prst="rect">
+            <a:avLst/>
+          </a:prstGeom>
+          <a:solidFill>
+            <a:srgbClr val="003478"/>
+          </a:solidFill>
+          <a:ln/>
+        </p:spPr>
+      </p:sp>
+      <p:graphicFrame>
+        <p:nvGraphicFramePr>
+          <p:cNvPr id="3" name="Table 1"/>
+          <p:cNvGraphicFramePr>
+            <a:graphicFrameLocks noGrp="1"/>
+          </p:cNvGraphicFramePr>
+          <p:nvPr>
+            <p:extLst>
+              <p:ext uri="{D42A27DB-BD31-4B8C-83A1-F6EECF244321}">
+                <p14:modId xmlns:p14="http://schemas.microsoft.com/office/powerpoint/2010/main" val="1579011935"/>
+              </p:ext>
+            </p:extLst>
+          </p:nvPr>
+        </p:nvGraphicFramePr>
+        <p:xfrm>
+          <a:off x="6126480" y="2569464"/>
+          <a:ext cx="3547872" cy="914400"/>
+        </p:xfrm>
+        <a:graphic>
+          <a:graphicData uri="http://schemas.openxmlformats.org/drawingml/2006/table">
+            <a:tbl>
+              <a:tblPr/>
+              <a:tblGrid>
+                <a:gridCol w="932688"/>
+                <a:gridCol w="1133856"/>
+                <a:gridCol w="640080"/>
+                <a:gridCol w="841248"/>
+              </a:tblGrid>
+              <a:tr h="256032">
+                <a:tc>
+                  <a:txBody>
+                    <a:bodyPr/>
+                    <a:lstStyle/>
+                    <a:p>
+                      <a:pPr indent="0" marL="0">
+                        <a:buNone/>
+                      </a:pPr>
+                      <a:r>
+                        <a:rPr lang="en-US" sz="750" b="1" dirty="0">
+                          <a:solidFill>
+                            <a:srgbClr val="898781"/>
+                          </a:solidFill>
+                          <a:latin typeface="Arial" pitchFamily="34" charset="0"/>
+                          <a:ea typeface="Arial" pitchFamily="34" charset="-122"/>
+                          <a:cs typeface="Arial" pitchFamily="34" charset="-120"/>
+                        </a:rPr>
+                        <a:t>COMPANY</a:t>
+                      </a:r>
+                      <a:endParaRPr lang="en-US" sz="750" dirty="0">
+                        <a:latin typeface="Arial" charset="0"/>
+                        <a:ea typeface="Arial" charset="0"/>
+                        <a:cs typeface="Arial" charset="0"/>
+                      </a:endParaRPr>
+                    </a:p>
+                  </a:txBody>
+                  <a:tcPr marL="27432" marR="27432" marT="18288" marB="18288" anchor="ctr">
+                    <a:lnL w="0" cap="flat" cmpd="sng" algn="ctr">
+                      <a:noFill/>
+                    </a:lnL>
+                    <a:lnR w="0" cap="flat" cmpd="sng" algn="ctr">
+                      <a:noFill/>
+                    </a:lnR>
+                    <a:lnT w="0" cap="flat" cmpd="sng" algn="ctr">
+                      <a:noFill/>
+                    </a:lnT>
+                    <a:lnB w="15875" cap="flat" cmpd="sng" algn="ctr">
+                      <a:solidFill>
+                        <a:srgbClr val="E1E0D9"/>
+                      </a:solidFill>
+                      <a:prstDash val="solid"/>
+                      <a:round/>
+                      <a:headEnd type="none" w="med" len="med"/>
+                      <a:tailEnd type="none" w="med" len="med"/>
+                    </a:lnB>
+                  </a:tcPr>
+                </a:tc>
+                <a:tc>
+                  <a:txBody>
+                    <a:bodyPr/>
+                    <a:lstStyle/>
+                    <a:p>
+                      <a:pPr indent="0" marL="0">
+                        <a:buNone/>
+                      </a:pPr>
+                      <a:r>
+                        <a:rPr lang="en-US" sz="750" b="1" dirty="0">
+                          <a:solidFill>
+                            <a:srgbClr val="898781"/>
+                          </a:solidFill>
+                          <a:latin typeface="Arial" pitchFamily="34" charset="0"/>
+                          <a:ea typeface="Arial" pitchFamily="34" charset="-122"/>
+                          <a:cs typeface="Arial" pitchFamily="34" charset="-120"/>
+                        </a:rPr>
+                        <a:t>STAGE</a:t>
+                      </a:r>
+                      <a:endParaRPr lang="en-US" sz="750" dirty="0">
+                        <a:latin typeface="Arial" charset="0"/>
+                        <a:ea typeface="Arial" charset="0"/>
+                        <a:cs typeface="Arial" charset="0"/>
+                      </a:endParaRPr>
+                    </a:p>
+                  </a:txBody>
+                  <a:tcPr marL="27432" marR="27432" marT="18288" marB="18288" anchor="ctr">
+                    <a:lnL w="0" cap="flat" cmpd="sng" algn="ctr">
+                      <a:noFill/>
+                    </a:lnL>
+                    <a:lnR w="0" cap="flat" cmpd="sng" algn="ctr">
+                      <a:noFill/>
+                    </a:lnR>
+                    <a:lnT w="0" cap="flat" cmpd="sng" algn="ctr">
+                      <a:noFill/>
+                    </a:lnT>
+                    <a:lnB w="15875" cap="flat" cmpd="sng" algn="ctr">
+                      <a:solidFill>
+                        <a:srgbClr val="E1E0D9"/>
+                      </a:solidFill>
+                      <a:prstDash val="solid"/>
+                      <a:round/>
+                      <a:headEnd type="none" w="med" len="med"/>
+                      <a:tailEnd type="none" w="med" len="med"/>
+                    </a:lnB>
+                  </a:tcPr>
+                </a:tc>
+                <a:tc>
+                  <a:txBody>
+                    <a:bodyPr/>
+                    <a:lstStyle/>
+                    <a:p>
+                      <a:pPr algn="r" indent="0" marL="0">
+                        <a:buNone/>
+                      </a:pPr>
+                      <a:r>
+                        <a:rPr lang="en-US" sz="750" b="1" dirty="0">
+                          <a:solidFill>
+                            <a:srgbClr val="898781"/>
+                          </a:solidFill>
+                          <a:latin typeface="Arial" pitchFamily="34" charset="0"/>
+                          <a:ea typeface="Arial" pitchFamily="34" charset="-122"/>
+                          <a:cs typeface="Arial" pitchFamily="34" charset="-120"/>
+                        </a:rPr>
+                        <a:t>DEAL SIZE</a:t>
+                      </a:r>
+                      <a:endParaRPr lang="en-US" sz="750" dirty="0">
+                        <a:latin typeface="Arial" charset="0"/>
+                        <a:ea typeface="Arial" charset="0"/>
+                        <a:cs typeface="Arial" charset="0"/>
+                      </a:endParaRPr>
+                    </a:p>
+                  </a:txBody>
+                  <a:tcPr marL="27432" marR="91440" marT="18288" marB="18288" anchor="ctr">
+                    <a:lnL w="0" cap="flat" cmpd="sng" algn="ctr">
+                      <a:noFill/>
+                    </a:lnL>
+                    <a:lnR w="0" cap="flat" cmpd="sng" algn="ctr">
+                      <a:noFill/>
+                    </a:lnR>
+                    <a:lnT w="0" cap="flat" cmpd="sng" algn="ctr">
+                      <a:noFill/>
+                    </a:lnT>
+                    <a:lnB w="15875" cap="flat" cmpd="sng" algn="ctr">
+                      <a:solidFill>
+                        <a:srgbClr val="E1E0D9"/>
+                      </a:solidFill>
+                      <a:prstDash val="solid"/>
+                      <a:round/>
+                      <a:headEnd type="none" w="med" len="med"/>
+                      <a:tailEnd type="none" w="med" len="med"/>
+                    </a:lnB>
+                  </a:tcPr>
+                </a:tc>
+                <a:tc>
+                  <a:txBody>
+                    <a:bodyPr/>
+                    <a:lstStyle/>
+                    <a:p>
+                      <a:pPr indent="0" marL="0">
+                        <a:buNone/>
+                      </a:pPr>
+                      <a:r>
+                        <a:rPr lang="en-US" sz="750" b="1" dirty="0">
+                          <a:solidFill>
+                            <a:srgbClr val="898781"/>
+                          </a:solidFill>
+                          <a:latin typeface="Arial" pitchFamily="34" charset="0"/>
+                          <a:ea typeface="Arial" pitchFamily="34" charset="-122"/>
+                          <a:cs typeface="Arial" pitchFamily="34" charset="-120"/>
+                        </a:rPr>
+                        <a:t>OWNER’S REP</a:t>
+                      </a:r>
+                      <a:endParaRPr lang="en-US" sz="750" dirty="0">
+                        <a:latin typeface="Arial" charset="0"/>
+                        <a:ea typeface="Arial" charset="0"/>
+                        <a:cs typeface="Arial" charset="0"/>
+                      </a:endParaRPr>
+                    </a:p>
+                  </a:txBody>
+                  <a:tcPr marL="91440" marR="27432" marT="18288" marB="18288" anchor="ctr">
+                    <a:lnL w="0" cap="flat" cmpd="sng" algn="ctr">
+                      <a:noFill/>
+                    </a:lnL>
+                    <a:lnR w="0" cap="flat" cmpd="sng" algn="ctr">
+                      <a:noFill/>
+                    </a:lnR>
+                    <a:lnT w="0" cap="flat" cmpd="sng" algn="ctr">
+                      <a:noFill/>
+                    </a:lnT>
+                    <a:lnB w="15875" cap="flat" cmpd="sng" algn="ctr">
+                      <a:solidFill>
+                        <a:srgbClr val="E1E0D9"/>
+                      </a:solidFill>
+                      <a:prstDash val="solid"/>
+                      <a:round/>
+                      <a:headEnd type="none" w="med" len="med"/>
+                      <a:tailEnd type="none" w="med" len="med"/>
+                    </a:lnB>
+                  </a:tcPr>
+                </a:tc>
+              </a:tr>
+              <a:tr h="342900">
+                <a:tc>
+                  <a:txBody>
+                    <a:bodyPr/>
+                    <a:lstStyle/>
+                    <a:p>
+                      <a:pPr indent="0" marL="0">
+                        <a:buNone/>
+                      </a:pPr>
+                      <a:r>
+                        <a:rPr lang="en-US" sz="950" b="1" dirty="0">
+                          <a:solidFill>
+                            <a:srgbClr val="0B0B0B"/>
+                          </a:solidFill>
+                          <a:latin typeface="Arial" pitchFamily="34" charset="0"/>
+                          <a:ea typeface="Arial" pitchFamily="34" charset="-122"/>
+                          <a:cs typeface="Arial" pitchFamily="34" charset="-120"/>
+                        </a:rPr>
+                        <a:t>Company 14</a:t>
+                      </a:r>
+                      <a:endParaRPr lang="en-US" sz="950" dirty="0">
+                        <a:latin typeface="Arial" charset="0"/>
+                        <a:ea typeface="Arial" charset="0"/>
+                        <a:cs typeface="Arial" charset="0"/>
+                      </a:endParaRPr>
+                    </a:p>
+                  </a:txBody>
+                  <a:tcPr marL="27432" marR="27432" marT="18288" marB="18288" anchor="ctr">
+                    <a:lnL w="0" cap="flat" cmpd="sng" algn="ctr">
+                      <a:noFill/>
+                    </a:lnL>
+                    <a:lnR w="0" cap="flat" cmpd="sng" algn="ctr">
+                      <a:noFill/>
+                    </a:lnR>
+                    <a:lnT w="0" cap="flat" cmpd="sng" algn="ctr">
+                      <a:noFill/>
+                    </a:lnT>
+                    <a:lnB w="9525" cap="flat" cmpd="sng" algn="ctr">
+                      <a:solidFill>
+                        <a:srgbClr val="E1E0D9"/>
+                      </a:solidFill>
+                      <a:prstDash val="solid"/>
+                      <a:round/>
+                      <a:headEnd type="none" w="med" len="med"/>
+                      <a:tailEnd type="none" w="med" len="med"/>
+                    </a:lnB>
+                  </a:tcPr>
+                </a:tc>
+                <a:tc>
+                  <a:txBody>
+                    <a:bodyPr/>
+                    <a:lstStyle/>
+                    <a:p>
+                      <a:pPr indent="0" marL="0">
+                        <a:buNone/>
+                      </a:pPr>
+                      <a:endParaRPr lang="en-US" sz="950" dirty="0">
+                        <a:latin typeface="Arial" charset="0"/>
+                        <a:ea typeface="Arial" charset="0"/>
+                        <a:cs typeface="Arial" charset="0"/>
+                      </a:endParaRPr>
+                    </a:p>
+                  </a:txBody>
+                  <a:tcPr marL="27432" marR="27432" marT="18288" marB="18288" anchor="ctr">
+                    <a:lnL w="0" cap="flat" cmpd="sng" algn="ctr">
+                      <a:noFill/>
+                    </a:lnL>
+                    <a:lnR w="0" cap="flat" cmpd="sng" algn="ctr">
+                      <a:noFill/>
+                    </a:lnR>
+                    <a:lnT w="0" cap="flat" cmpd="sng" algn="ctr">
+                      <a:noFill/>
+                    </a:lnT>
+                    <a:lnB w="9525" cap="flat" cmpd="sng" algn="ctr">
+                      <a:solidFill>
+                        <a:srgbClr val="E1E0D9"/>
+                      </a:solidFill>
+                      <a:prstDash val="solid"/>
+                      <a:round/>
+                      <a:headEnd type="none" w="med" len="med"/>
+                      <a:tailEnd type="none" w="med" len="med"/>
+                    </a:lnB>
+                  </a:tcPr>
+                </a:tc>
+                <a:tc>
+                  <a:txBody>
+                    <a:bodyPr/>
+                    <a:lstStyle/>
+                    <a:p>
+                      <a:pPr algn="r" indent="0" marL="0">
+                        <a:buNone/>
+                      </a:pPr>
+                      <a:r>
+                        <a:rPr lang="en-US" sz="950" dirty="0">
+                          <a:solidFill>
+                            <a:srgbClr val="0B0B0B"/>
+                          </a:solidFill>
+                          <a:latin typeface="Arial" pitchFamily="34" charset="0"/>
+                          <a:ea typeface="Arial" pitchFamily="34" charset="-122"/>
+                          <a:cs typeface="Arial" pitchFamily="34" charset="-120"/>
+                        </a:rPr>
+                        <a:t>$X.X B</a:t>
+                      </a:r>
+                      <a:endParaRPr lang="en-US" sz="950" dirty="0">
+                        <a:latin typeface="Arial" charset="0"/>
+                        <a:ea typeface="Arial" charset="0"/>
+                        <a:cs typeface="Arial" charset="0"/>
+                      </a:endParaRPr>
+                    </a:p>
+                  </a:txBody>
+                  <a:tcPr marL="27432" marR="91440" marT="18288" marB="18288" anchor="ctr">
+                    <a:lnL w="0" cap="flat" cmpd="sng" algn="ctr">
+                      <a:noFill/>
+                    </a:lnL>
+                    <a:lnR w="0" cap="flat" cmpd="sng" algn="ctr">
+                      <a:noFill/>
+                    </a:lnR>
+                    <a:lnT w="0" cap="flat" cmpd="sng" algn="ctr">
+                      <a:noFill/>
+                    </a:lnT>
+                    <a:lnB w="9525" cap="flat" cmpd="sng" algn="ctr">
+                      <a:solidFill>
+                        <a:srgbClr val="E1E0D9"/>
+                      </a:solidFill>
+                      <a:prstDash val="solid"/>
+                      <a:round/>
+                      <a:headEnd type="none" w="med" len="med"/>
+                      <a:tailEnd type="none" w="med" len="med"/>
+                    </a:lnB>
+                  </a:tcPr>
+                </a:tc>
+                <a:tc>
+                  <a:txBody>
+                    <a:bodyPr/>
+                    <a:lstStyle/>
+                    <a:p>
+                      <a:pPr indent="0" marL="0">
+                        <a:buNone/>
+                      </a:pPr>
+                      <a:r>
+                        <a:rPr lang="en-US" sz="950" dirty="0">
+                          <a:solidFill>
+                            <a:srgbClr val="52514E"/>
+                          </a:solidFill>
+                          <a:latin typeface="Arial" pitchFamily="34" charset="0"/>
+                          <a:ea typeface="Arial" pitchFamily="34" charset="-122"/>
+                          <a:cs typeface="Arial" pitchFamily="34" charset="-120"/>
+                        </a:rPr>
+                        <a:t>First Last</a:t>
+                      </a:r>
+                      <a:endParaRPr lang="en-US" sz="950" dirty="0">
+                        <a:latin typeface="Arial" charset="0"/>
+                        <a:ea typeface="Arial" charset="0"/>
+                        <a:cs typeface="Arial" charset="0"/>
+                      </a:endParaRPr>
+                    </a:p>
+                  </a:txBody>
+                  <a:tcPr marL="109728" marR="27432" marT="18288" marB="18288" anchor="ctr">
+                    <a:lnL w="0" cap="flat" cmpd="sng" algn="ctr">
+                      <a:noFill/>
+                    </a:lnL>
+                    <a:lnR w="0" cap="flat" cmpd="sng" algn="ctr">
+                      <a:noFill/>
+                    </a:lnR>
+                    <a:lnT w="0" cap="flat" cmpd="sng" algn="ctr">
+                      <a:noFill/>
+                    </a:lnT>
+                    <a:lnB w="9525" cap="flat" cmpd="sng" algn="ctr">
+                      <a:solidFill>
+                        <a:srgbClr val="E1E0D9"/>
+                      </a:solidFill>
+                      <a:prstDash val="solid"/>
+                      <a:round/>
+                      <a:headEnd type="none" w="med" len="med"/>
+                      <a:tailEnd type="none" w="med" len="med"/>
+                    </a:lnB>
+                  </a:tcPr>
+                </a:tc>
+              </a:tr>
+              <a:tr h="342900">
+                <a:tc>
+                  <a:txBody>
+                    <a:bodyPr/>
+                    <a:lstStyle/>
+                    <a:p>
+                      <a:pPr indent="0" marL="0">
+                        <a:buNone/>
+                      </a:pPr>
+                      <a:r>
+                        <a:rPr lang="en-US" sz="950" b="1" dirty="0">
+                          <a:solidFill>
+                            <a:srgbClr val="0B0B0B"/>
+                          </a:solidFill>
+                          <a:latin typeface="Arial" pitchFamily="34" charset="0"/>
+                          <a:ea typeface="Arial" pitchFamily="34" charset="-122"/>
+                          <a:cs typeface="Arial" pitchFamily="34" charset="-120"/>
+                        </a:rPr>
+                        <a:t>Company 15</a:t>
+                      </a:r>
+                      <a:endParaRPr lang="en-US" sz="950" dirty="0">
+                        <a:latin typeface="Arial" charset="0"/>
+                        <a:ea typeface="Arial" charset="0"/>
+                        <a:cs typeface="Arial" charset="0"/>
+                      </a:endParaRPr>
+                    </a:p>
+                  </a:txBody>
+                  <a:tcPr marL="27432" marR="27432" marT="18288" marB="18288" anchor="ctr">
+                    <a:lnL w="0" cap="flat" cmpd="sng" algn="ctr">
+                      <a:noFill/>
+                    </a:lnL>
+                    <a:lnR w="0" cap="flat" cmpd="sng" algn="ctr">
+                      <a:noFill/>
+                    </a:lnR>
+                    <a:lnT w="0" cap="flat" cmpd="sng" algn="ctr">
+                      <a:noFill/>
+                    </a:lnT>
+                    <a:lnB w="9525" cap="flat" cmpd="sng" algn="ctr">
+                      <a:solidFill>
+                        <a:srgbClr val="E1E0D9"/>
+                      </a:solidFill>
+                      <a:prstDash val="solid"/>
+                      <a:round/>
+                      <a:headEnd type="none" w="med" len="med"/>
+                      <a:tailEnd type="none" w="med" len="med"/>
+                    </a:lnB>
+                  </a:tcPr>
+                </a:tc>
+                <a:tc>
+                  <a:txBody>
+                    <a:bodyPr/>
+                    <a:lstStyle/>
+                    <a:p>
+                      <a:pPr indent="0" marL="0">
+                        <a:buNone/>
+                      </a:pPr>
+                      <a:endParaRPr lang="en-US" sz="950" dirty="0">
+                        <a:latin typeface="Arial" charset="0"/>
+                        <a:ea typeface="Arial" charset="0"/>
+                        <a:cs typeface="Arial" charset="0"/>
+                      </a:endParaRPr>
+                    </a:p>
+                  </a:txBody>
+                  <a:tcPr marL="27432" marR="27432" marT="18288" marB="18288" anchor="ctr">
+                    <a:lnL w="0" cap="flat" cmpd="sng" algn="ctr">
+                      <a:noFill/>
+                    </a:lnL>
+                    <a:lnR w="0" cap="flat" cmpd="sng" algn="ctr">
+                      <a:noFill/>
+                    </a:lnR>
+                    <a:lnT w="0" cap="flat" cmpd="sng" algn="ctr">
+                      <a:noFill/>
+                    </a:lnT>
+                    <a:lnB w="9525" cap="flat" cmpd="sng" algn="ctr">
+                      <a:solidFill>
+                        <a:srgbClr val="E1E0D9"/>
+                      </a:solidFill>
+                      <a:prstDash val="solid"/>
+                      <a:round/>
+                      <a:headEnd type="none" w="med" len="med"/>
+                      <a:tailEnd type="none" w="med" len="med"/>
+                    </a:lnB>
+                  </a:tcPr>
+                </a:tc>
+                <a:tc>
+                  <a:txBody>
+                    <a:bodyPr/>
+                    <a:lstStyle/>
+                    <a:p>
+                      <a:pPr algn="r" indent="0" marL="0">
+                        <a:buNone/>
+                      </a:pPr>
+                      <a:r>
+                        <a:rPr lang="en-US" sz="950" dirty="0">
+                          <a:solidFill>
+                            <a:srgbClr val="0B0B0B"/>
+                          </a:solidFill>
+                          <a:latin typeface="Arial" pitchFamily="34" charset="0"/>
+                          <a:ea typeface="Arial" pitchFamily="34" charset="-122"/>
+                          <a:cs typeface="Arial" pitchFamily="34" charset="-120"/>
+                        </a:rPr>
+                        <a:t>$X.X B</a:t>
+                      </a:r>
+                      <a:endParaRPr lang="en-US" sz="950" dirty="0">
+                        <a:latin typeface="Arial" charset="0"/>
+                        <a:ea typeface="Arial" charset="0"/>
+                        <a:cs typeface="Arial" charset="0"/>
+                      </a:endParaRPr>
+                    </a:p>
+                  </a:txBody>
+                  <a:tcPr marL="27432" marR="91440" marT="18288" marB="18288" anchor="ctr">
+                    <a:lnL w="0" cap="flat" cmpd="sng" algn="ctr">
+                      <a:noFill/>
+                    </a:lnL>
+                    <a:lnR w="0" cap="flat" cmpd="sng" algn="ctr">
+                      <a:noFill/>
+                    </a:lnR>
+                    <a:lnT w="0" cap="flat" cmpd="sng" algn="ctr">
+                      <a:noFill/>
+                    </a:lnT>
+                    <a:lnB w="9525" cap="flat" cmpd="sng" algn="ctr">
+                      <a:solidFill>
+                        <a:srgbClr val="E1E0D9"/>
+                      </a:solidFill>
+                      <a:prstDash val="solid"/>
+                      <a:round/>
+                      <a:headEnd type="none" w="med" len="med"/>
+                      <a:tailEnd type="none" w="med" len="med"/>
+                    </a:lnB>
+                  </a:tcPr>
+                </a:tc>
+                <a:tc>
+                  <a:txBody>
+                    <a:bodyPr/>
+                    <a:lstStyle/>
+                    <a:p>
+                      <a:pPr indent="0" marL="0">
+                        <a:buNone/>
+                      </a:pPr>
+                      <a:r>
+                        <a:rPr lang="en-US" sz="950" dirty="0">
+                          <a:solidFill>
+                            <a:srgbClr val="52514E"/>
+                          </a:solidFill>
+                          <a:latin typeface="Arial" pitchFamily="34" charset="0"/>
+                          <a:ea typeface="Arial" pitchFamily="34" charset="-122"/>
+                          <a:cs typeface="Arial" pitchFamily="34" charset="-120"/>
+                        </a:rPr>
+                        <a:t>First Last</a:t>
+                      </a:r>
+                      <a:endParaRPr lang="en-US" sz="950" dirty="0">
+                        <a:latin typeface="Arial" charset="0"/>
+                        <a:ea typeface="Arial" charset="0"/>
+                        <a:cs typeface="Arial" charset="0"/>
+                      </a:endParaRPr>
+                    </a:p>
+                  </a:txBody>
+                  <a:tcPr marL="109728" marR="27432" marT="18288" marB="18288" anchor="ctr">
+                    <a:lnL w="0" cap="flat" cmpd="sng" algn="ctr">
+                      <a:noFill/>
+                    </a:lnL>
+                    <a:lnR w="0" cap="flat" cmpd="sng" algn="ctr">
+                      <a:noFill/>
+                    </a:lnR>
+                    <a:lnT w="0" cap="flat" cmpd="sng" algn="ctr">
+                      <a:noFill/>
+                    </a:lnT>
+                    <a:lnB w="9525" cap="flat" cmpd="sng" algn="ctr">
+                      <a:solidFill>
+                        <a:srgbClr val="E1E0D9"/>
+                      </a:solidFill>
+                      <a:prstDash val="solid"/>
+                      <a:round/>
+                      <a:headEnd type="none" w="med" len="med"/>
+                      <a:tailEnd type="none" w="med" len="med"/>
+                    </a:lnB>
+                  </a:tcPr>
+                </a:tc>
+              </a:tr>
+              <a:tr h="342900">
+                <a:tc>
+                  <a:txBody>
+                    <a:bodyPr/>
+                    <a:lstStyle/>
+                    <a:p>
+                      <a:pPr indent="0" marL="0">
+                        <a:buNone/>
+                      </a:pPr>
+                      <a:r>
+                        <a:rPr lang="en-US" sz="950" b="1" dirty="0">
+                          <a:solidFill>
+                            <a:srgbClr val="0B0B0B"/>
+                          </a:solidFill>
+                          <a:latin typeface="Arial" pitchFamily="34" charset="0"/>
+                          <a:ea typeface="Arial" pitchFamily="34" charset="-122"/>
+                          <a:cs typeface="Arial" pitchFamily="34" charset="-120"/>
+                        </a:rPr>
+                        <a:t>Company 16</a:t>
+                      </a:r>
+                      <a:endParaRPr lang="en-US" sz="950" dirty="0">
+                        <a:latin typeface="Arial" charset="0"/>
+                        <a:ea typeface="Arial" charset="0"/>
+                        <a:cs typeface="Arial" charset="0"/>
+                      </a:endParaRPr>
+                    </a:p>
+                  </a:txBody>
+                  <a:tcPr marL="27432" marR="27432" marT="18288" marB="18288" anchor="ctr">
+                    <a:lnL w="0" cap="flat" cmpd="sng" algn="ctr">
+                      <a:noFill/>
+                    </a:lnL>
+                    <a:lnR w="0" cap="flat" cmpd="sng" algn="ctr">
+                      <a:noFill/>
+                    </a:lnR>
+                    <a:lnT w="0" cap="flat" cmpd="sng" algn="ctr">
+                      <a:noFill/>
+                    </a:lnT>
+                    <a:lnB w="9525" cap="flat" cmpd="sng" algn="ctr">
+                      <a:solidFill>
+                        <a:srgbClr val="E1E0D9"/>
+                      </a:solidFill>
+                      <a:prstDash val="solid"/>
+                      <a:round/>
+                      <a:headEnd type="none" w="med" len="med"/>
+                      <a:tailEnd type="none" w="med" len="med"/>
+                    </a:lnB>
+                  </a:tcPr>
+                </a:tc>
+                <a:tc>
+                  <a:txBody>
+                    <a:bodyPr/>
+                    <a:lstStyle/>
+                    <a:p>
+                      <a:pPr indent="0" marL="0">
+                        <a:buNone/>
+                      </a:pPr>
+                      <a:endParaRPr lang="en-US" sz="950" dirty="0">
+                        <a:latin typeface="Arial" charset="0"/>
+                        <a:ea typeface="Arial" charset="0"/>
+                        <a:cs typeface="Arial" charset="0"/>
+                      </a:endParaRPr>
+                    </a:p>
+                  </a:txBody>
+                  <a:tcPr marL="27432" marR="27432" marT="18288" marB="18288" anchor="ctr">
+                    <a:lnL w="0" cap="flat" cmpd="sng" algn="ctr">
+                      <a:noFill/>
+                    </a:lnL>
+                    <a:lnR w="0" cap="flat" cmpd="sng" algn="ctr">
+                      <a:noFill/>
+                    </a:lnR>
+                    <a:lnT w="0" cap="flat" cmpd="sng" algn="ctr">
+                      <a:noFill/>
+                    </a:lnT>
+                    <a:lnB w="9525" cap="flat" cmpd="sng" algn="ctr">
+                      <a:solidFill>
+                        <a:srgbClr val="E1E0D9"/>
+                      </a:solidFill>
+                      <a:prstDash val="solid"/>
+                      <a:round/>
+                      <a:headEnd type="none" w="med" len="med"/>
+                      <a:tailEnd type="none" w="med" len="med"/>
+                    </a:lnB>
+                  </a:tcPr>
+                </a:tc>
+                <a:tc>
+                  <a:txBody>
+                    <a:bodyPr/>
+                    <a:lstStyle/>
+                    <a:p>
+                      <a:pPr algn="r" indent="0" marL="0">
+                        <a:buNone/>
+                      </a:pPr>
+                      <a:r>
+                        <a:rPr lang="en-US" sz="950" dirty="0">
+                          <a:solidFill>
+                            <a:srgbClr val="0B0B0B"/>
+                          </a:solidFill>
+                          <a:latin typeface="Arial" pitchFamily="34" charset="0"/>
+                          <a:ea typeface="Arial" pitchFamily="34" charset="-122"/>
+                          <a:cs typeface="Arial" pitchFamily="34" charset="-120"/>
+                        </a:rPr>
+                        <a:t>$X.X B</a:t>
+                      </a:r>
+                      <a:endParaRPr lang="en-US" sz="950" dirty="0">
+                        <a:latin typeface="Arial" charset="0"/>
+                        <a:ea typeface="Arial" charset="0"/>
+                        <a:cs typeface="Arial" charset="0"/>
+                      </a:endParaRPr>
+                    </a:p>
+                  </a:txBody>
+                  <a:tcPr marL="27432" marR="91440" marT="18288" marB="18288" anchor="ctr">
+                    <a:lnL w="0" cap="flat" cmpd="sng" algn="ctr">
+                      <a:noFill/>
+                    </a:lnL>
+                    <a:lnR w="0" cap="flat" cmpd="sng" algn="ctr">
+                      <a:noFill/>
+                    </a:lnR>
+                    <a:lnT w="0" cap="flat" cmpd="sng" algn="ctr">
+                      <a:noFill/>
+                    </a:lnT>
+                    <a:lnB w="9525" cap="flat" cmpd="sng" algn="ctr">
+                      <a:solidFill>
+                        <a:srgbClr val="E1E0D9"/>
+                      </a:solidFill>
+                      <a:prstDash val="solid"/>
+                      <a:round/>
+                      <a:headEnd type="none" w="med" len="med"/>
+                      <a:tailEnd type="none" w="med" len="med"/>
+                    </a:lnB>
+                  </a:tcPr>
+                </a:tc>
+                <a:tc>
+                  <a:txBody>
+                    <a:bodyPr/>
+                    <a:lstStyle/>
+                    <a:p>
+                      <a:pPr indent="0" marL="0">
+                        <a:buNone/>
+                      </a:pPr>
+                      <a:r>
+                        <a:rPr lang="en-US" sz="950" dirty="0">
+                          <a:solidFill>
+                            <a:srgbClr val="52514E"/>
+                          </a:solidFill>
+                          <a:latin typeface="Arial" pitchFamily="34" charset="0"/>
+                          <a:ea typeface="Arial" pitchFamily="34" charset="-122"/>
+                          <a:cs typeface="Arial" pitchFamily="34" charset="-120"/>
+                        </a:rPr>
+                        <a:t>First Last</a:t>
+                      </a:r>
+                      <a:endParaRPr lang="en-US" sz="950" dirty="0">
+                        <a:latin typeface="Arial" charset="0"/>
+                        <a:ea typeface="Arial" charset="0"/>
+                        <a:cs typeface="Arial" charset="0"/>
+                      </a:endParaRPr>
+                    </a:p>
+                  </a:txBody>
+                  <a:tcPr marL="109728" marR="27432" marT="18288" marB="18288" anchor="ctr">
+                    <a:lnL w="0" cap="flat" cmpd="sng" algn="ctr">
+                      <a:noFill/>
+                    </a:lnL>
+                    <a:lnR w="0" cap="flat" cmpd="sng" algn="ctr">
+                      <a:noFill/>
+                    </a:lnR>
+                    <a:lnT w="0" cap="flat" cmpd="sng" algn="ctr">
+                      <a:noFill/>
+                    </a:lnT>
+                    <a:lnB w="9525" cap="flat" cmpd="sng" algn="ctr">
+                      <a:solidFill>
+                        <a:srgbClr val="E1E0D9"/>
+                      </a:solidFill>
+                      <a:prstDash val="solid"/>
+                      <a:round/>
+                      <a:headEnd type="none" w="med" len="med"/>
+                      <a:tailEnd type="none" w="med" len="med"/>
+                    </a:lnB>
+                  </a:tcPr>
+                </a:tc>
+              </a:tr>
+              <a:tr h="342900">
+                <a:tc>
+                  <a:txBody>
+                    <a:bodyPr/>
+                    <a:lstStyle/>
+                    <a:p>
+                      <a:pPr indent="0" marL="0">
+                        <a:buNone/>
+                      </a:pPr>
+                      <a:r>
+                        <a:rPr lang="en-US" sz="950" b="1" dirty="0">
+                          <a:solidFill>
+                            <a:srgbClr val="0B0B0B"/>
+                          </a:solidFill>
+                          <a:latin typeface="Arial" pitchFamily="34" charset="0"/>
+                          <a:ea typeface="Arial" pitchFamily="34" charset="-122"/>
+                          <a:cs typeface="Arial" pitchFamily="34" charset="-120"/>
+                        </a:rPr>
+                        <a:t>Company 17</a:t>
+                      </a:r>
+                      <a:endParaRPr lang="en-US" sz="950" dirty="0">
+                        <a:latin typeface="Arial" charset="0"/>
+                        <a:ea typeface="Arial" charset="0"/>
+                        <a:cs typeface="Arial" charset="0"/>
+                      </a:endParaRPr>
+                    </a:p>
+                  </a:txBody>
+                  <a:tcPr marL="27432" marR="27432" marT="18288" marB="18288" anchor="ctr">
+                    <a:lnL w="0" cap="flat" cmpd="sng" algn="ctr">
+                      <a:noFill/>
+                    </a:lnL>
+                    <a:lnR w="0" cap="flat" cmpd="sng" algn="ctr">
+                      <a:noFill/>
+                    </a:lnR>
+                    <a:lnT w="0" cap="flat" cmpd="sng" algn="ctr">
+                      <a:noFill/>
+                    </a:lnT>
+                    <a:lnB w="9525" cap="flat" cmpd="sng" algn="ctr">
+                      <a:solidFill>
+                        <a:srgbClr val="E1E0D9"/>
+                      </a:solidFill>
+                      <a:prstDash val="solid"/>
+                      <a:round/>
+                      <a:headEnd type="none" w="med" len="med"/>
+                      <a:tailEnd type="none" w="med" len="med"/>
+                    </a:lnB>
+                  </a:tcPr>
+                </a:tc>
+                <a:tc>
+                  <a:txBody>
+                    <a:bodyPr/>
+                    <a:lstStyle/>
+                    <a:p>
+                      <a:pPr indent="0" marL="0">
+                        <a:buNone/>
+                      </a:pPr>
+                      <a:endParaRPr lang="en-US" sz="950" dirty="0">
+                        <a:latin typeface="Arial" charset="0"/>
+                        <a:ea typeface="Arial" charset="0"/>
+                        <a:cs typeface="Arial" charset="0"/>
+                      </a:endParaRPr>
+                    </a:p>
+                  </a:txBody>
+                  <a:tcPr marL="27432" marR="27432" marT="18288" marB="18288" anchor="ctr">
+                    <a:lnL w="0" cap="flat" cmpd="sng" algn="ctr">
+                      <a:noFill/>
+                    </a:lnL>
+                    <a:lnR w="0" cap="flat" cmpd="sng" algn="ctr">
+                      <a:noFill/>
+                    </a:lnR>
+                    <a:lnT w="0" cap="flat" cmpd="sng" algn="ctr">
+                      <a:noFill/>
+                    </a:lnT>
+                    <a:lnB w="9525" cap="flat" cmpd="sng" algn="ctr">
+                      <a:solidFill>
+                        <a:srgbClr val="E1E0D9"/>
+                      </a:solidFill>
+                      <a:prstDash val="solid"/>
+                      <a:round/>
+                      <a:headEnd type="none" w="med" len="med"/>
+                      <a:tailEnd type="none" w="med" len="med"/>
+                    </a:lnB>
+                  </a:tcPr>
+                </a:tc>
+                <a:tc>
+                  <a:txBody>
+                    <a:bodyPr/>
+                    <a:lstStyle/>
+                    <a:p>
+                      <a:pPr algn="r" indent="0" marL="0">
+                        <a:buNone/>
+                      </a:pPr>
+                      <a:r>
+                        <a:rPr lang="en-US" sz="950" dirty="0">
+                          <a:solidFill>
+                            <a:srgbClr val="0B0B0B"/>
+                          </a:solidFill>
+                          <a:latin typeface="Arial" pitchFamily="34" charset="0"/>
+                          <a:ea typeface="Arial" pitchFamily="34" charset="-122"/>
+                          <a:cs typeface="Arial" pitchFamily="34" charset="-120"/>
+                        </a:rPr>
+                        <a:t>$X.X B</a:t>
+                      </a:r>
+                      <a:endParaRPr lang="en-US" sz="950" dirty="0">
+                        <a:latin typeface="Arial" charset="0"/>
+                        <a:ea typeface="Arial" charset="0"/>
+                        <a:cs typeface="Arial" charset="0"/>
+                      </a:endParaRPr>
+                    </a:p>
+                  </a:txBody>
+                  <a:tcPr marL="27432" marR="91440" marT="18288" marB="18288" anchor="ctr">
+                    <a:lnL w="0" cap="flat" cmpd="sng" algn="ctr">
+                      <a:noFill/>
+                    </a:lnL>
+                    <a:lnR w="0" cap="flat" cmpd="sng" algn="ctr">
+                      <a:noFill/>
+                    </a:lnR>
+                    <a:lnT w="0" cap="flat" cmpd="sng" algn="ctr">
+                      <a:noFill/>
+                    </a:lnT>
+                    <a:lnB w="9525" cap="flat" cmpd="sng" algn="ctr">
+                      <a:solidFill>
+                        <a:srgbClr val="E1E0D9"/>
+                      </a:solidFill>
+                      <a:prstDash val="solid"/>
+                      <a:round/>
+                      <a:headEnd type="none" w="med" len="med"/>
+                      <a:tailEnd type="none" w="med" len="med"/>
+                    </a:lnB>
+                  </a:tcPr>
+                </a:tc>
+                <a:tc>
+                  <a:txBody>
+                    <a:bodyPr/>
+                    <a:lstStyle/>
+                    <a:p>
+                      <a:pPr indent="0" marL="0">
+                        <a:buNone/>
+                      </a:pPr>
+                      <a:r>
+                        <a:rPr lang="en-US" sz="950" dirty="0">
+                          <a:solidFill>
+                            <a:srgbClr val="52514E"/>
+                          </a:solidFill>
+                          <a:latin typeface="Arial" pitchFamily="34" charset="0"/>
+                          <a:ea typeface="Arial" pitchFamily="34" charset="-122"/>
+                          <a:cs typeface="Arial" pitchFamily="34" charset="-120"/>
+                        </a:rPr>
+                        <a:t>First Last</a:t>
+                      </a:r>
+                      <a:endParaRPr lang="en-US" sz="950" dirty="0">
+                        <a:latin typeface="Arial" charset="0"/>
+                        <a:ea typeface="Arial" charset="0"/>
+                        <a:cs typeface="Arial" charset="0"/>
+                      </a:endParaRPr>
+                    </a:p>
+                  </a:txBody>
+                  <a:tcPr marL="109728" marR="27432" marT="18288" marB="18288" anchor="ctr">
+                    <a:lnL w="0" cap="flat" cmpd="sng" algn="ctr">
+                      <a:noFill/>
+                    </a:lnL>
+                    <a:lnR w="0" cap="flat" cmpd="sng" algn="ctr">
+                      <a:noFill/>
+                    </a:lnR>
+                    <a:lnT w="0" cap="flat" cmpd="sng" algn="ctr">
+                      <a:noFill/>
+                    </a:lnT>
+                    <a:lnB w="9525" cap="flat" cmpd="sng" algn="ctr">
+                      <a:solidFill>
+                        <a:srgbClr val="E1E0D9"/>
+                      </a:solidFill>
+                      <a:prstDash val="solid"/>
+                      <a:round/>
+                      <a:headEnd type="none" w="med" len="med"/>
+                      <a:tailEnd type="none" w="med" len="med"/>
+                    </a:lnB>
+                  </a:tcPr>
+                </a:tc>
+              </a:tr>
+              <a:tr h="342900">
+                <a:tc>
+                  <a:txBody>
+                    <a:bodyPr/>
+                    <a:lstStyle/>
+                    <a:p>
+                      <a:pPr indent="0" marL="0">
+                        <a:buNone/>
+                      </a:pPr>
+                      <a:r>
+                        <a:rPr lang="en-US" sz="950" b="1" dirty="0">
+                          <a:solidFill>
+                            <a:srgbClr val="0B0B0B"/>
+                          </a:solidFill>
+                          <a:latin typeface="Arial" pitchFamily="34" charset="0"/>
+                          <a:ea typeface="Arial" pitchFamily="34" charset="-122"/>
+                          <a:cs typeface="Arial" pitchFamily="34" charset="-120"/>
+                        </a:rPr>
+                        <a:t>Company 18</a:t>
+                      </a:r>
+                      <a:endParaRPr lang="en-US" sz="950" dirty="0">
+                        <a:latin typeface="Arial" charset="0"/>
+                        <a:ea typeface="Arial" charset="0"/>
+                        <a:cs typeface="Arial" charset="0"/>
+                      </a:endParaRPr>
+                    </a:p>
+                  </a:txBody>
+                  <a:tcPr marL="27432" marR="27432" marT="18288" marB="18288" anchor="ctr">
+                    <a:lnL w="0" cap="flat" cmpd="sng" algn="ctr">
+                      <a:noFill/>
+                    </a:lnL>
+                    <a:lnR w="0" cap="flat" cmpd="sng" algn="ctr">
+                      <a:noFill/>
+                    </a:lnR>
+                    <a:lnT w="0" cap="flat" cmpd="sng" algn="ctr">
+                      <a:noFill/>
+                    </a:lnT>
+                    <a:lnB w="9525" cap="flat" cmpd="sng" algn="ctr">
+                      <a:solidFill>
+                        <a:srgbClr val="E1E0D9"/>
+                      </a:solidFill>
+                      <a:prstDash val="solid"/>
+                      <a:round/>
+                      <a:headEnd type="none" w="med" len="med"/>
+                      <a:tailEnd type="none" w="med" len="med"/>
+                    </a:lnB>
+                  </a:tcPr>
+                </a:tc>
+                <a:tc>
+                  <a:txBody>
+                    <a:bodyPr/>
+                    <a:lstStyle/>
+                    <a:p>
+                      <a:pPr indent="0" marL="0">
+                        <a:buNone/>
+                      </a:pPr>
+                      <a:endParaRPr lang="en-US" sz="950" dirty="0">
+                        <a:latin typeface="Arial" charset="0"/>
+                        <a:ea typeface="Arial" charset="0"/>
+                        <a:cs typeface="Arial" charset="0"/>
+                      </a:endParaRPr>
+                    </a:p>
+                  </a:txBody>
+                  <a:tcPr marL="27432" marR="27432" marT="18288" marB="18288" anchor="ctr">
+                    <a:lnL w="0" cap="flat" cmpd="sng" algn="ctr">
+                      <a:noFill/>
+                    </a:lnL>
+                    <a:lnR w="0" cap="flat" cmpd="sng" algn="ctr">
+                      <a:noFill/>
+                    </a:lnR>
+                    <a:lnT w="0" cap="flat" cmpd="sng" algn="ctr">
+                      <a:noFill/>
+                    </a:lnT>
+                    <a:lnB w="9525" cap="flat" cmpd="sng" algn="ctr">
+                      <a:solidFill>
+                        <a:srgbClr val="E1E0D9"/>
+                      </a:solidFill>
+                      <a:prstDash val="solid"/>
+                      <a:round/>
+                      <a:headEnd type="none" w="med" len="med"/>
+                      <a:tailEnd type="none" w="med" len="med"/>
+                    </a:lnB>
+                  </a:tcPr>
+                </a:tc>
+                <a:tc>
+                  <a:txBody>
+                    <a:bodyPr/>
+                    <a:lstStyle/>
+                    <a:p>
+                      <a:pPr algn="r" indent="0" marL="0">
+                        <a:buNone/>
+                      </a:pPr>
+                      <a:r>
+                        <a:rPr lang="en-US" sz="950" dirty="0">
+                          <a:solidFill>
+                            <a:srgbClr val="0B0B0B"/>
+                          </a:solidFill>
+                          <a:latin typeface="Arial" pitchFamily="34" charset="0"/>
+                          <a:ea typeface="Arial" pitchFamily="34" charset="-122"/>
+                          <a:cs typeface="Arial" pitchFamily="34" charset="-120"/>
+                        </a:rPr>
+                        <a:t>$X.X B</a:t>
+                      </a:r>
+                      <a:endParaRPr lang="en-US" sz="950" dirty="0">
+                        <a:latin typeface="Arial" charset="0"/>
+                        <a:ea typeface="Arial" charset="0"/>
+                        <a:cs typeface="Arial" charset="0"/>
+                      </a:endParaRPr>
+                    </a:p>
+                  </a:txBody>
+                  <a:tcPr marL="27432" marR="91440" marT="18288" marB="18288" anchor="ctr">
+                    <a:lnL w="0" cap="flat" cmpd="sng" algn="ctr">
+                      <a:noFill/>
+                    </a:lnL>
+                    <a:lnR w="0" cap="flat" cmpd="sng" algn="ctr">
+                      <a:noFill/>
+                    </a:lnR>
+                    <a:lnT w="0" cap="flat" cmpd="sng" algn="ctr">
+                      <a:noFill/>
+                    </a:lnT>
+                    <a:lnB w="9525" cap="flat" cmpd="sng" algn="ctr">
+                      <a:solidFill>
+                        <a:srgbClr val="E1E0D9"/>
+                      </a:solidFill>
+                      <a:prstDash val="solid"/>
+                      <a:round/>
+                      <a:headEnd type="none" w="med" len="med"/>
+                      <a:tailEnd type="none" w="med" len="med"/>
+                    </a:lnB>
+                  </a:tcPr>
+                </a:tc>
+                <a:tc>
+                  <a:txBody>
+                    <a:bodyPr/>
+                    <a:lstStyle/>
+                    <a:p>
+                      <a:pPr indent="0" marL="0">
+                        <a:buNone/>
+                      </a:pPr>
+                      <a:r>
+                        <a:rPr lang="en-US" sz="950" dirty="0">
+                          <a:solidFill>
+                            <a:srgbClr val="52514E"/>
+                          </a:solidFill>
+                          <a:latin typeface="Arial" pitchFamily="34" charset="0"/>
+                          <a:ea typeface="Arial" pitchFamily="34" charset="-122"/>
+                          <a:cs typeface="Arial" pitchFamily="34" charset="-120"/>
+                        </a:rPr>
+                        <a:t>First Last</a:t>
+                      </a:r>
+                      <a:endParaRPr lang="en-US" sz="950" dirty="0">
+                        <a:latin typeface="Arial" charset="0"/>
+                        <a:ea typeface="Arial" charset="0"/>
+                        <a:cs typeface="Arial" charset="0"/>
+                      </a:endParaRPr>
+                    </a:p>
+                  </a:txBody>
+                  <a:tcPr marL="109728" marR="27432" marT="18288" marB="18288" anchor="ctr">
+                    <a:lnL w="0" cap="flat" cmpd="sng" algn="ctr">
+                      <a:noFill/>
+                    </a:lnL>
+                    <a:lnR w="0" cap="flat" cmpd="sng" algn="ctr">
+                      <a:noFill/>
+                    </a:lnR>
+                    <a:lnT w="0" cap="flat" cmpd="sng" algn="ctr">
+                      <a:noFill/>
+                    </a:lnT>
+                    <a:lnB w="9525" cap="flat" cmpd="sng" algn="ctr">
+                      <a:solidFill>
+                        <a:srgbClr val="E1E0D9"/>
+                      </a:solidFill>
+                      <a:prstDash val="solid"/>
+                      <a:round/>
+                      <a:headEnd type="none" w="med" len="med"/>
+                      <a:tailEnd type="none" w="med" len="med"/>
+                    </a:lnB>
+                  </a:tcPr>
+                </a:tc>
+              </a:tr>
+              <a:tr h="342900">
+                <a:tc>
+                  <a:txBody>
+                    <a:bodyPr/>
+                    <a:lstStyle/>
+                    <a:p>
+                      <a:pPr indent="0" marL="0">
+                        <a:buNone/>
+                      </a:pPr>
+                      <a:r>
+                        <a:rPr lang="en-US" sz="950" b="1" dirty="0">
+                          <a:solidFill>
+                            <a:srgbClr val="0B0B0B"/>
+                          </a:solidFill>
+                          <a:latin typeface="Arial" pitchFamily="34" charset="0"/>
+                          <a:ea typeface="Arial" pitchFamily="34" charset="-122"/>
+                          <a:cs typeface="Arial" pitchFamily="34" charset="-120"/>
+                        </a:rPr>
+                        <a:t>Company 19</a:t>
+                      </a:r>
+                      <a:endParaRPr lang="en-US" sz="950" dirty="0">
+                        <a:latin typeface="Arial" charset="0"/>
+                        <a:ea typeface="Arial" charset="0"/>
+                        <a:cs typeface="Arial" charset="0"/>
+                      </a:endParaRPr>
+                    </a:p>
+                  </a:txBody>
+                  <a:tcPr marL="27432" marR="27432" marT="18288" marB="18288" anchor="ctr">
+                    <a:lnL w="0" cap="flat" cmpd="sng" algn="ctr">
+                      <a:noFill/>
+                    </a:lnL>
+                    <a:lnR w="0" cap="flat" cmpd="sng" algn="ctr">
+                      <a:noFill/>
+                    </a:lnR>
+                    <a:lnT w="0" cap="flat" cmpd="sng" algn="ctr">
+                      <a:noFill/>
+                    </a:lnT>
+                    <a:lnB w="9525" cap="flat" cmpd="sng" algn="ctr">
+                      <a:solidFill>
+                        <a:srgbClr val="E1E0D9"/>
+                      </a:solidFill>
+                      <a:prstDash val="solid"/>
+                      <a:round/>
+                      <a:headEnd type="none" w="med" len="med"/>
+                      <a:tailEnd type="none" w="med" len="med"/>
+                    </a:lnB>
+                  </a:tcPr>
+                </a:tc>
+                <a:tc>
+                  <a:txBody>
+                    <a:bodyPr/>
+                    <a:lstStyle/>
+                    <a:p>
+                      <a:pPr indent="0" marL="0">
+                        <a:buNone/>
+                      </a:pPr>
+                      <a:endParaRPr lang="en-US" sz="950" dirty="0">
+                        <a:latin typeface="Arial" charset="0"/>
+                        <a:ea typeface="Arial" charset="0"/>
+                        <a:cs typeface="Arial" charset="0"/>
+                      </a:endParaRPr>
+                    </a:p>
+                  </a:txBody>
+                  <a:tcPr marL="27432" marR="27432" marT="18288" marB="18288" anchor="ctr">
+                    <a:lnL w="0" cap="flat" cmpd="sng" algn="ctr">
+                      <a:noFill/>
+                    </a:lnL>
+                    <a:lnR w="0" cap="flat" cmpd="sng" algn="ctr">
+                      <a:noFill/>
+                    </a:lnR>
+                    <a:lnT w="0" cap="flat" cmpd="sng" algn="ctr">
+                      <a:noFill/>
+                    </a:lnT>
+                    <a:lnB w="9525" cap="flat" cmpd="sng" algn="ctr">
+                      <a:solidFill>
+                        <a:srgbClr val="E1E0D9"/>
+                      </a:solidFill>
+                      <a:prstDash val="solid"/>
+                      <a:round/>
+                      <a:headEnd type="none" w="med" len="med"/>
+                      <a:tailEnd type="none" w="med" len="med"/>
+                    </a:lnB>
+                  </a:tcPr>
+                </a:tc>
+                <a:tc>
+                  <a:txBody>
+                    <a:bodyPr/>
+                    <a:lstStyle/>
+                    <a:p>
+                      <a:pPr algn="r" indent="0" marL="0">
+                        <a:buNone/>
+                      </a:pPr>
+                      <a:r>
+                        <a:rPr lang="en-US" sz="950" dirty="0">
+                          <a:solidFill>
+                            <a:srgbClr val="0B0B0B"/>
+                          </a:solidFill>
+                          <a:latin typeface="Arial" pitchFamily="34" charset="0"/>
+                          <a:ea typeface="Arial" pitchFamily="34" charset="-122"/>
+                          <a:cs typeface="Arial" pitchFamily="34" charset="-120"/>
+                        </a:rPr>
+                        <a:t>$X.X B</a:t>
+                      </a:r>
+                      <a:endParaRPr lang="en-US" sz="950" dirty="0">
+                        <a:latin typeface="Arial" charset="0"/>
+                        <a:ea typeface="Arial" charset="0"/>
+                        <a:cs typeface="Arial" charset="0"/>
+                      </a:endParaRPr>
+                    </a:p>
+                  </a:txBody>
+                  <a:tcPr marL="27432" marR="91440" marT="18288" marB="18288" anchor="ctr">
+                    <a:lnL w="0" cap="flat" cmpd="sng" algn="ctr">
+                      <a:noFill/>
+                    </a:lnL>
+                    <a:lnR w="0" cap="flat" cmpd="sng" algn="ctr">
+                      <a:noFill/>
+                    </a:lnR>
+                    <a:lnT w="0" cap="flat" cmpd="sng" algn="ctr">
+                      <a:noFill/>
+                    </a:lnT>
+                    <a:lnB w="9525" cap="flat" cmpd="sng" algn="ctr">
+                      <a:solidFill>
+                        <a:srgbClr val="E1E0D9"/>
+                      </a:solidFill>
+                      <a:prstDash val="solid"/>
+                      <a:round/>
+                      <a:headEnd type="none" w="med" len="med"/>
+                      <a:tailEnd type="none" w="med" len="med"/>
+                    </a:lnB>
+                  </a:tcPr>
+                </a:tc>
+                <a:tc>
+                  <a:txBody>
+                    <a:bodyPr/>
+                    <a:lstStyle/>
+                    <a:p>
+                      <a:pPr indent="0" marL="0">
+                        <a:buNone/>
+                      </a:pPr>
+                      <a:r>
+                        <a:rPr lang="en-US" sz="950" dirty="0">
+                          <a:solidFill>
+                            <a:srgbClr val="52514E"/>
+                          </a:solidFill>
+                          <a:latin typeface="Arial" pitchFamily="34" charset="0"/>
+                          <a:ea typeface="Arial" pitchFamily="34" charset="-122"/>
+                          <a:cs typeface="Arial" pitchFamily="34" charset="-120"/>
+                        </a:rPr>
+                        <a:t>First Last</a:t>
+                      </a:r>
+                      <a:endParaRPr lang="en-US" sz="950" dirty="0">
+                        <a:latin typeface="Arial" charset="0"/>
+                        <a:ea typeface="Arial" charset="0"/>
+                        <a:cs typeface="Arial" charset="0"/>
+                      </a:endParaRPr>
+                    </a:p>
+                  </a:txBody>
+                  <a:tcPr marL="109728" marR="27432" marT="18288" marB="18288" anchor="ctr">
+                    <a:lnL w="0" cap="flat" cmpd="sng" algn="ctr">
+                      <a:noFill/>
+                    </a:lnL>
+                    <a:lnR w="0" cap="flat" cmpd="sng" algn="ctr">
+                      <a:noFill/>
+                    </a:lnR>
+                    <a:lnT w="0" cap="flat" cmpd="sng" algn="ctr">
+                      <a:noFill/>
+                    </a:lnT>
+                    <a:lnB w="9525" cap="flat" cmpd="sng" algn="ctr">
+                      <a:solidFill>
+                        <a:srgbClr val="E1E0D9"/>
+                      </a:solidFill>
+                      <a:prstDash val="solid"/>
+                      <a:round/>
+                      <a:headEnd type="none" w="med" len="med"/>
+                      <a:tailEnd type="none" w="med" len="med"/>
+                    </a:lnB>
+                  </a:tcPr>
+                </a:tc>
+              </a:tr>
+            </a:tbl>
+          </a:graphicData>
+        </a:graphic>
+      </p:graphicFrame>
+      <p:sp>
+        <p:nvSpPr>
+          <p:cNvPr id="70" name="Shape 66"/>
+          <p:cNvSpPr/>
+          <p:nvPr/>
+        </p:nvSpPr>
+        <p:spPr>
+          <a:xfrm>
+            <a:off x="7114032" y="2887218"/>
+            <a:ext cx="1060704" cy="219456"/>
           </a:xfrm>
           <a:prstGeom prst="roundRect">
             <a:avLst>
@@ -5317,6 +7056,231 @@
             </a:avLst>
           </a:prstGeom>
           <a:solidFill>
+            <a:srgbClr val="F0EFEC"/>
+          </a:solidFill>
+          <a:ln/>
+        </p:spPr>
+      </p:sp>
+      <p:sp>
+        <p:nvSpPr>
+          <p:cNvPr id="71" name="Text 67"/>
+          <p:cNvSpPr/>
+          <p:nvPr/>
+        </p:nvSpPr>
+        <p:spPr>
+          <a:xfrm>
+            <a:off x="7114032" y="2887218"/>
+            <a:ext cx="1060704" cy="219456"/>
+          </a:xfrm>
+          <a:prstGeom prst="rect">
+            <a:avLst/>
+          </a:prstGeom>
+          <a:noFill/>
+          <a:ln/>
+        </p:spPr>
+        <p:txBody>
+          <a:bodyPr wrap="square" lIns="0" tIns="0" rIns="0" bIns="0" rtlCol="0" anchor="ctr"/>
+          <a:lstStyle/>
+          <a:p>
+            <a:pPr algn="ctr" indent="0" marL="0">
+              <a:buNone/>
+            </a:pPr>
+            <a:r>
+              <a:rPr lang="en-US" sz="650" dirty="0">
+                <a:solidFill>
+                  <a:srgbClr val="898781"/>
+                </a:solidFill>
+                <a:latin typeface="Arial" pitchFamily="34" charset="0"/>
+                <a:ea typeface="Arial" pitchFamily="34" charset="-122"/>
+                <a:cs typeface="Arial" pitchFamily="34" charset="-120"/>
+              </a:rPr>
+              <a:t>● </a:t>
+            </a:r>
+            <a:pPr algn="ctr" indent="0" marL="0">
+              <a:buNone/>
+            </a:pPr>
+            <a:r>
+              <a:rPr lang="en-US" sz="800" b="1" dirty="0">
+                <a:solidFill>
+                  <a:srgbClr val="52514E"/>
+                </a:solidFill>
+                <a:latin typeface="Arial" pitchFamily="34" charset="0"/>
+                <a:ea typeface="Arial" pitchFamily="34" charset="-122"/>
+                <a:cs typeface="Arial" pitchFamily="34" charset="-120"/>
+              </a:rPr>
+              <a:t>Consultation</a:t>
+            </a:r>
+            <a:endParaRPr lang="en-US" sz="650" dirty="0"/>
+          </a:p>
+        </p:txBody>
+      </p:sp>
+      <p:sp>
+        <p:nvSpPr>
+          <p:cNvPr id="72" name="Shape 68"/>
+          <p:cNvSpPr/>
+          <p:nvPr/>
+        </p:nvSpPr>
+        <p:spPr>
+          <a:xfrm>
+            <a:off x="7114032" y="3230118"/>
+            <a:ext cx="1060704" cy="219456"/>
+          </a:xfrm>
+          <a:prstGeom prst="roundRect">
+            <a:avLst>
+              <a:gd name="adj" fmla="val 50000"/>
+            </a:avLst>
+          </a:prstGeom>
+          <a:solidFill>
+            <a:srgbClr val="F0EFEC"/>
+          </a:solidFill>
+          <a:ln/>
+        </p:spPr>
+      </p:sp>
+      <p:sp>
+        <p:nvSpPr>
+          <p:cNvPr id="73" name="Text 69"/>
+          <p:cNvSpPr/>
+          <p:nvPr/>
+        </p:nvSpPr>
+        <p:spPr>
+          <a:xfrm>
+            <a:off x="7114032" y="3230118"/>
+            <a:ext cx="1060704" cy="219456"/>
+          </a:xfrm>
+          <a:prstGeom prst="rect">
+            <a:avLst/>
+          </a:prstGeom>
+          <a:noFill/>
+          <a:ln/>
+        </p:spPr>
+        <p:txBody>
+          <a:bodyPr wrap="square" lIns="0" tIns="0" rIns="0" bIns="0" rtlCol="0" anchor="ctr"/>
+          <a:lstStyle/>
+          <a:p>
+            <a:pPr algn="ctr" indent="0" marL="0">
+              <a:buNone/>
+            </a:pPr>
+            <a:r>
+              <a:rPr lang="en-US" sz="650" dirty="0">
+                <a:solidFill>
+                  <a:srgbClr val="898781"/>
+                </a:solidFill>
+                <a:latin typeface="Arial" pitchFamily="34" charset="0"/>
+                <a:ea typeface="Arial" pitchFamily="34" charset="-122"/>
+                <a:cs typeface="Arial" pitchFamily="34" charset="-120"/>
+              </a:rPr>
+              <a:t>● </a:t>
+            </a:r>
+            <a:pPr algn="ctr" indent="0" marL="0">
+              <a:buNone/>
+            </a:pPr>
+            <a:r>
+              <a:rPr lang="en-US" sz="800" b="1" dirty="0">
+                <a:solidFill>
+                  <a:srgbClr val="52514E"/>
+                </a:solidFill>
+                <a:latin typeface="Arial" pitchFamily="34" charset="0"/>
+                <a:ea typeface="Arial" pitchFamily="34" charset="-122"/>
+                <a:cs typeface="Arial" pitchFamily="34" charset="-120"/>
+              </a:rPr>
+              <a:t>Consultation</a:t>
+            </a:r>
+            <a:endParaRPr lang="en-US" sz="650" dirty="0"/>
+          </a:p>
+        </p:txBody>
+      </p:sp>
+      <p:sp>
+        <p:nvSpPr>
+          <p:cNvPr id="74" name="Shape 70"/>
+          <p:cNvSpPr/>
+          <p:nvPr/>
+        </p:nvSpPr>
+        <p:spPr>
+          <a:xfrm>
+            <a:off x="7114032" y="3573018"/>
+            <a:ext cx="1060704" cy="219456"/>
+          </a:xfrm>
+          <a:prstGeom prst="roundRect">
+            <a:avLst>
+              <a:gd name="adj" fmla="val 50000"/>
+            </a:avLst>
+          </a:prstGeom>
+          <a:solidFill>
+            <a:srgbClr val="F0EFEC"/>
+          </a:solidFill>
+          <a:ln/>
+        </p:spPr>
+      </p:sp>
+      <p:sp>
+        <p:nvSpPr>
+          <p:cNvPr id="75" name="Text 71"/>
+          <p:cNvSpPr/>
+          <p:nvPr/>
+        </p:nvSpPr>
+        <p:spPr>
+          <a:xfrm>
+            <a:off x="7114032" y="3573018"/>
+            <a:ext cx="1060704" cy="219456"/>
+          </a:xfrm>
+          <a:prstGeom prst="rect">
+            <a:avLst/>
+          </a:prstGeom>
+          <a:noFill/>
+          <a:ln/>
+        </p:spPr>
+        <p:txBody>
+          <a:bodyPr wrap="square" lIns="0" tIns="0" rIns="0" bIns="0" rtlCol="0" anchor="ctr"/>
+          <a:lstStyle/>
+          <a:p>
+            <a:pPr algn="ctr" indent="0" marL="0">
+              <a:buNone/>
+            </a:pPr>
+            <a:r>
+              <a:rPr lang="en-US" sz="650" dirty="0">
+                <a:solidFill>
+                  <a:srgbClr val="898781"/>
+                </a:solidFill>
+                <a:latin typeface="Arial" pitchFamily="34" charset="0"/>
+                <a:ea typeface="Arial" pitchFamily="34" charset="-122"/>
+                <a:cs typeface="Arial" pitchFamily="34" charset="-120"/>
+              </a:rPr>
+              <a:t>● </a:t>
+            </a:r>
+            <a:pPr algn="ctr" indent="0" marL="0">
+              <a:buNone/>
+            </a:pPr>
+            <a:r>
+              <a:rPr lang="en-US" sz="800" b="1" dirty="0">
+                <a:solidFill>
+                  <a:srgbClr val="52514E"/>
+                </a:solidFill>
+                <a:latin typeface="Arial" pitchFamily="34" charset="0"/>
+                <a:ea typeface="Arial" pitchFamily="34" charset="-122"/>
+                <a:cs typeface="Arial" pitchFamily="34" charset="-120"/>
+              </a:rPr>
+              <a:t>Consultation</a:t>
+            </a:r>
+            <a:endParaRPr lang="en-US" sz="650" dirty="0"/>
+          </a:p>
+        </p:txBody>
+      </p:sp>
+      <p:sp>
+        <p:nvSpPr>
+          <p:cNvPr id="76" name="Shape 72"/>
+          <p:cNvSpPr/>
+          <p:nvPr/>
+        </p:nvSpPr>
+        <p:spPr>
+          <a:xfrm>
+            <a:off x="7114032" y="3915918"/>
+            <a:ext cx="731520" cy="219456"/>
+          </a:xfrm>
+          <a:prstGeom prst="roundRect">
+            <a:avLst>
+              <a:gd name="adj" fmla="val 50000"/>
+            </a:avLst>
+          </a:prstGeom>
+          <a:solidFill>
             <a:srgbClr val="E5EEFB"/>
           </a:solidFill>
           <a:ln/>
@@ -5324,13 +7288,13 @@
       </p:sp>
       <p:sp>
         <p:nvSpPr>
-          <p:cNvPr id="57" name="Text 54"/>
-          <p:cNvSpPr/>
-          <p:nvPr/>
-        </p:nvSpPr>
-        <p:spPr>
-          <a:xfrm>
-            <a:off x="2286000" y="5998464"/>
+          <p:cNvPr id="77" name="Text 73"/>
+          <p:cNvSpPr/>
+          <p:nvPr/>
+        </p:nvSpPr>
+        <p:spPr>
+          <a:xfrm>
+            <a:off x="7114032" y="3915918"/>
             <a:ext cx="731520" cy="219456"/>
           </a:xfrm>
           <a:prstGeom prst="rect">
@@ -5377,14 +7341,14 @@
       </p:sp>
       <p:sp>
         <p:nvSpPr>
-          <p:cNvPr id="58" name="Shape 55"/>
-          <p:cNvSpPr/>
-          <p:nvPr/>
-        </p:nvSpPr>
-        <p:spPr>
-          <a:xfrm>
-            <a:off x="2286000" y="6327648"/>
-            <a:ext cx="1060704" cy="219456"/>
+          <p:cNvPr id="78" name="Shape 74"/>
+          <p:cNvSpPr/>
+          <p:nvPr/>
+        </p:nvSpPr>
+        <p:spPr>
+          <a:xfrm>
+            <a:off x="7114032" y="4258818"/>
+            <a:ext cx="731520" cy="219456"/>
           </a:xfrm>
           <a:prstGeom prst="roundRect">
             <a:avLst>
@@ -5392,1605 +7356,6 @@
             </a:avLst>
           </a:prstGeom>
           <a:solidFill>
-            <a:srgbClr val="F0EFEC"/>
-          </a:solidFill>
-          <a:ln/>
-        </p:spPr>
-      </p:sp>
-      <p:sp>
-        <p:nvSpPr>
-          <p:cNvPr id="59" name="Text 56"/>
-          <p:cNvSpPr/>
-          <p:nvPr/>
-        </p:nvSpPr>
-        <p:spPr>
-          <a:xfrm>
-            <a:off x="2286000" y="6327648"/>
-            <a:ext cx="1060704" cy="219456"/>
-          </a:xfrm>
-          <a:prstGeom prst="rect">
-            <a:avLst/>
-          </a:prstGeom>
-          <a:noFill/>
-          <a:ln/>
-        </p:spPr>
-        <p:txBody>
-          <a:bodyPr wrap="square" lIns="0" tIns="0" rIns="0" bIns="0" rtlCol="0" anchor="ctr"/>
-          <a:lstStyle/>
-          <a:p>
-            <a:pPr algn="ctr" indent="0" marL="0">
-              <a:buNone/>
-            </a:pPr>
-            <a:r>
-              <a:rPr lang="en-US" sz="650" dirty="0">
-                <a:solidFill>
-                  <a:srgbClr val="898781"/>
-                </a:solidFill>
-                <a:latin typeface="Arial" pitchFamily="34" charset="0"/>
-                <a:ea typeface="Arial" pitchFamily="34" charset="-122"/>
-                <a:cs typeface="Arial" pitchFamily="34" charset="-120"/>
-              </a:rPr>
-              <a:t>● </a:t>
-            </a:r>
-            <a:pPr algn="ctr" indent="0" marL="0">
-              <a:buNone/>
-            </a:pPr>
-            <a:r>
-              <a:rPr lang="en-US" sz="800" b="1" dirty="0">
-                <a:solidFill>
-                  <a:srgbClr val="52514E"/>
-                </a:solidFill>
-                <a:latin typeface="Arial" pitchFamily="34" charset="0"/>
-                <a:ea typeface="Arial" pitchFamily="34" charset="-122"/>
-                <a:cs typeface="Arial" pitchFamily="34" charset="-120"/>
-              </a:rPr>
-              <a:t>Consultation</a:t>
-            </a:r>
-            <a:endParaRPr lang="en-US" sz="650" dirty="0"/>
-          </a:p>
-        </p:txBody>
-      </p:sp>
-      <p:sp>
-        <p:nvSpPr>
-          <p:cNvPr id="60" name="Shape 57"/>
-          <p:cNvSpPr/>
-          <p:nvPr/>
-        </p:nvSpPr>
-        <p:spPr>
-          <a:xfrm>
-            <a:off x="2286000" y="6656832"/>
-            <a:ext cx="1060704" cy="219456"/>
-          </a:xfrm>
-          <a:prstGeom prst="roundRect">
-            <a:avLst>
-              <a:gd name="adj" fmla="val 50000"/>
-            </a:avLst>
-          </a:prstGeom>
-          <a:solidFill>
-            <a:srgbClr val="F0EFEC"/>
-          </a:solidFill>
-          <a:ln/>
-        </p:spPr>
-      </p:sp>
-      <p:sp>
-        <p:nvSpPr>
-          <p:cNvPr id="61" name="Text 58"/>
-          <p:cNvSpPr/>
-          <p:nvPr/>
-        </p:nvSpPr>
-        <p:spPr>
-          <a:xfrm>
-            <a:off x="2286000" y="6656832"/>
-            <a:ext cx="1060704" cy="219456"/>
-          </a:xfrm>
-          <a:prstGeom prst="rect">
-            <a:avLst/>
-          </a:prstGeom>
-          <a:noFill/>
-          <a:ln/>
-        </p:spPr>
-        <p:txBody>
-          <a:bodyPr wrap="square" lIns="0" tIns="0" rIns="0" bIns="0" rtlCol="0" anchor="ctr"/>
-          <a:lstStyle/>
-          <a:p>
-            <a:pPr algn="ctr" indent="0" marL="0">
-              <a:buNone/>
-            </a:pPr>
-            <a:r>
-              <a:rPr lang="en-US" sz="650" dirty="0">
-                <a:solidFill>
-                  <a:srgbClr val="898781"/>
-                </a:solidFill>
-                <a:latin typeface="Arial" pitchFamily="34" charset="0"/>
-                <a:ea typeface="Arial" pitchFamily="34" charset="-122"/>
-                <a:cs typeface="Arial" pitchFamily="34" charset="-120"/>
-              </a:rPr>
-              <a:t>● </a:t>
-            </a:r>
-            <a:pPr algn="ctr" indent="0" marL="0">
-              <a:buNone/>
-            </a:pPr>
-            <a:r>
-              <a:rPr lang="en-US" sz="800" b="1" dirty="0">
-                <a:solidFill>
-                  <a:srgbClr val="52514E"/>
-                </a:solidFill>
-                <a:latin typeface="Arial" pitchFamily="34" charset="0"/>
-                <a:ea typeface="Arial" pitchFamily="34" charset="-122"/>
-                <a:cs typeface="Arial" pitchFamily="34" charset="-120"/>
-              </a:rPr>
-              <a:t>Consultation</a:t>
-            </a:r>
-            <a:endParaRPr lang="en-US" sz="650" dirty="0"/>
-          </a:p>
-        </p:txBody>
-      </p:sp>
-      <p:sp>
-        <p:nvSpPr>
-          <p:cNvPr id="62" name="Shape 59"/>
-          <p:cNvSpPr/>
-          <p:nvPr/>
-        </p:nvSpPr>
-        <p:spPr>
-          <a:xfrm>
-            <a:off x="2286000" y="6986016"/>
-            <a:ext cx="1060704" cy="219456"/>
-          </a:xfrm>
-          <a:prstGeom prst="roundRect">
-            <a:avLst>
-              <a:gd name="adj" fmla="val 50000"/>
-            </a:avLst>
-          </a:prstGeom>
-          <a:solidFill>
-            <a:srgbClr val="F0EFEC"/>
-          </a:solidFill>
-          <a:ln/>
-        </p:spPr>
-      </p:sp>
-      <p:sp>
-        <p:nvSpPr>
-          <p:cNvPr id="63" name="Text 60"/>
-          <p:cNvSpPr/>
-          <p:nvPr/>
-        </p:nvSpPr>
-        <p:spPr>
-          <a:xfrm>
-            <a:off x="2286000" y="6986016"/>
-            <a:ext cx="1060704" cy="219456"/>
-          </a:xfrm>
-          <a:prstGeom prst="rect">
-            <a:avLst/>
-          </a:prstGeom>
-          <a:noFill/>
-          <a:ln/>
-        </p:spPr>
-        <p:txBody>
-          <a:bodyPr wrap="square" lIns="0" tIns="0" rIns="0" bIns="0" rtlCol="0" anchor="ctr"/>
-          <a:lstStyle/>
-          <a:p>
-            <a:pPr algn="ctr" indent="0" marL="0">
-              <a:buNone/>
-            </a:pPr>
-            <a:r>
-              <a:rPr lang="en-US" sz="650" dirty="0">
-                <a:solidFill>
-                  <a:srgbClr val="898781"/>
-                </a:solidFill>
-                <a:latin typeface="Arial" pitchFamily="34" charset="0"/>
-                <a:ea typeface="Arial" pitchFamily="34" charset="-122"/>
-                <a:cs typeface="Arial" pitchFamily="34" charset="-120"/>
-              </a:rPr>
-              <a:t>● </a:t>
-            </a:r>
-            <a:pPr algn="ctr" indent="0" marL="0">
-              <a:buNone/>
-            </a:pPr>
-            <a:r>
-              <a:rPr lang="en-US" sz="800" b="1" dirty="0">
-                <a:solidFill>
-                  <a:srgbClr val="52514E"/>
-                </a:solidFill>
-                <a:latin typeface="Arial" pitchFamily="34" charset="0"/>
-                <a:ea typeface="Arial" pitchFamily="34" charset="-122"/>
-                <a:cs typeface="Arial" pitchFamily="34" charset="-120"/>
-              </a:rPr>
-              <a:t>Consultation</a:t>
-            </a:r>
-            <a:endParaRPr lang="en-US" sz="650" dirty="0"/>
-          </a:p>
-        </p:txBody>
-      </p:sp>
-      <p:sp>
-        <p:nvSpPr>
-          <p:cNvPr id="64" name="Shape 61"/>
-          <p:cNvSpPr/>
-          <p:nvPr/>
-        </p:nvSpPr>
-        <p:spPr>
-          <a:xfrm>
-            <a:off x="6126480" y="2318004"/>
-            <a:ext cx="274320" cy="187452"/>
-          </a:xfrm>
-          <a:prstGeom prst="roundRect">
-            <a:avLst>
-              <a:gd name="adj" fmla="val 9756"/>
-            </a:avLst>
-          </a:prstGeom>
-          <a:solidFill>
-            <a:srgbClr val="FFFFFF"/>
-          </a:solidFill>
-          <a:ln w="9525">
-            <a:solidFill>
-              <a:srgbClr val="D5D3CC"/>
-            </a:solidFill>
-            <a:prstDash val="solid"/>
-          </a:ln>
-        </p:spPr>
-      </p:sp>
-      <p:sp>
-        <p:nvSpPr>
-          <p:cNvPr id="65" name="Shape 62"/>
-          <p:cNvSpPr/>
-          <p:nvPr/>
-        </p:nvSpPr>
-        <p:spPr>
-          <a:xfrm>
-            <a:off x="6211153" y="2359243"/>
-            <a:ext cx="104973" cy="104973"/>
-          </a:xfrm>
-          <a:prstGeom prst="ellipse">
-            <a:avLst/>
-          </a:prstGeom>
-          <a:solidFill>
-            <a:srgbClr val="003478"/>
-          </a:solidFill>
-          <a:ln/>
-        </p:spPr>
-      </p:sp>
-      <p:sp>
-        <p:nvSpPr>
-          <p:cNvPr id="66" name="Shape 63"/>
-          <p:cNvSpPr/>
-          <p:nvPr/>
-        </p:nvSpPr>
-        <p:spPr>
-          <a:xfrm>
-            <a:off x="6211153" y="2359243"/>
-            <a:ext cx="104973" cy="104973"/>
-          </a:xfrm>
-          <a:prstGeom prst="pie">
-            <a:avLst>
-              <a:gd name="adj1" fmla="val 10800000"/>
-              <a:gd name="adj2" fmla="val 21600000"/>
-            </a:avLst>
-          </a:prstGeom>
-          <a:solidFill>
-            <a:srgbClr val="C60C30"/>
-          </a:solidFill>
-          <a:ln/>
-        </p:spPr>
-      </p:sp>
-      <p:sp>
-        <p:nvSpPr>
-          <p:cNvPr id="67" name="Text 64"/>
-          <p:cNvSpPr/>
-          <p:nvPr/>
-        </p:nvSpPr>
-        <p:spPr>
-          <a:xfrm>
-            <a:off x="6473952" y="2276856"/>
-            <a:ext cx="1463040" cy="274320"/>
-          </a:xfrm>
-          <a:prstGeom prst="rect">
-            <a:avLst/>
-          </a:prstGeom>
-          <a:noFill/>
-          <a:ln/>
-        </p:spPr>
-        <p:txBody>
-          <a:bodyPr wrap="square" lIns="0" tIns="0" rIns="0" bIns="0" rtlCol="0" anchor="ctr"/>
-          <a:lstStyle/>
-          <a:p>
-            <a:pPr indent="0" marL="0">
-              <a:buNone/>
-            </a:pPr>
-            <a:r>
-              <a:rPr lang="en-US" sz="1400" b="1" spc="100" kern="0" dirty="0">
-                <a:solidFill>
-                  <a:srgbClr val="0B0B0B"/>
-                </a:solidFill>
-                <a:latin typeface="Arial" pitchFamily="34" charset="0"/>
-                <a:ea typeface="Arial" pitchFamily="34" charset="-122"/>
-                <a:cs typeface="Arial" pitchFamily="34" charset="-120"/>
-              </a:rPr>
-              <a:t>KOREA</a:t>
-            </a:r>
-            <a:endParaRPr lang="en-US" sz="1400" dirty="0"/>
-          </a:p>
-        </p:txBody>
-      </p:sp>
-      <p:sp>
-        <p:nvSpPr>
-          <p:cNvPr id="68" name="Text 65"/>
-          <p:cNvSpPr/>
-          <p:nvPr/>
-        </p:nvSpPr>
-        <p:spPr>
-          <a:xfrm>
-            <a:off x="6931152" y="2327148"/>
-            <a:ext cx="2743200" cy="201168"/>
-          </a:xfrm>
-          <a:prstGeom prst="rect">
-            <a:avLst/>
-          </a:prstGeom>
-          <a:noFill/>
-          <a:ln/>
-        </p:spPr>
-        <p:txBody>
-          <a:bodyPr wrap="square" lIns="0" tIns="0" rIns="0" bIns="0" rtlCol="0" anchor="ctr"/>
-          <a:lstStyle/>
-          <a:p>
-            <a:pPr algn="r" indent="0" marL="0">
-              <a:buNone/>
-            </a:pPr>
-            <a:r>
-              <a:rPr lang="en-US" sz="1000" b="1" dirty="0">
-                <a:solidFill>
-                  <a:srgbClr val="0B0B0B"/>
-                </a:solidFill>
-                <a:latin typeface="Arial" pitchFamily="34" charset="0"/>
-                <a:ea typeface="Arial" pitchFamily="34" charset="-122"/>
-                <a:cs typeface="Arial" pitchFamily="34" charset="-120"/>
-              </a:rPr>
-              <a:t>5 deals</a:t>
-            </a:r>
-            <a:pPr algn="r" indent="0" marL="0">
-              <a:buNone/>
-            </a:pPr>
-            <a:r>
-              <a:rPr lang="en-US" sz="1000" dirty="0">
-                <a:solidFill>
-                  <a:srgbClr val="52514E"/>
-                </a:solidFill>
-                <a:latin typeface="Arial" pitchFamily="34" charset="0"/>
-                <a:ea typeface="Arial" pitchFamily="34" charset="-122"/>
-                <a:cs typeface="Arial" pitchFamily="34" charset="-120"/>
-              </a:rPr>
-              <a:t>  ·  $XX.X B total</a:t>
-            </a:r>
-            <a:endParaRPr lang="en-US" sz="1000" dirty="0"/>
-          </a:p>
-        </p:txBody>
-      </p:sp>
-      <p:sp>
-        <p:nvSpPr>
-          <p:cNvPr id="69" name="Shape 66"/>
-          <p:cNvSpPr/>
-          <p:nvPr/>
-        </p:nvSpPr>
-        <p:spPr>
-          <a:xfrm>
-            <a:off x="6126480" y="2615184"/>
-            <a:ext cx="3547872" cy="25603"/>
-          </a:xfrm>
-          <a:prstGeom prst="rect">
-            <a:avLst/>
-          </a:prstGeom>
-          <a:solidFill>
-            <a:srgbClr val="003478"/>
-          </a:solidFill>
-          <a:ln/>
-        </p:spPr>
-      </p:sp>
-      <p:graphicFrame>
-        <p:nvGraphicFramePr>
-          <p:cNvPr id="3" name="Table 1"/>
-          <p:cNvGraphicFramePr>
-            <a:graphicFrameLocks noGrp="1"/>
-          </p:cNvGraphicFramePr>
-          <p:nvPr>
-            <p:extLst>
-              <p:ext uri="{D42A27DB-BD31-4B8C-83A1-F6EECF244321}">
-                <p14:modId xmlns:p14="http://schemas.microsoft.com/office/powerpoint/2010/main" val="1579011935"/>
-              </p:ext>
-            </p:extLst>
-          </p:nvPr>
-        </p:nvGraphicFramePr>
-        <p:xfrm>
-          <a:off x="6126480" y="2724912"/>
-          <a:ext cx="3547872" cy="914400"/>
-        </p:xfrm>
-        <a:graphic>
-          <a:graphicData uri="http://schemas.openxmlformats.org/drawingml/2006/table">
-            <a:tbl>
-              <a:tblPr/>
-              <a:tblGrid>
-                <a:gridCol w="932688"/>
-                <a:gridCol w="1133856"/>
-                <a:gridCol w="640080"/>
-                <a:gridCol w="841248"/>
-              </a:tblGrid>
-              <a:tr h="256032">
-                <a:tc>
-                  <a:txBody>
-                    <a:bodyPr/>
-                    <a:lstStyle/>
-                    <a:p>
-                      <a:pPr indent="0" marL="0">
-                        <a:buNone/>
-                      </a:pPr>
-                      <a:r>
-                        <a:rPr lang="en-US" sz="750" b="1" dirty="0">
-                          <a:solidFill>
-                            <a:srgbClr val="898781"/>
-                          </a:solidFill>
-                          <a:latin typeface="Arial" pitchFamily="34" charset="0"/>
-                          <a:ea typeface="Arial" pitchFamily="34" charset="-122"/>
-                          <a:cs typeface="Arial" pitchFamily="34" charset="-120"/>
-                        </a:rPr>
-                        <a:t>COMPANY</a:t>
-                      </a:r>
-                      <a:endParaRPr lang="en-US" sz="750" dirty="0">
-                        <a:latin typeface="Arial" charset="0"/>
-                        <a:ea typeface="Arial" charset="0"/>
-                        <a:cs typeface="Arial" charset="0"/>
-                      </a:endParaRPr>
-                    </a:p>
-                  </a:txBody>
-                  <a:tcPr marL="27432" marR="27432" marT="18288" marB="18288" anchor="ctr">
-                    <a:lnL w="0" cap="flat" cmpd="sng" algn="ctr">
-                      <a:noFill/>
-                    </a:lnL>
-                    <a:lnR w="0" cap="flat" cmpd="sng" algn="ctr">
-                      <a:noFill/>
-                    </a:lnR>
-                    <a:lnT w="0" cap="flat" cmpd="sng" algn="ctr">
-                      <a:noFill/>
-                    </a:lnT>
-                    <a:lnB w="15875" cap="flat" cmpd="sng" algn="ctr">
-                      <a:solidFill>
-                        <a:srgbClr val="E1E0D9"/>
-                      </a:solidFill>
-                      <a:prstDash val="solid"/>
-                      <a:round/>
-                      <a:headEnd type="none" w="med" len="med"/>
-                      <a:tailEnd type="none" w="med" len="med"/>
-                    </a:lnB>
-                  </a:tcPr>
-                </a:tc>
-                <a:tc>
-                  <a:txBody>
-                    <a:bodyPr/>
-                    <a:lstStyle/>
-                    <a:p>
-                      <a:pPr indent="0" marL="0">
-                        <a:buNone/>
-                      </a:pPr>
-                      <a:r>
-                        <a:rPr lang="en-US" sz="750" b="1" dirty="0">
-                          <a:solidFill>
-                            <a:srgbClr val="898781"/>
-                          </a:solidFill>
-                          <a:latin typeface="Arial" pitchFamily="34" charset="0"/>
-                          <a:ea typeface="Arial" pitchFamily="34" charset="-122"/>
-                          <a:cs typeface="Arial" pitchFamily="34" charset="-120"/>
-                        </a:rPr>
-                        <a:t>STAGE</a:t>
-                      </a:r>
-                      <a:endParaRPr lang="en-US" sz="750" dirty="0">
-                        <a:latin typeface="Arial" charset="0"/>
-                        <a:ea typeface="Arial" charset="0"/>
-                        <a:cs typeface="Arial" charset="0"/>
-                      </a:endParaRPr>
-                    </a:p>
-                  </a:txBody>
-                  <a:tcPr marL="27432" marR="27432" marT="18288" marB="18288" anchor="ctr">
-                    <a:lnL w="0" cap="flat" cmpd="sng" algn="ctr">
-                      <a:noFill/>
-                    </a:lnL>
-                    <a:lnR w="0" cap="flat" cmpd="sng" algn="ctr">
-                      <a:noFill/>
-                    </a:lnR>
-                    <a:lnT w="0" cap="flat" cmpd="sng" algn="ctr">
-                      <a:noFill/>
-                    </a:lnT>
-                    <a:lnB w="15875" cap="flat" cmpd="sng" algn="ctr">
-                      <a:solidFill>
-                        <a:srgbClr val="E1E0D9"/>
-                      </a:solidFill>
-                      <a:prstDash val="solid"/>
-                      <a:round/>
-                      <a:headEnd type="none" w="med" len="med"/>
-                      <a:tailEnd type="none" w="med" len="med"/>
-                    </a:lnB>
-                  </a:tcPr>
-                </a:tc>
-                <a:tc>
-                  <a:txBody>
-                    <a:bodyPr/>
-                    <a:lstStyle/>
-                    <a:p>
-                      <a:pPr algn="r" indent="0" marL="0">
-                        <a:buNone/>
-                      </a:pPr>
-                      <a:r>
-                        <a:rPr lang="en-US" sz="750" b="1" dirty="0">
-                          <a:solidFill>
-                            <a:srgbClr val="898781"/>
-                          </a:solidFill>
-                          <a:latin typeface="Arial" pitchFamily="34" charset="0"/>
-                          <a:ea typeface="Arial" pitchFamily="34" charset="-122"/>
-                          <a:cs typeface="Arial" pitchFamily="34" charset="-120"/>
-                        </a:rPr>
-                        <a:t>DEAL SIZE</a:t>
-                      </a:r>
-                      <a:endParaRPr lang="en-US" sz="750" dirty="0">
-                        <a:latin typeface="Arial" charset="0"/>
-                        <a:ea typeface="Arial" charset="0"/>
-                        <a:cs typeface="Arial" charset="0"/>
-                      </a:endParaRPr>
-                    </a:p>
-                  </a:txBody>
-                  <a:tcPr marL="27432" marR="91440" marT="18288" marB="18288" anchor="ctr">
-                    <a:lnL w="0" cap="flat" cmpd="sng" algn="ctr">
-                      <a:noFill/>
-                    </a:lnL>
-                    <a:lnR w="0" cap="flat" cmpd="sng" algn="ctr">
-                      <a:noFill/>
-                    </a:lnR>
-                    <a:lnT w="0" cap="flat" cmpd="sng" algn="ctr">
-                      <a:noFill/>
-                    </a:lnT>
-                    <a:lnB w="15875" cap="flat" cmpd="sng" algn="ctr">
-                      <a:solidFill>
-                        <a:srgbClr val="E1E0D9"/>
-                      </a:solidFill>
-                      <a:prstDash val="solid"/>
-                      <a:round/>
-                      <a:headEnd type="none" w="med" len="med"/>
-                      <a:tailEnd type="none" w="med" len="med"/>
-                    </a:lnB>
-                  </a:tcPr>
-                </a:tc>
-                <a:tc>
-                  <a:txBody>
-                    <a:bodyPr/>
-                    <a:lstStyle/>
-                    <a:p>
-                      <a:pPr indent="0" marL="0">
-                        <a:buNone/>
-                      </a:pPr>
-                      <a:r>
-                        <a:rPr lang="en-US" sz="750" b="1" dirty="0">
-                          <a:solidFill>
-                            <a:srgbClr val="898781"/>
-                          </a:solidFill>
-                          <a:latin typeface="Arial" pitchFamily="34" charset="0"/>
-                          <a:ea typeface="Arial" pitchFamily="34" charset="-122"/>
-                          <a:cs typeface="Arial" pitchFamily="34" charset="-120"/>
-                        </a:rPr>
-                        <a:t>OWNER’S REP</a:t>
-                      </a:r>
-                      <a:endParaRPr lang="en-US" sz="750" dirty="0">
-                        <a:latin typeface="Arial" charset="0"/>
-                        <a:ea typeface="Arial" charset="0"/>
-                        <a:cs typeface="Arial" charset="0"/>
-                      </a:endParaRPr>
-                    </a:p>
-                  </a:txBody>
-                  <a:tcPr marL="91440" marR="27432" marT="18288" marB="18288" anchor="ctr">
-                    <a:lnL w="0" cap="flat" cmpd="sng" algn="ctr">
-                      <a:noFill/>
-                    </a:lnL>
-                    <a:lnR w="0" cap="flat" cmpd="sng" algn="ctr">
-                      <a:noFill/>
-                    </a:lnR>
-                    <a:lnT w="0" cap="flat" cmpd="sng" algn="ctr">
-                      <a:noFill/>
-                    </a:lnT>
-                    <a:lnB w="15875" cap="flat" cmpd="sng" algn="ctr">
-                      <a:solidFill>
-                        <a:srgbClr val="E1E0D9"/>
-                      </a:solidFill>
-                      <a:prstDash val="solid"/>
-                      <a:round/>
-                      <a:headEnd type="none" w="med" len="med"/>
-                      <a:tailEnd type="none" w="med" len="med"/>
-                    </a:lnB>
-                  </a:tcPr>
-                </a:tc>
-              </a:tr>
-              <a:tr h="329184">
-                <a:tc>
-                  <a:txBody>
-                    <a:bodyPr/>
-                    <a:lstStyle/>
-                    <a:p>
-                      <a:pPr indent="0" marL="0">
-                        <a:buNone/>
-                      </a:pPr>
-                      <a:r>
-                        <a:rPr lang="en-US" sz="950" b="1" dirty="0">
-                          <a:solidFill>
-                            <a:srgbClr val="0B0B0B"/>
-                          </a:solidFill>
-                          <a:latin typeface="Arial" pitchFamily="34" charset="0"/>
-                          <a:ea typeface="Arial" pitchFamily="34" charset="-122"/>
-                          <a:cs typeface="Arial" pitchFamily="34" charset="-120"/>
-                        </a:rPr>
-                        <a:t>Company 14</a:t>
-                      </a:r>
-                      <a:endParaRPr lang="en-US" sz="950" dirty="0">
-                        <a:latin typeface="Arial" charset="0"/>
-                        <a:ea typeface="Arial" charset="0"/>
-                        <a:cs typeface="Arial" charset="0"/>
-                      </a:endParaRPr>
-                    </a:p>
-                  </a:txBody>
-                  <a:tcPr marL="27432" marR="27432" marT="18288" marB="18288" anchor="ctr">
-                    <a:lnL w="0" cap="flat" cmpd="sng" algn="ctr">
-                      <a:noFill/>
-                    </a:lnL>
-                    <a:lnR w="0" cap="flat" cmpd="sng" algn="ctr">
-                      <a:noFill/>
-                    </a:lnR>
-                    <a:lnT w="0" cap="flat" cmpd="sng" algn="ctr">
-                      <a:noFill/>
-                    </a:lnT>
-                    <a:lnB w="9525" cap="flat" cmpd="sng" algn="ctr">
-                      <a:solidFill>
-                        <a:srgbClr val="E1E0D9"/>
-                      </a:solidFill>
-                      <a:prstDash val="solid"/>
-                      <a:round/>
-                      <a:headEnd type="none" w="med" len="med"/>
-                      <a:tailEnd type="none" w="med" len="med"/>
-                    </a:lnB>
-                  </a:tcPr>
-                </a:tc>
-                <a:tc>
-                  <a:txBody>
-                    <a:bodyPr/>
-                    <a:lstStyle/>
-                    <a:p>
-                      <a:pPr indent="0" marL="0">
-                        <a:buNone/>
-                      </a:pPr>
-                      <a:endParaRPr lang="en-US" sz="950" dirty="0">
-                        <a:latin typeface="Arial" charset="0"/>
-                        <a:ea typeface="Arial" charset="0"/>
-                        <a:cs typeface="Arial" charset="0"/>
-                      </a:endParaRPr>
-                    </a:p>
-                  </a:txBody>
-                  <a:tcPr marL="27432" marR="27432" marT="18288" marB="18288" anchor="ctr">
-                    <a:lnL w="0" cap="flat" cmpd="sng" algn="ctr">
-                      <a:noFill/>
-                    </a:lnL>
-                    <a:lnR w="0" cap="flat" cmpd="sng" algn="ctr">
-                      <a:noFill/>
-                    </a:lnR>
-                    <a:lnT w="0" cap="flat" cmpd="sng" algn="ctr">
-                      <a:noFill/>
-                    </a:lnT>
-                    <a:lnB w="9525" cap="flat" cmpd="sng" algn="ctr">
-                      <a:solidFill>
-                        <a:srgbClr val="E1E0D9"/>
-                      </a:solidFill>
-                      <a:prstDash val="solid"/>
-                      <a:round/>
-                      <a:headEnd type="none" w="med" len="med"/>
-                      <a:tailEnd type="none" w="med" len="med"/>
-                    </a:lnB>
-                  </a:tcPr>
-                </a:tc>
-                <a:tc>
-                  <a:txBody>
-                    <a:bodyPr/>
-                    <a:lstStyle/>
-                    <a:p>
-                      <a:pPr algn="r" indent="0" marL="0">
-                        <a:buNone/>
-                      </a:pPr>
-                      <a:r>
-                        <a:rPr lang="en-US" sz="950" dirty="0">
-                          <a:solidFill>
-                            <a:srgbClr val="0B0B0B"/>
-                          </a:solidFill>
-                          <a:latin typeface="Arial" pitchFamily="34" charset="0"/>
-                          <a:ea typeface="Arial" pitchFamily="34" charset="-122"/>
-                          <a:cs typeface="Arial" pitchFamily="34" charset="-120"/>
-                        </a:rPr>
-                        <a:t>$X.X B</a:t>
-                      </a:r>
-                      <a:endParaRPr lang="en-US" sz="950" dirty="0">
-                        <a:latin typeface="Arial" charset="0"/>
-                        <a:ea typeface="Arial" charset="0"/>
-                        <a:cs typeface="Arial" charset="0"/>
-                      </a:endParaRPr>
-                    </a:p>
-                  </a:txBody>
-                  <a:tcPr marL="27432" marR="91440" marT="18288" marB="18288" anchor="ctr">
-                    <a:lnL w="0" cap="flat" cmpd="sng" algn="ctr">
-                      <a:noFill/>
-                    </a:lnL>
-                    <a:lnR w="0" cap="flat" cmpd="sng" algn="ctr">
-                      <a:noFill/>
-                    </a:lnR>
-                    <a:lnT w="0" cap="flat" cmpd="sng" algn="ctr">
-                      <a:noFill/>
-                    </a:lnT>
-                    <a:lnB w="9525" cap="flat" cmpd="sng" algn="ctr">
-                      <a:solidFill>
-                        <a:srgbClr val="E1E0D9"/>
-                      </a:solidFill>
-                      <a:prstDash val="solid"/>
-                      <a:round/>
-                      <a:headEnd type="none" w="med" len="med"/>
-                      <a:tailEnd type="none" w="med" len="med"/>
-                    </a:lnB>
-                  </a:tcPr>
-                </a:tc>
-                <a:tc>
-                  <a:txBody>
-                    <a:bodyPr/>
-                    <a:lstStyle/>
-                    <a:p>
-                      <a:pPr indent="0" marL="0">
-                        <a:buNone/>
-                      </a:pPr>
-                      <a:r>
-                        <a:rPr lang="en-US" sz="950" dirty="0">
-                          <a:solidFill>
-                            <a:srgbClr val="52514E"/>
-                          </a:solidFill>
-                          <a:latin typeface="Arial" pitchFamily="34" charset="0"/>
-                          <a:ea typeface="Arial" pitchFamily="34" charset="-122"/>
-                          <a:cs typeface="Arial" pitchFamily="34" charset="-120"/>
-                        </a:rPr>
-                        <a:t>First Last</a:t>
-                      </a:r>
-                      <a:endParaRPr lang="en-US" sz="950" dirty="0">
-                        <a:latin typeface="Arial" charset="0"/>
-                        <a:ea typeface="Arial" charset="0"/>
-                        <a:cs typeface="Arial" charset="0"/>
-                      </a:endParaRPr>
-                    </a:p>
-                  </a:txBody>
-                  <a:tcPr marL="109728" marR="27432" marT="18288" marB="18288" anchor="ctr">
-                    <a:lnL w="0" cap="flat" cmpd="sng" algn="ctr">
-                      <a:noFill/>
-                    </a:lnL>
-                    <a:lnR w="0" cap="flat" cmpd="sng" algn="ctr">
-                      <a:noFill/>
-                    </a:lnR>
-                    <a:lnT w="0" cap="flat" cmpd="sng" algn="ctr">
-                      <a:noFill/>
-                    </a:lnT>
-                    <a:lnB w="9525" cap="flat" cmpd="sng" algn="ctr">
-                      <a:solidFill>
-                        <a:srgbClr val="E1E0D9"/>
-                      </a:solidFill>
-                      <a:prstDash val="solid"/>
-                      <a:round/>
-                      <a:headEnd type="none" w="med" len="med"/>
-                      <a:tailEnd type="none" w="med" len="med"/>
-                    </a:lnB>
-                  </a:tcPr>
-                </a:tc>
-              </a:tr>
-              <a:tr h="329184">
-                <a:tc>
-                  <a:txBody>
-                    <a:bodyPr/>
-                    <a:lstStyle/>
-                    <a:p>
-                      <a:pPr indent="0" marL="0">
-                        <a:buNone/>
-                      </a:pPr>
-                      <a:r>
-                        <a:rPr lang="en-US" sz="950" b="1" dirty="0">
-                          <a:solidFill>
-                            <a:srgbClr val="0B0B0B"/>
-                          </a:solidFill>
-                          <a:latin typeface="Arial" pitchFamily="34" charset="0"/>
-                          <a:ea typeface="Arial" pitchFamily="34" charset="-122"/>
-                          <a:cs typeface="Arial" pitchFamily="34" charset="-120"/>
-                        </a:rPr>
-                        <a:t>Company 15</a:t>
-                      </a:r>
-                      <a:endParaRPr lang="en-US" sz="950" dirty="0">
-                        <a:latin typeface="Arial" charset="0"/>
-                        <a:ea typeface="Arial" charset="0"/>
-                        <a:cs typeface="Arial" charset="0"/>
-                      </a:endParaRPr>
-                    </a:p>
-                  </a:txBody>
-                  <a:tcPr marL="27432" marR="27432" marT="18288" marB="18288" anchor="ctr">
-                    <a:lnL w="0" cap="flat" cmpd="sng" algn="ctr">
-                      <a:noFill/>
-                    </a:lnL>
-                    <a:lnR w="0" cap="flat" cmpd="sng" algn="ctr">
-                      <a:noFill/>
-                    </a:lnR>
-                    <a:lnT w="0" cap="flat" cmpd="sng" algn="ctr">
-                      <a:noFill/>
-                    </a:lnT>
-                    <a:lnB w="9525" cap="flat" cmpd="sng" algn="ctr">
-                      <a:solidFill>
-                        <a:srgbClr val="E1E0D9"/>
-                      </a:solidFill>
-                      <a:prstDash val="solid"/>
-                      <a:round/>
-                      <a:headEnd type="none" w="med" len="med"/>
-                      <a:tailEnd type="none" w="med" len="med"/>
-                    </a:lnB>
-                  </a:tcPr>
-                </a:tc>
-                <a:tc>
-                  <a:txBody>
-                    <a:bodyPr/>
-                    <a:lstStyle/>
-                    <a:p>
-                      <a:pPr indent="0" marL="0">
-                        <a:buNone/>
-                      </a:pPr>
-                      <a:endParaRPr lang="en-US" sz="950" dirty="0">
-                        <a:latin typeface="Arial" charset="0"/>
-                        <a:ea typeface="Arial" charset="0"/>
-                        <a:cs typeface="Arial" charset="0"/>
-                      </a:endParaRPr>
-                    </a:p>
-                  </a:txBody>
-                  <a:tcPr marL="27432" marR="27432" marT="18288" marB="18288" anchor="ctr">
-                    <a:lnL w="0" cap="flat" cmpd="sng" algn="ctr">
-                      <a:noFill/>
-                    </a:lnL>
-                    <a:lnR w="0" cap="flat" cmpd="sng" algn="ctr">
-                      <a:noFill/>
-                    </a:lnR>
-                    <a:lnT w="0" cap="flat" cmpd="sng" algn="ctr">
-                      <a:noFill/>
-                    </a:lnT>
-                    <a:lnB w="9525" cap="flat" cmpd="sng" algn="ctr">
-                      <a:solidFill>
-                        <a:srgbClr val="E1E0D9"/>
-                      </a:solidFill>
-                      <a:prstDash val="solid"/>
-                      <a:round/>
-                      <a:headEnd type="none" w="med" len="med"/>
-                      <a:tailEnd type="none" w="med" len="med"/>
-                    </a:lnB>
-                  </a:tcPr>
-                </a:tc>
-                <a:tc>
-                  <a:txBody>
-                    <a:bodyPr/>
-                    <a:lstStyle/>
-                    <a:p>
-                      <a:pPr algn="r" indent="0" marL="0">
-                        <a:buNone/>
-                      </a:pPr>
-                      <a:r>
-                        <a:rPr lang="en-US" sz="950" dirty="0">
-                          <a:solidFill>
-                            <a:srgbClr val="0B0B0B"/>
-                          </a:solidFill>
-                          <a:latin typeface="Arial" pitchFamily="34" charset="0"/>
-                          <a:ea typeface="Arial" pitchFamily="34" charset="-122"/>
-                          <a:cs typeface="Arial" pitchFamily="34" charset="-120"/>
-                        </a:rPr>
-                        <a:t>$X.X B</a:t>
-                      </a:r>
-                      <a:endParaRPr lang="en-US" sz="950" dirty="0">
-                        <a:latin typeface="Arial" charset="0"/>
-                        <a:ea typeface="Arial" charset="0"/>
-                        <a:cs typeface="Arial" charset="0"/>
-                      </a:endParaRPr>
-                    </a:p>
-                  </a:txBody>
-                  <a:tcPr marL="27432" marR="91440" marT="18288" marB="18288" anchor="ctr">
-                    <a:lnL w="0" cap="flat" cmpd="sng" algn="ctr">
-                      <a:noFill/>
-                    </a:lnL>
-                    <a:lnR w="0" cap="flat" cmpd="sng" algn="ctr">
-                      <a:noFill/>
-                    </a:lnR>
-                    <a:lnT w="0" cap="flat" cmpd="sng" algn="ctr">
-                      <a:noFill/>
-                    </a:lnT>
-                    <a:lnB w="9525" cap="flat" cmpd="sng" algn="ctr">
-                      <a:solidFill>
-                        <a:srgbClr val="E1E0D9"/>
-                      </a:solidFill>
-                      <a:prstDash val="solid"/>
-                      <a:round/>
-                      <a:headEnd type="none" w="med" len="med"/>
-                      <a:tailEnd type="none" w="med" len="med"/>
-                    </a:lnB>
-                  </a:tcPr>
-                </a:tc>
-                <a:tc>
-                  <a:txBody>
-                    <a:bodyPr/>
-                    <a:lstStyle/>
-                    <a:p>
-                      <a:pPr indent="0" marL="0">
-                        <a:buNone/>
-                      </a:pPr>
-                      <a:r>
-                        <a:rPr lang="en-US" sz="950" dirty="0">
-                          <a:solidFill>
-                            <a:srgbClr val="52514E"/>
-                          </a:solidFill>
-                          <a:latin typeface="Arial" pitchFamily="34" charset="0"/>
-                          <a:ea typeface="Arial" pitchFamily="34" charset="-122"/>
-                          <a:cs typeface="Arial" pitchFamily="34" charset="-120"/>
-                        </a:rPr>
-                        <a:t>First Last</a:t>
-                      </a:r>
-                      <a:endParaRPr lang="en-US" sz="950" dirty="0">
-                        <a:latin typeface="Arial" charset="0"/>
-                        <a:ea typeface="Arial" charset="0"/>
-                        <a:cs typeface="Arial" charset="0"/>
-                      </a:endParaRPr>
-                    </a:p>
-                  </a:txBody>
-                  <a:tcPr marL="109728" marR="27432" marT="18288" marB="18288" anchor="ctr">
-                    <a:lnL w="0" cap="flat" cmpd="sng" algn="ctr">
-                      <a:noFill/>
-                    </a:lnL>
-                    <a:lnR w="0" cap="flat" cmpd="sng" algn="ctr">
-                      <a:noFill/>
-                    </a:lnR>
-                    <a:lnT w="0" cap="flat" cmpd="sng" algn="ctr">
-                      <a:noFill/>
-                    </a:lnT>
-                    <a:lnB w="9525" cap="flat" cmpd="sng" algn="ctr">
-                      <a:solidFill>
-                        <a:srgbClr val="E1E0D9"/>
-                      </a:solidFill>
-                      <a:prstDash val="solid"/>
-                      <a:round/>
-                      <a:headEnd type="none" w="med" len="med"/>
-                      <a:tailEnd type="none" w="med" len="med"/>
-                    </a:lnB>
-                  </a:tcPr>
-                </a:tc>
-              </a:tr>
-              <a:tr h="329184">
-                <a:tc>
-                  <a:txBody>
-                    <a:bodyPr/>
-                    <a:lstStyle/>
-                    <a:p>
-                      <a:pPr indent="0" marL="0">
-                        <a:buNone/>
-                      </a:pPr>
-                      <a:r>
-                        <a:rPr lang="en-US" sz="950" b="1" dirty="0">
-                          <a:solidFill>
-                            <a:srgbClr val="0B0B0B"/>
-                          </a:solidFill>
-                          <a:latin typeface="Arial" pitchFamily="34" charset="0"/>
-                          <a:ea typeface="Arial" pitchFamily="34" charset="-122"/>
-                          <a:cs typeface="Arial" pitchFamily="34" charset="-120"/>
-                        </a:rPr>
-                        <a:t>Company 16</a:t>
-                      </a:r>
-                      <a:endParaRPr lang="en-US" sz="950" dirty="0">
-                        <a:latin typeface="Arial" charset="0"/>
-                        <a:ea typeface="Arial" charset="0"/>
-                        <a:cs typeface="Arial" charset="0"/>
-                      </a:endParaRPr>
-                    </a:p>
-                  </a:txBody>
-                  <a:tcPr marL="27432" marR="27432" marT="18288" marB="18288" anchor="ctr">
-                    <a:lnL w="0" cap="flat" cmpd="sng" algn="ctr">
-                      <a:noFill/>
-                    </a:lnL>
-                    <a:lnR w="0" cap="flat" cmpd="sng" algn="ctr">
-                      <a:noFill/>
-                    </a:lnR>
-                    <a:lnT w="0" cap="flat" cmpd="sng" algn="ctr">
-                      <a:noFill/>
-                    </a:lnT>
-                    <a:lnB w="9525" cap="flat" cmpd="sng" algn="ctr">
-                      <a:solidFill>
-                        <a:srgbClr val="E1E0D9"/>
-                      </a:solidFill>
-                      <a:prstDash val="solid"/>
-                      <a:round/>
-                      <a:headEnd type="none" w="med" len="med"/>
-                      <a:tailEnd type="none" w="med" len="med"/>
-                    </a:lnB>
-                  </a:tcPr>
-                </a:tc>
-                <a:tc>
-                  <a:txBody>
-                    <a:bodyPr/>
-                    <a:lstStyle/>
-                    <a:p>
-                      <a:pPr indent="0" marL="0">
-                        <a:buNone/>
-                      </a:pPr>
-                      <a:endParaRPr lang="en-US" sz="950" dirty="0">
-                        <a:latin typeface="Arial" charset="0"/>
-                        <a:ea typeface="Arial" charset="0"/>
-                        <a:cs typeface="Arial" charset="0"/>
-                      </a:endParaRPr>
-                    </a:p>
-                  </a:txBody>
-                  <a:tcPr marL="27432" marR="27432" marT="18288" marB="18288" anchor="ctr">
-                    <a:lnL w="0" cap="flat" cmpd="sng" algn="ctr">
-                      <a:noFill/>
-                    </a:lnL>
-                    <a:lnR w="0" cap="flat" cmpd="sng" algn="ctr">
-                      <a:noFill/>
-                    </a:lnR>
-                    <a:lnT w="0" cap="flat" cmpd="sng" algn="ctr">
-                      <a:noFill/>
-                    </a:lnT>
-                    <a:lnB w="9525" cap="flat" cmpd="sng" algn="ctr">
-                      <a:solidFill>
-                        <a:srgbClr val="E1E0D9"/>
-                      </a:solidFill>
-                      <a:prstDash val="solid"/>
-                      <a:round/>
-                      <a:headEnd type="none" w="med" len="med"/>
-                      <a:tailEnd type="none" w="med" len="med"/>
-                    </a:lnB>
-                  </a:tcPr>
-                </a:tc>
-                <a:tc>
-                  <a:txBody>
-                    <a:bodyPr/>
-                    <a:lstStyle/>
-                    <a:p>
-                      <a:pPr algn="r" indent="0" marL="0">
-                        <a:buNone/>
-                      </a:pPr>
-                      <a:r>
-                        <a:rPr lang="en-US" sz="950" dirty="0">
-                          <a:solidFill>
-                            <a:srgbClr val="0B0B0B"/>
-                          </a:solidFill>
-                          <a:latin typeface="Arial" pitchFamily="34" charset="0"/>
-                          <a:ea typeface="Arial" pitchFamily="34" charset="-122"/>
-                          <a:cs typeface="Arial" pitchFamily="34" charset="-120"/>
-                        </a:rPr>
-                        <a:t>$XXX M</a:t>
-                      </a:r>
-                      <a:endParaRPr lang="en-US" sz="950" dirty="0">
-                        <a:latin typeface="Arial" charset="0"/>
-                        <a:ea typeface="Arial" charset="0"/>
-                        <a:cs typeface="Arial" charset="0"/>
-                      </a:endParaRPr>
-                    </a:p>
-                  </a:txBody>
-                  <a:tcPr marL="27432" marR="91440" marT="18288" marB="18288" anchor="ctr">
-                    <a:lnL w="0" cap="flat" cmpd="sng" algn="ctr">
-                      <a:noFill/>
-                    </a:lnL>
-                    <a:lnR w="0" cap="flat" cmpd="sng" algn="ctr">
-                      <a:noFill/>
-                    </a:lnR>
-                    <a:lnT w="0" cap="flat" cmpd="sng" algn="ctr">
-                      <a:noFill/>
-                    </a:lnT>
-                    <a:lnB w="9525" cap="flat" cmpd="sng" algn="ctr">
-                      <a:solidFill>
-                        <a:srgbClr val="E1E0D9"/>
-                      </a:solidFill>
-                      <a:prstDash val="solid"/>
-                      <a:round/>
-                      <a:headEnd type="none" w="med" len="med"/>
-                      <a:tailEnd type="none" w="med" len="med"/>
-                    </a:lnB>
-                  </a:tcPr>
-                </a:tc>
-                <a:tc>
-                  <a:txBody>
-                    <a:bodyPr/>
-                    <a:lstStyle/>
-                    <a:p>
-                      <a:pPr indent="0" marL="0">
-                        <a:buNone/>
-                      </a:pPr>
-                      <a:r>
-                        <a:rPr lang="en-US" sz="950" dirty="0">
-                          <a:solidFill>
-                            <a:srgbClr val="52514E"/>
-                          </a:solidFill>
-                          <a:latin typeface="Arial" pitchFamily="34" charset="0"/>
-                          <a:ea typeface="Arial" pitchFamily="34" charset="-122"/>
-                          <a:cs typeface="Arial" pitchFamily="34" charset="-120"/>
-                        </a:rPr>
-                        <a:t>First Last</a:t>
-                      </a:r>
-                      <a:endParaRPr lang="en-US" sz="950" dirty="0">
-                        <a:latin typeface="Arial" charset="0"/>
-                        <a:ea typeface="Arial" charset="0"/>
-                        <a:cs typeface="Arial" charset="0"/>
-                      </a:endParaRPr>
-                    </a:p>
-                  </a:txBody>
-                  <a:tcPr marL="109728" marR="27432" marT="18288" marB="18288" anchor="ctr">
-                    <a:lnL w="0" cap="flat" cmpd="sng" algn="ctr">
-                      <a:noFill/>
-                    </a:lnL>
-                    <a:lnR w="0" cap="flat" cmpd="sng" algn="ctr">
-                      <a:noFill/>
-                    </a:lnR>
-                    <a:lnT w="0" cap="flat" cmpd="sng" algn="ctr">
-                      <a:noFill/>
-                    </a:lnT>
-                    <a:lnB w="9525" cap="flat" cmpd="sng" algn="ctr">
-                      <a:solidFill>
-                        <a:srgbClr val="E1E0D9"/>
-                      </a:solidFill>
-                      <a:prstDash val="solid"/>
-                      <a:round/>
-                      <a:headEnd type="none" w="med" len="med"/>
-                      <a:tailEnd type="none" w="med" len="med"/>
-                    </a:lnB>
-                  </a:tcPr>
-                </a:tc>
-              </a:tr>
-              <a:tr h="329184">
-                <a:tc>
-                  <a:txBody>
-                    <a:bodyPr/>
-                    <a:lstStyle/>
-                    <a:p>
-                      <a:pPr indent="0" marL="0">
-                        <a:buNone/>
-                      </a:pPr>
-                      <a:r>
-                        <a:rPr lang="en-US" sz="950" b="1" dirty="0">
-                          <a:solidFill>
-                            <a:srgbClr val="0B0B0B"/>
-                          </a:solidFill>
-                          <a:latin typeface="Arial" pitchFamily="34" charset="0"/>
-                          <a:ea typeface="Arial" pitchFamily="34" charset="-122"/>
-                          <a:cs typeface="Arial" pitchFamily="34" charset="-120"/>
-                        </a:rPr>
-                        <a:t>Company 17</a:t>
-                      </a:r>
-                      <a:endParaRPr lang="en-US" sz="950" dirty="0">
-                        <a:latin typeface="Arial" charset="0"/>
-                        <a:ea typeface="Arial" charset="0"/>
-                        <a:cs typeface="Arial" charset="0"/>
-                      </a:endParaRPr>
-                    </a:p>
-                  </a:txBody>
-                  <a:tcPr marL="27432" marR="27432" marT="18288" marB="18288" anchor="ctr">
-                    <a:lnL w="0" cap="flat" cmpd="sng" algn="ctr">
-                      <a:noFill/>
-                    </a:lnL>
-                    <a:lnR w="0" cap="flat" cmpd="sng" algn="ctr">
-                      <a:noFill/>
-                    </a:lnR>
-                    <a:lnT w="0" cap="flat" cmpd="sng" algn="ctr">
-                      <a:noFill/>
-                    </a:lnT>
-                    <a:lnB w="9525" cap="flat" cmpd="sng" algn="ctr">
-                      <a:solidFill>
-                        <a:srgbClr val="E1E0D9"/>
-                      </a:solidFill>
-                      <a:prstDash val="solid"/>
-                      <a:round/>
-                      <a:headEnd type="none" w="med" len="med"/>
-                      <a:tailEnd type="none" w="med" len="med"/>
-                    </a:lnB>
-                  </a:tcPr>
-                </a:tc>
-                <a:tc>
-                  <a:txBody>
-                    <a:bodyPr/>
-                    <a:lstStyle/>
-                    <a:p>
-                      <a:pPr indent="0" marL="0">
-                        <a:buNone/>
-                      </a:pPr>
-                      <a:endParaRPr lang="en-US" sz="950" dirty="0">
-                        <a:latin typeface="Arial" charset="0"/>
-                        <a:ea typeface="Arial" charset="0"/>
-                        <a:cs typeface="Arial" charset="0"/>
-                      </a:endParaRPr>
-                    </a:p>
-                  </a:txBody>
-                  <a:tcPr marL="27432" marR="27432" marT="18288" marB="18288" anchor="ctr">
-                    <a:lnL w="0" cap="flat" cmpd="sng" algn="ctr">
-                      <a:noFill/>
-                    </a:lnL>
-                    <a:lnR w="0" cap="flat" cmpd="sng" algn="ctr">
-                      <a:noFill/>
-                    </a:lnR>
-                    <a:lnT w="0" cap="flat" cmpd="sng" algn="ctr">
-                      <a:noFill/>
-                    </a:lnT>
-                    <a:lnB w="9525" cap="flat" cmpd="sng" algn="ctr">
-                      <a:solidFill>
-                        <a:srgbClr val="E1E0D9"/>
-                      </a:solidFill>
-                      <a:prstDash val="solid"/>
-                      <a:round/>
-                      <a:headEnd type="none" w="med" len="med"/>
-                      <a:tailEnd type="none" w="med" len="med"/>
-                    </a:lnB>
-                  </a:tcPr>
-                </a:tc>
-                <a:tc>
-                  <a:txBody>
-                    <a:bodyPr/>
-                    <a:lstStyle/>
-                    <a:p>
-                      <a:pPr algn="r" indent="0" marL="0">
-                        <a:buNone/>
-                      </a:pPr>
-                      <a:r>
-                        <a:rPr lang="en-US" sz="950" dirty="0">
-                          <a:solidFill>
-                            <a:srgbClr val="0B0B0B"/>
-                          </a:solidFill>
-                          <a:latin typeface="Arial" pitchFamily="34" charset="0"/>
-                          <a:ea typeface="Arial" pitchFamily="34" charset="-122"/>
-                          <a:cs typeface="Arial" pitchFamily="34" charset="-120"/>
-                        </a:rPr>
-                        <a:t>$X.X B</a:t>
-                      </a:r>
-                      <a:endParaRPr lang="en-US" sz="950" dirty="0">
-                        <a:latin typeface="Arial" charset="0"/>
-                        <a:ea typeface="Arial" charset="0"/>
-                        <a:cs typeface="Arial" charset="0"/>
-                      </a:endParaRPr>
-                    </a:p>
-                  </a:txBody>
-                  <a:tcPr marL="27432" marR="91440" marT="18288" marB="18288" anchor="ctr">
-                    <a:lnL w="0" cap="flat" cmpd="sng" algn="ctr">
-                      <a:noFill/>
-                    </a:lnL>
-                    <a:lnR w="0" cap="flat" cmpd="sng" algn="ctr">
-                      <a:noFill/>
-                    </a:lnR>
-                    <a:lnT w="0" cap="flat" cmpd="sng" algn="ctr">
-                      <a:noFill/>
-                    </a:lnT>
-                    <a:lnB w="9525" cap="flat" cmpd="sng" algn="ctr">
-                      <a:solidFill>
-                        <a:srgbClr val="E1E0D9"/>
-                      </a:solidFill>
-                      <a:prstDash val="solid"/>
-                      <a:round/>
-                      <a:headEnd type="none" w="med" len="med"/>
-                      <a:tailEnd type="none" w="med" len="med"/>
-                    </a:lnB>
-                  </a:tcPr>
-                </a:tc>
-                <a:tc>
-                  <a:txBody>
-                    <a:bodyPr/>
-                    <a:lstStyle/>
-                    <a:p>
-                      <a:pPr indent="0" marL="0">
-                        <a:buNone/>
-                      </a:pPr>
-                      <a:r>
-                        <a:rPr lang="en-US" sz="950" dirty="0">
-                          <a:solidFill>
-                            <a:srgbClr val="52514E"/>
-                          </a:solidFill>
-                          <a:latin typeface="Arial" pitchFamily="34" charset="0"/>
-                          <a:ea typeface="Arial" pitchFamily="34" charset="-122"/>
-                          <a:cs typeface="Arial" pitchFamily="34" charset="-120"/>
-                        </a:rPr>
-                        <a:t>First Last</a:t>
-                      </a:r>
-                      <a:endParaRPr lang="en-US" sz="950" dirty="0">
-                        <a:latin typeface="Arial" charset="0"/>
-                        <a:ea typeface="Arial" charset="0"/>
-                        <a:cs typeface="Arial" charset="0"/>
-                      </a:endParaRPr>
-                    </a:p>
-                  </a:txBody>
-                  <a:tcPr marL="109728" marR="27432" marT="18288" marB="18288" anchor="ctr">
-                    <a:lnL w="0" cap="flat" cmpd="sng" algn="ctr">
-                      <a:noFill/>
-                    </a:lnL>
-                    <a:lnR w="0" cap="flat" cmpd="sng" algn="ctr">
-                      <a:noFill/>
-                    </a:lnR>
-                    <a:lnT w="0" cap="flat" cmpd="sng" algn="ctr">
-                      <a:noFill/>
-                    </a:lnT>
-                    <a:lnB w="9525" cap="flat" cmpd="sng" algn="ctr">
-                      <a:solidFill>
-                        <a:srgbClr val="E1E0D9"/>
-                      </a:solidFill>
-                      <a:prstDash val="solid"/>
-                      <a:round/>
-                      <a:headEnd type="none" w="med" len="med"/>
-                      <a:tailEnd type="none" w="med" len="med"/>
-                    </a:lnB>
-                  </a:tcPr>
-                </a:tc>
-              </a:tr>
-              <a:tr h="329184">
-                <a:tc>
-                  <a:txBody>
-                    <a:bodyPr/>
-                    <a:lstStyle/>
-                    <a:p>
-                      <a:pPr indent="0" marL="0">
-                        <a:buNone/>
-                      </a:pPr>
-                      <a:r>
-                        <a:rPr lang="en-US" sz="950" b="1" dirty="0">
-                          <a:solidFill>
-                            <a:srgbClr val="0B0B0B"/>
-                          </a:solidFill>
-                          <a:latin typeface="Arial" pitchFamily="34" charset="0"/>
-                          <a:ea typeface="Arial" pitchFamily="34" charset="-122"/>
-                          <a:cs typeface="Arial" pitchFamily="34" charset="-120"/>
-                        </a:rPr>
-                        <a:t>Company 18</a:t>
-                      </a:r>
-                      <a:endParaRPr lang="en-US" sz="950" dirty="0">
-                        <a:latin typeface="Arial" charset="0"/>
-                        <a:ea typeface="Arial" charset="0"/>
-                        <a:cs typeface="Arial" charset="0"/>
-                      </a:endParaRPr>
-                    </a:p>
-                  </a:txBody>
-                  <a:tcPr marL="27432" marR="27432" marT="18288" marB="18288" anchor="ctr">
-                    <a:lnL w="0" cap="flat" cmpd="sng" algn="ctr">
-                      <a:noFill/>
-                    </a:lnL>
-                    <a:lnR w="0" cap="flat" cmpd="sng" algn="ctr">
-                      <a:noFill/>
-                    </a:lnR>
-                    <a:lnT w="0" cap="flat" cmpd="sng" algn="ctr">
-                      <a:noFill/>
-                    </a:lnT>
-                    <a:lnB w="9525" cap="flat" cmpd="sng" algn="ctr">
-                      <a:solidFill>
-                        <a:srgbClr val="E1E0D9"/>
-                      </a:solidFill>
-                      <a:prstDash val="solid"/>
-                      <a:round/>
-                      <a:headEnd type="none" w="med" len="med"/>
-                      <a:tailEnd type="none" w="med" len="med"/>
-                    </a:lnB>
-                  </a:tcPr>
-                </a:tc>
-                <a:tc>
-                  <a:txBody>
-                    <a:bodyPr/>
-                    <a:lstStyle/>
-                    <a:p>
-                      <a:pPr indent="0" marL="0">
-                        <a:buNone/>
-                      </a:pPr>
-                      <a:endParaRPr lang="en-US" sz="950" dirty="0">
-                        <a:latin typeface="Arial" charset="0"/>
-                        <a:ea typeface="Arial" charset="0"/>
-                        <a:cs typeface="Arial" charset="0"/>
-                      </a:endParaRPr>
-                    </a:p>
-                  </a:txBody>
-                  <a:tcPr marL="27432" marR="27432" marT="18288" marB="18288" anchor="ctr">
-                    <a:lnL w="0" cap="flat" cmpd="sng" algn="ctr">
-                      <a:noFill/>
-                    </a:lnL>
-                    <a:lnR w="0" cap="flat" cmpd="sng" algn="ctr">
-                      <a:noFill/>
-                    </a:lnR>
-                    <a:lnT w="0" cap="flat" cmpd="sng" algn="ctr">
-                      <a:noFill/>
-                    </a:lnT>
-                    <a:lnB w="9525" cap="flat" cmpd="sng" algn="ctr">
-                      <a:solidFill>
-                        <a:srgbClr val="E1E0D9"/>
-                      </a:solidFill>
-                      <a:prstDash val="solid"/>
-                      <a:round/>
-                      <a:headEnd type="none" w="med" len="med"/>
-                      <a:tailEnd type="none" w="med" len="med"/>
-                    </a:lnB>
-                  </a:tcPr>
-                </a:tc>
-                <a:tc>
-                  <a:txBody>
-                    <a:bodyPr/>
-                    <a:lstStyle/>
-                    <a:p>
-                      <a:pPr algn="r" indent="0" marL="0">
-                        <a:buNone/>
-                      </a:pPr>
-                      <a:r>
-                        <a:rPr lang="en-US" sz="950" dirty="0">
-                          <a:solidFill>
-                            <a:srgbClr val="0B0B0B"/>
-                          </a:solidFill>
-                          <a:latin typeface="Arial" pitchFamily="34" charset="0"/>
-                          <a:ea typeface="Arial" pitchFamily="34" charset="-122"/>
-                          <a:cs typeface="Arial" pitchFamily="34" charset="-120"/>
-                        </a:rPr>
-                        <a:t>$XXX M</a:t>
-                      </a:r>
-                      <a:endParaRPr lang="en-US" sz="950" dirty="0">
-                        <a:latin typeface="Arial" charset="0"/>
-                        <a:ea typeface="Arial" charset="0"/>
-                        <a:cs typeface="Arial" charset="0"/>
-                      </a:endParaRPr>
-                    </a:p>
-                  </a:txBody>
-                  <a:tcPr marL="27432" marR="91440" marT="18288" marB="18288" anchor="ctr">
-                    <a:lnL w="0" cap="flat" cmpd="sng" algn="ctr">
-                      <a:noFill/>
-                    </a:lnL>
-                    <a:lnR w="0" cap="flat" cmpd="sng" algn="ctr">
-                      <a:noFill/>
-                    </a:lnR>
-                    <a:lnT w="0" cap="flat" cmpd="sng" algn="ctr">
-                      <a:noFill/>
-                    </a:lnT>
-                    <a:lnB w="9525" cap="flat" cmpd="sng" algn="ctr">
-                      <a:solidFill>
-                        <a:srgbClr val="E1E0D9"/>
-                      </a:solidFill>
-                      <a:prstDash val="solid"/>
-                      <a:round/>
-                      <a:headEnd type="none" w="med" len="med"/>
-                      <a:tailEnd type="none" w="med" len="med"/>
-                    </a:lnB>
-                  </a:tcPr>
-                </a:tc>
-                <a:tc>
-                  <a:txBody>
-                    <a:bodyPr/>
-                    <a:lstStyle/>
-                    <a:p>
-                      <a:pPr indent="0" marL="0">
-                        <a:buNone/>
-                      </a:pPr>
-                      <a:r>
-                        <a:rPr lang="en-US" sz="950" dirty="0">
-                          <a:solidFill>
-                            <a:srgbClr val="52514E"/>
-                          </a:solidFill>
-                          <a:latin typeface="Arial" pitchFamily="34" charset="0"/>
-                          <a:ea typeface="Arial" pitchFamily="34" charset="-122"/>
-                          <a:cs typeface="Arial" pitchFamily="34" charset="-120"/>
-                        </a:rPr>
-                        <a:t>First Last</a:t>
-                      </a:r>
-                      <a:endParaRPr lang="en-US" sz="950" dirty="0">
-                        <a:latin typeface="Arial" charset="0"/>
-                        <a:ea typeface="Arial" charset="0"/>
-                        <a:cs typeface="Arial" charset="0"/>
-                      </a:endParaRPr>
-                    </a:p>
-                  </a:txBody>
-                  <a:tcPr marL="109728" marR="27432" marT="18288" marB="18288" anchor="ctr">
-                    <a:lnL w="0" cap="flat" cmpd="sng" algn="ctr">
-                      <a:noFill/>
-                    </a:lnL>
-                    <a:lnR w="0" cap="flat" cmpd="sng" algn="ctr">
-                      <a:noFill/>
-                    </a:lnR>
-                    <a:lnT w="0" cap="flat" cmpd="sng" algn="ctr">
-                      <a:noFill/>
-                    </a:lnT>
-                    <a:lnB w="9525" cap="flat" cmpd="sng" algn="ctr">
-                      <a:solidFill>
-                        <a:srgbClr val="E1E0D9"/>
-                      </a:solidFill>
-                      <a:prstDash val="solid"/>
-                      <a:round/>
-                      <a:headEnd type="none" w="med" len="med"/>
-                      <a:tailEnd type="none" w="med" len="med"/>
-                    </a:lnB>
-                  </a:tcPr>
-                </a:tc>
-              </a:tr>
-            </a:tbl>
-          </a:graphicData>
-        </a:graphic>
-      </p:graphicFrame>
-      <p:sp>
-        <p:nvSpPr>
-          <p:cNvPr id="71" name="Shape 67"/>
-          <p:cNvSpPr/>
-          <p:nvPr/>
-        </p:nvSpPr>
-        <p:spPr>
-          <a:xfrm>
-            <a:off x="7114032" y="3035808"/>
-            <a:ext cx="932688" cy="219456"/>
-          </a:xfrm>
-          <a:prstGeom prst="roundRect">
-            <a:avLst>
-              <a:gd name="adj" fmla="val 50000"/>
-            </a:avLst>
-          </a:prstGeom>
-          <a:solidFill>
-            <a:srgbClr val="E7F3E7"/>
-          </a:solidFill>
-          <a:ln/>
-        </p:spPr>
-      </p:sp>
-      <p:sp>
-        <p:nvSpPr>
-          <p:cNvPr id="72" name="Text 68"/>
-          <p:cNvSpPr/>
-          <p:nvPr/>
-        </p:nvSpPr>
-        <p:spPr>
-          <a:xfrm>
-            <a:off x="7114032" y="3035808"/>
-            <a:ext cx="932688" cy="219456"/>
-          </a:xfrm>
-          <a:prstGeom prst="rect">
-            <a:avLst/>
-          </a:prstGeom>
-          <a:noFill/>
-          <a:ln/>
-        </p:spPr>
-        <p:txBody>
-          <a:bodyPr wrap="square" lIns="0" tIns="0" rIns="0" bIns="0" rtlCol="0" anchor="ctr"/>
-          <a:lstStyle/>
-          <a:p>
-            <a:pPr algn="ctr" indent="0" marL="0">
-              <a:buNone/>
-            </a:pPr>
-            <a:r>
-              <a:rPr lang="en-US" sz="650" dirty="0">
-                <a:solidFill>
-                  <a:srgbClr val="0CA30C"/>
-                </a:solidFill>
-                <a:latin typeface="Arial" pitchFamily="34" charset="0"/>
-                <a:ea typeface="Arial" pitchFamily="34" charset="-122"/>
-                <a:cs typeface="Arial" pitchFamily="34" charset="-120"/>
-              </a:rPr>
-              <a:t>● </a:t>
-            </a:r>
-            <a:pPr algn="ctr" indent="0" marL="0">
-              <a:buNone/>
-            </a:pPr>
-            <a:r>
-              <a:rPr lang="en-US" sz="800" b="1" dirty="0">
-                <a:solidFill>
-                  <a:srgbClr val="006300"/>
-                </a:solidFill>
-                <a:latin typeface="Arial" pitchFamily="34" charset="0"/>
-                <a:ea typeface="Arial" pitchFamily="34" charset="-122"/>
-                <a:cs typeface="Arial" pitchFamily="34" charset="-120"/>
-              </a:rPr>
-              <a:t>Announced</a:t>
-            </a:r>
-            <a:endParaRPr lang="en-US" sz="650" dirty="0"/>
-          </a:p>
-        </p:txBody>
-      </p:sp>
-      <p:sp>
-        <p:nvSpPr>
-          <p:cNvPr id="73" name="Shape 69"/>
-          <p:cNvSpPr/>
-          <p:nvPr/>
-        </p:nvSpPr>
-        <p:spPr>
-          <a:xfrm>
-            <a:off x="7114032" y="3364992"/>
-            <a:ext cx="731520" cy="219456"/>
-          </a:xfrm>
-          <a:prstGeom prst="roundRect">
-            <a:avLst>
-              <a:gd name="adj" fmla="val 50000"/>
-            </a:avLst>
-          </a:prstGeom>
-          <a:solidFill>
             <a:srgbClr val="E5EEFB"/>
           </a:solidFill>
           <a:ln/>
@@ -6998,13 +7363,13 @@
       </p:sp>
       <p:sp>
         <p:nvSpPr>
-          <p:cNvPr id="74" name="Text 70"/>
-          <p:cNvSpPr/>
-          <p:nvPr/>
-        </p:nvSpPr>
-        <p:spPr>
-          <a:xfrm>
-            <a:off x="7114032" y="3364992"/>
+          <p:cNvPr id="79" name="Text 75"/>
+          <p:cNvSpPr/>
+          <p:nvPr/>
+        </p:nvSpPr>
+        <p:spPr>
+          <a:xfrm>
+            <a:off x="7114032" y="4258818"/>
             <a:ext cx="731520" cy="219456"/>
           </a:xfrm>
           <a:prstGeom prst="rect">
@@ -7051,13 +7416,13 @@
       </p:sp>
       <p:sp>
         <p:nvSpPr>
-          <p:cNvPr id="75" name="Shape 71"/>
-          <p:cNvSpPr/>
-          <p:nvPr/>
-        </p:nvSpPr>
-        <p:spPr>
-          <a:xfrm>
-            <a:off x="7114032" y="3694176"/>
+          <p:cNvPr id="80" name="Shape 76"/>
+          <p:cNvSpPr/>
+          <p:nvPr/>
+        </p:nvSpPr>
+        <p:spPr>
+          <a:xfrm>
+            <a:off x="7114032" y="4601718"/>
             <a:ext cx="731520" cy="219456"/>
           </a:xfrm>
           <a:prstGeom prst="roundRect">
@@ -7073,13 +7438,13 @@
       </p:sp>
       <p:sp>
         <p:nvSpPr>
-          <p:cNvPr id="76" name="Text 72"/>
-          <p:cNvSpPr/>
-          <p:nvPr/>
-        </p:nvSpPr>
-        <p:spPr>
-          <a:xfrm>
-            <a:off x="7114032" y="3694176"/>
+          <p:cNvPr id="81" name="Text 77"/>
+          <p:cNvSpPr/>
+          <p:nvPr/>
+        </p:nvSpPr>
+        <p:spPr>
+          <a:xfrm>
+            <a:off x="7114032" y="4601718"/>
             <a:ext cx="731520" cy="219456"/>
           </a:xfrm>
           <a:prstGeom prst="rect">
@@ -7126,163 +7491,13 @@
       </p:sp>
       <p:sp>
         <p:nvSpPr>
-          <p:cNvPr id="77" name="Shape 73"/>
-          <p:cNvSpPr/>
-          <p:nvPr/>
-        </p:nvSpPr>
-        <p:spPr>
-          <a:xfrm>
-            <a:off x="7114032" y="4023360"/>
-            <a:ext cx="1060704" cy="219456"/>
-          </a:xfrm>
-          <a:prstGeom prst="roundRect">
-            <a:avLst>
-              <a:gd name="adj" fmla="val 50000"/>
-            </a:avLst>
-          </a:prstGeom>
-          <a:solidFill>
-            <a:srgbClr val="F0EFEC"/>
-          </a:solidFill>
-          <a:ln/>
-        </p:spPr>
-      </p:sp>
-      <p:sp>
-        <p:nvSpPr>
-          <p:cNvPr id="78" name="Text 74"/>
-          <p:cNvSpPr/>
-          <p:nvPr/>
-        </p:nvSpPr>
-        <p:spPr>
-          <a:xfrm>
-            <a:off x="7114032" y="4023360"/>
-            <a:ext cx="1060704" cy="219456"/>
-          </a:xfrm>
-          <a:prstGeom prst="rect">
-            <a:avLst/>
-          </a:prstGeom>
-          <a:noFill/>
-          <a:ln/>
-        </p:spPr>
-        <p:txBody>
-          <a:bodyPr wrap="square" lIns="0" tIns="0" rIns="0" bIns="0" rtlCol="0" anchor="ctr"/>
-          <a:lstStyle/>
-          <a:p>
-            <a:pPr algn="ctr" indent="0" marL="0">
-              <a:buNone/>
-            </a:pPr>
-            <a:r>
-              <a:rPr lang="en-US" sz="650" dirty="0">
-                <a:solidFill>
-                  <a:srgbClr val="898781"/>
-                </a:solidFill>
-                <a:latin typeface="Arial" pitchFamily="34" charset="0"/>
-                <a:ea typeface="Arial" pitchFamily="34" charset="-122"/>
-                <a:cs typeface="Arial" pitchFamily="34" charset="-120"/>
-              </a:rPr>
-              <a:t>● </a:t>
-            </a:r>
-            <a:pPr algn="ctr" indent="0" marL="0">
-              <a:buNone/>
-            </a:pPr>
-            <a:r>
-              <a:rPr lang="en-US" sz="800" b="1" dirty="0">
-                <a:solidFill>
-                  <a:srgbClr val="52514E"/>
-                </a:solidFill>
-                <a:latin typeface="Arial" pitchFamily="34" charset="0"/>
-                <a:ea typeface="Arial" pitchFamily="34" charset="-122"/>
-                <a:cs typeface="Arial" pitchFamily="34" charset="-120"/>
-              </a:rPr>
-              <a:t>Consultation</a:t>
-            </a:r>
-            <a:endParaRPr lang="en-US" sz="650" dirty="0"/>
-          </a:p>
-        </p:txBody>
-      </p:sp>
-      <p:sp>
-        <p:nvSpPr>
-          <p:cNvPr id="79" name="Shape 75"/>
-          <p:cNvSpPr/>
-          <p:nvPr/>
-        </p:nvSpPr>
-        <p:spPr>
-          <a:xfrm>
-            <a:off x="7114032" y="4352544"/>
-            <a:ext cx="1060704" cy="219456"/>
-          </a:xfrm>
-          <a:prstGeom prst="roundRect">
-            <a:avLst>
-              <a:gd name="adj" fmla="val 50000"/>
-            </a:avLst>
-          </a:prstGeom>
-          <a:solidFill>
-            <a:srgbClr val="F0EFEC"/>
-          </a:solidFill>
-          <a:ln/>
-        </p:spPr>
-      </p:sp>
-      <p:sp>
-        <p:nvSpPr>
-          <p:cNvPr id="80" name="Text 76"/>
-          <p:cNvSpPr/>
-          <p:nvPr/>
-        </p:nvSpPr>
-        <p:spPr>
-          <a:xfrm>
-            <a:off x="7114032" y="4352544"/>
-            <a:ext cx="1060704" cy="219456"/>
-          </a:xfrm>
-          <a:prstGeom prst="rect">
-            <a:avLst/>
-          </a:prstGeom>
-          <a:noFill/>
-          <a:ln/>
-        </p:spPr>
-        <p:txBody>
-          <a:bodyPr wrap="square" lIns="0" tIns="0" rIns="0" bIns="0" rtlCol="0" anchor="ctr"/>
-          <a:lstStyle/>
-          <a:p>
-            <a:pPr algn="ctr" indent="0" marL="0">
-              <a:buNone/>
-            </a:pPr>
-            <a:r>
-              <a:rPr lang="en-US" sz="650" dirty="0">
-                <a:solidFill>
-                  <a:srgbClr val="898781"/>
-                </a:solidFill>
-                <a:latin typeface="Arial" pitchFamily="34" charset="0"/>
-                <a:ea typeface="Arial" pitchFamily="34" charset="-122"/>
-                <a:cs typeface="Arial" pitchFamily="34" charset="-120"/>
-              </a:rPr>
-              <a:t>● </a:t>
-            </a:r>
-            <a:pPr algn="ctr" indent="0" marL="0">
-              <a:buNone/>
-            </a:pPr>
-            <a:r>
-              <a:rPr lang="en-US" sz="800" b="1" dirty="0">
-                <a:solidFill>
-                  <a:srgbClr val="52514E"/>
-                </a:solidFill>
-                <a:latin typeface="Arial" pitchFamily="34" charset="0"/>
-                <a:ea typeface="Arial" pitchFamily="34" charset="-122"/>
-                <a:cs typeface="Arial" pitchFamily="34" charset="-120"/>
-              </a:rPr>
-              <a:t>Consultation</a:t>
-            </a:r>
-            <a:endParaRPr lang="en-US" sz="650" dirty="0"/>
-          </a:p>
-        </p:txBody>
-      </p:sp>
-      <p:sp>
-        <p:nvSpPr>
-          <p:cNvPr id="81" name="Shape 77"/>
-          <p:cNvSpPr/>
-          <p:nvPr/>
-        </p:nvSpPr>
-        <p:spPr>
-          <a:xfrm>
-            <a:off x="384048" y="7388352"/>
+          <p:cNvPr id="82" name="Shape 78"/>
+          <p:cNvSpPr/>
+          <p:nvPr/>
+        </p:nvSpPr>
+        <p:spPr>
+          <a:xfrm>
+            <a:off x="384048" y="7406640"/>
             <a:ext cx="9290304" cy="9144"/>
           </a:xfrm>
           <a:prstGeom prst="rect">
@@ -7296,52 +7511,13 @@
       </p:sp>
       <p:sp>
         <p:nvSpPr>
-          <p:cNvPr id="82" name="Text 78"/>
-          <p:cNvSpPr/>
-          <p:nvPr/>
-        </p:nvSpPr>
-        <p:spPr>
-          <a:xfrm>
-            <a:off x="384048" y="7443216"/>
-            <a:ext cx="5943600" cy="182880"/>
-          </a:xfrm>
-          <a:prstGeom prst="rect">
-            <a:avLst/>
-          </a:prstGeom>
-          <a:noFill/>
-          <a:ln/>
-        </p:spPr>
-        <p:txBody>
-          <a:bodyPr wrap="square" lIns="0" tIns="0" rIns="0" bIns="0" rtlCol="0" anchor="ctr"/>
-          <a:lstStyle/>
-          <a:p>
-            <a:pPr indent="0" marL="0">
-              <a:buNone/>
-            </a:pPr>
-            <a:r>
-              <a:rPr lang="en-US" sz="750" dirty="0">
-                <a:solidFill>
-                  <a:srgbClr val="898781"/>
-                </a:solidFill>
-                <a:latin typeface="Arial" pitchFamily="34" charset="0"/>
-                <a:ea typeface="Arial" pitchFamily="34" charset="-122"/>
-                <a:cs typeface="Arial" pitchFamily="34" charset="-120"/>
-              </a:rPr>
-              <a:t>U.S. Investment Accelerator   ·   Deal figures as reported by owner’s representatives</a:t>
-            </a:r>
-            <a:endParaRPr lang="en-US" sz="750" dirty="0"/>
-          </a:p>
-        </p:txBody>
-      </p:sp>
-      <p:sp>
-        <p:nvSpPr>
           <p:cNvPr id="83" name="Text 79"/>
           <p:cNvSpPr/>
           <p:nvPr/>
         </p:nvSpPr>
         <p:spPr>
           <a:xfrm>
-            <a:off x="6400800" y="7443216"/>
+            <a:off x="6400800" y="7461504"/>
             <a:ext cx="3273552" cy="182880"/>
           </a:xfrm>
           <a:prstGeom prst="rect">
@@ -7366,7 +7542,7 @@
                 <a:ea typeface="Arial" pitchFamily="34" charset="-122"/>
                 <a:cs typeface="Arial" pitchFamily="34" charset="-120"/>
               </a:rPr>
-              <a:t>Data as of July 29, 2026   ·   Page 1 of 1</a:t>
+              <a:t>Data as of July 29, 2026</a:t>
             </a:r>
             <a:endParaRPr lang="en-US" sz="750" dirty="0"/>
           </a:p>
@@ -7512,7 +7688,7 @@
         <p:spPr>
           <a:xfrm>
             <a:off x="10287000" y="3200400"/>
-            <a:ext cx="731520" cy="219456"/>
+            <a:ext cx="1060704" cy="219456"/>
           </a:xfrm>
           <a:prstGeom prst="roundRect">
             <a:avLst>
@@ -7520,6 +7696,81 @@
             </a:avLst>
           </a:prstGeom>
           <a:solidFill>
+            <a:srgbClr val="F0EFEC"/>
+          </a:solidFill>
+          <a:ln/>
+        </p:spPr>
+      </p:sp>
+      <p:sp>
+        <p:nvSpPr>
+          <p:cNvPr id="88" name="Text 84"/>
+          <p:cNvSpPr/>
+          <p:nvPr/>
+        </p:nvSpPr>
+        <p:spPr>
+          <a:xfrm>
+            <a:off x="10287000" y="3200400"/>
+            <a:ext cx="1060704" cy="219456"/>
+          </a:xfrm>
+          <a:prstGeom prst="rect">
+            <a:avLst/>
+          </a:prstGeom>
+          <a:noFill/>
+          <a:ln/>
+        </p:spPr>
+        <p:txBody>
+          <a:bodyPr wrap="square" lIns="0" tIns="0" rIns="0" bIns="0" rtlCol="0" anchor="ctr"/>
+          <a:lstStyle/>
+          <a:p>
+            <a:pPr algn="ctr" indent="0" marL="0">
+              <a:buNone/>
+            </a:pPr>
+            <a:r>
+              <a:rPr lang="en-US" sz="650" dirty="0">
+                <a:solidFill>
+                  <a:srgbClr val="898781"/>
+                </a:solidFill>
+                <a:latin typeface="Arial" pitchFamily="34" charset="0"/>
+                <a:ea typeface="Arial" pitchFamily="34" charset="-122"/>
+                <a:cs typeface="Arial" pitchFamily="34" charset="-120"/>
+              </a:rPr>
+              <a:t>● </a:t>
+            </a:r>
+            <a:pPr algn="ctr" indent="0" marL="0">
+              <a:buNone/>
+            </a:pPr>
+            <a:r>
+              <a:rPr lang="en-US" sz="800" b="1" dirty="0">
+                <a:solidFill>
+                  <a:srgbClr val="52514E"/>
+                </a:solidFill>
+                <a:latin typeface="Arial" pitchFamily="34" charset="0"/>
+                <a:ea typeface="Arial" pitchFamily="34" charset="-122"/>
+                <a:cs typeface="Arial" pitchFamily="34" charset="-120"/>
+              </a:rPr>
+              <a:t>Consultation</a:t>
+            </a:r>
+            <a:endParaRPr lang="en-US" sz="650" dirty="0"/>
+          </a:p>
+        </p:txBody>
+      </p:sp>
+      <p:sp>
+        <p:nvSpPr>
+          <p:cNvPr id="89" name="Shape 85"/>
+          <p:cNvSpPr/>
+          <p:nvPr/>
+        </p:nvSpPr>
+        <p:spPr>
+          <a:xfrm>
+            <a:off x="10287000" y="3520440"/>
+            <a:ext cx="731520" cy="219456"/>
+          </a:xfrm>
+          <a:prstGeom prst="roundRect">
+            <a:avLst>
+              <a:gd name="adj" fmla="val 50000"/>
+            </a:avLst>
+          </a:prstGeom>
+          <a:solidFill>
             <a:srgbClr val="E5EEFB"/>
           </a:solidFill>
           <a:ln/>
@@ -7527,13 +7778,13 @@
       </p:sp>
       <p:sp>
         <p:nvSpPr>
-          <p:cNvPr id="88" name="Text 84"/>
-          <p:cNvSpPr/>
-          <p:nvPr/>
-        </p:nvSpPr>
-        <p:spPr>
-          <a:xfrm>
-            <a:off x="10287000" y="3200400"/>
+          <p:cNvPr id="90" name="Text 86"/>
+          <p:cNvSpPr/>
+          <p:nvPr/>
+        </p:nvSpPr>
+        <p:spPr>
+          <a:xfrm>
+            <a:off x="10287000" y="3520440"/>
             <a:ext cx="731520" cy="219456"/>
           </a:xfrm>
           <a:prstGeom prst="rect">
@@ -7573,81 +7824,6 @@
                 <a:cs typeface="Arial" pitchFamily="34" charset="-120"/>
               </a:rPr>
               <a:t>Active</a:t>
-            </a:r>
-            <a:endParaRPr lang="en-US" sz="650" dirty="0"/>
-          </a:p>
-        </p:txBody>
-      </p:sp>
-      <p:sp>
-        <p:nvSpPr>
-          <p:cNvPr id="89" name="Shape 85"/>
-          <p:cNvSpPr/>
-          <p:nvPr/>
-        </p:nvSpPr>
-        <p:spPr>
-          <a:xfrm>
-            <a:off x="10287000" y="3520440"/>
-            <a:ext cx="1060704" cy="219456"/>
-          </a:xfrm>
-          <a:prstGeom prst="roundRect">
-            <a:avLst>
-              <a:gd name="adj" fmla="val 50000"/>
-            </a:avLst>
-          </a:prstGeom>
-          <a:solidFill>
-            <a:srgbClr val="F0EFEC"/>
-          </a:solidFill>
-          <a:ln/>
-        </p:spPr>
-      </p:sp>
-      <p:sp>
-        <p:nvSpPr>
-          <p:cNvPr id="90" name="Text 86"/>
-          <p:cNvSpPr/>
-          <p:nvPr/>
-        </p:nvSpPr>
-        <p:spPr>
-          <a:xfrm>
-            <a:off x="10287000" y="3520440"/>
-            <a:ext cx="1060704" cy="219456"/>
-          </a:xfrm>
-          <a:prstGeom prst="rect">
-            <a:avLst/>
-          </a:prstGeom>
-          <a:noFill/>
-          <a:ln/>
-        </p:spPr>
-        <p:txBody>
-          <a:bodyPr wrap="square" lIns="0" tIns="0" rIns="0" bIns="0" rtlCol="0" anchor="ctr"/>
-          <a:lstStyle/>
-          <a:p>
-            <a:pPr algn="ctr" indent="0" marL="0">
-              <a:buNone/>
-            </a:pPr>
-            <a:r>
-              <a:rPr lang="en-US" sz="650" dirty="0">
-                <a:solidFill>
-                  <a:srgbClr val="898781"/>
-                </a:solidFill>
-                <a:latin typeface="Arial" pitchFamily="34" charset="0"/>
-                <a:ea typeface="Arial" pitchFamily="34" charset="-122"/>
-                <a:cs typeface="Arial" pitchFamily="34" charset="-120"/>
-              </a:rPr>
-              <a:t>● </a:t>
-            </a:r>
-            <a:pPr algn="ctr" indent="0" marL="0">
-              <a:buNone/>
-            </a:pPr>
-            <a:r>
-              <a:rPr lang="en-US" sz="800" b="1" dirty="0">
-                <a:solidFill>
-                  <a:srgbClr val="52514E"/>
-                </a:solidFill>
-                <a:latin typeface="Arial" pitchFamily="34" charset="0"/>
-                <a:ea typeface="Arial" pitchFamily="34" charset="-122"/>
-                <a:cs typeface="Arial" pitchFamily="34" charset="-120"/>
-              </a:rPr>
-              <a:t>Consultation</a:t>
             </a:r>
             <a:endParaRPr lang="en-US" sz="650" dirty="0"/>
           </a:p>

--- a/deal-status-onepager/US-Investment-Accelerator-Deal-Status.pptx
+++ b/deal-status-onepager/US-Investment-Accelerator-Deal-Status.pptx
@@ -503,7 +503,7 @@
             <a:r>
               <a:rPr lang="en-US" dirty="0"/>
               <a:t>FILL-IN GUIDE
-1. Type over every gray/placeholder value: Company 1-19, the $X.X B deal sizes (all in billions), First Last (owner's rep), the summary tiles, and the two '$XX.X B total' figures next to JAPAN and KOREA.
+1. Type over every gray/placeholder value: Company 1-19, Sector, the $X.X B deal sizes (all in billions), First Last (owner's rep), the summary tiles, and the two '$XX.X B total' figures next to JAPAN and KOREA.
 2. Stage tags are already set to the plan: Japan = 6 Announced, 3 Consultation, 4 Active. Korea = 3 Consultation, 3 Active (none announced). To change one anyway, delete it and Ctrl/Cmd-drag a spare tag from the right of the page into place. The spares sit off the page and never print.
 3. Add/remove rows: click in a table, use Table Layout &gt; Insert/Delete Rows. If you change row counts, drag the tags to keep them aligned with their rows, and update the counts in the summary strip.
 4. Rows are grouped by stage: Announced first, then Consultation, then Active.
@@ -1972,7 +1972,7 @@
         </p:nvSpPr>
         <p:spPr>
           <a:xfrm>
-            <a:off x="3054096" y="2171700"/>
+            <a:off x="2761488" y="2171700"/>
             <a:ext cx="2743200" cy="201168"/>
           </a:xfrm>
           <a:prstGeom prst="rect">
@@ -2026,7 +2026,7 @@
         <p:spPr>
           <a:xfrm>
             <a:off x="384048" y="2459736"/>
-            <a:ext cx="5413248" cy="25603"/>
+            <a:ext cx="5120640" cy="25603"/>
           </a:xfrm>
           <a:prstGeom prst="rect">
             <a:avLst/>
@@ -2053,17 +2053,18 @@
         </p:nvGraphicFramePr>
         <p:xfrm>
           <a:off x="384048" y="2569464"/>
-          <a:ext cx="5413248" cy="914400"/>
+          <a:ext cx="5120640" cy="914400"/>
         </p:xfrm>
         <a:graphic>
           <a:graphicData uri="http://schemas.openxmlformats.org/drawingml/2006/table">
             <a:tbl>
               <a:tblPr/>
               <a:tblGrid>
-                <a:gridCol w="1847088"/>
-                <a:gridCol w="1170432"/>
-                <a:gridCol w="841248"/>
-                <a:gridCol w="1554480"/>
+                <a:gridCol w="1298448"/>
+                <a:gridCol w="896112"/>
+                <a:gridCol w="1097280"/>
+                <a:gridCol w="731520"/>
+                <a:gridCol w="1097280"/>
               </a:tblGrid>
               <a:tr h="256032">
                 <a:tc>
@@ -2075,7 +2076,7 @@
                         <a:buNone/>
                       </a:pPr>
                       <a:r>
-                        <a:rPr lang="en-US" sz="800" b="1" spc="100" kern="0" dirty="0">
+                        <a:rPr lang="en-US" sz="800" b="1" spc="50" kern="0" dirty="0">
                           <a:solidFill>
                             <a:srgbClr val="898781"/>
                           </a:solidFill>
@@ -2122,7 +2123,54 @@
                         <a:buNone/>
                       </a:pPr>
                       <a:r>
-                        <a:rPr lang="en-US" sz="800" b="1" spc="100" kern="0" dirty="0">
+                        <a:rPr lang="en-US" sz="800" b="1" spc="50" kern="0" dirty="0">
+                          <a:solidFill>
+                            <a:srgbClr val="898781"/>
+                          </a:solidFill>
+                          <a:latin typeface="Arial" pitchFamily="34" charset="0"/>
+                          <a:ea typeface="Arial" pitchFamily="34" charset="-122"/>
+                          <a:cs typeface="Arial" pitchFamily="34" charset="-120"/>
+                        </a:rPr>
+                        <a:t>SECTOR</a:t>
+                      </a:r>
+                      <a:endParaRPr lang="en-US" sz="800" dirty="0">
+                        <a:latin typeface="Arial" charset="0"/>
+                        <a:ea typeface="Arial" charset="0"/>
+                        <a:cs typeface="Arial" charset="0"/>
+                      </a:endParaRPr>
+                    </a:p>
+                  </a:txBody>
+                  <a:tcPr marL="27432" marR="27432" marT="18288" marB="18288" anchor="ctr">
+                    <a:lnL w="0" cap="flat" cmpd="sng" algn="ctr">
+                      <a:noFill/>
+                    </a:lnL>
+                    <a:lnR w="0" cap="flat" cmpd="sng" algn="ctr">
+                      <a:noFill/>
+                    </a:lnR>
+                    <a:lnT w="0" cap="flat" cmpd="sng" algn="ctr">
+                      <a:noFill/>
+                    </a:lnT>
+                    <a:lnB w="15875" cap="flat" cmpd="sng" algn="ctr">
+                      <a:solidFill>
+                        <a:srgbClr val="E1E0D9"/>
+                      </a:solidFill>
+                      <a:prstDash val="solid"/>
+                      <a:round/>
+                      <a:headEnd type="none" w="med" len="med"/>
+                      <a:tailEnd type="none" w="med" len="med"/>
+                    </a:lnB>
+                  </a:tcPr>
+                </a:tc>
+                <a:tc>
+                  <a:txBody>
+                    <a:bodyPr/>
+                    <a:lstStyle/>
+                    <a:p>
+                      <a:pPr indent="0" marL="0">
+                        <a:buNone/>
+                      </a:pPr>
+                      <a:r>
+                        <a:rPr lang="en-US" sz="800" b="1" spc="50" kern="0" dirty="0">
                           <a:solidFill>
                             <a:srgbClr val="898781"/>
                           </a:solidFill>
@@ -2169,7 +2217,7 @@
                         <a:buNone/>
                       </a:pPr>
                       <a:r>
-                        <a:rPr lang="en-US" sz="800" b="1" spc="100" kern="0" dirty="0">
+                        <a:rPr lang="en-US" sz="800" b="1" spc="50" kern="0" dirty="0">
                           <a:solidFill>
                             <a:srgbClr val="898781"/>
                           </a:solidFill>
@@ -2186,7 +2234,7 @@
                       </a:endParaRPr>
                     </a:p>
                   </a:txBody>
-                  <a:tcPr marL="27432" marR="91440" marT="18288" marB="18288" anchor="ctr">
+                  <a:tcPr marL="27432" marR="73152" marT="18288" marB="18288" anchor="ctr">
                     <a:lnL w="0" cap="flat" cmpd="sng" algn="ctr">
                       <a:noFill/>
                     </a:lnL>
@@ -2216,7 +2264,7 @@
                         <a:buNone/>
                       </a:pPr>
                       <a:r>
-                        <a:rPr lang="en-US" sz="800" b="1" spc="100" kern="0" dirty="0">
+                        <a:rPr lang="en-US" sz="800" b="1" spc="50" kern="0" dirty="0">
                           <a:solidFill>
                             <a:srgbClr val="898781"/>
                           </a:solidFill>
@@ -2311,6 +2359,53 @@
                       <a:pPr indent="0" marL="0">
                         <a:buNone/>
                       </a:pPr>
+                      <a:r>
+                        <a:rPr lang="en-US" sz="900" dirty="0">
+                          <a:solidFill>
+                            <a:srgbClr val="52514E"/>
+                          </a:solidFill>
+                          <a:latin typeface="Arial" pitchFamily="34" charset="0"/>
+                          <a:ea typeface="Arial" pitchFamily="34" charset="-122"/>
+                          <a:cs typeface="Arial" pitchFamily="34" charset="-120"/>
+                        </a:rPr>
+                        <a:t>Sector</a:t>
+                      </a:r>
+                      <a:endParaRPr lang="en-US" sz="900" dirty="0">
+                        <a:latin typeface="Arial" charset="0"/>
+                        <a:ea typeface="Arial" charset="0"/>
+                        <a:cs typeface="Arial" charset="0"/>
+                      </a:endParaRPr>
+                    </a:p>
+                  </a:txBody>
+                  <a:tcPr marL="27432" marR="27432" marT="18288" marB="18288" anchor="ctr">
+                    <a:lnL w="0" cap="flat" cmpd="sng" algn="ctr">
+                      <a:noFill/>
+                    </a:lnL>
+                    <a:lnR w="0" cap="flat" cmpd="sng" algn="ctr">
+                      <a:noFill/>
+                    </a:lnR>
+                    <a:lnT w="0" cap="flat" cmpd="sng" algn="ctr">
+                      <a:noFill/>
+                    </a:lnT>
+                    <a:lnB w="9525" cap="flat" cmpd="sng" algn="ctr">
+                      <a:solidFill>
+                        <a:srgbClr val="E1E0D9"/>
+                      </a:solidFill>
+                      <a:prstDash val="solid"/>
+                      <a:round/>
+                      <a:headEnd type="none" w="med" len="med"/>
+                      <a:tailEnd type="none" w="med" len="med"/>
+                    </a:lnB>
+                  </a:tcPr>
+                </a:tc>
+                <a:tc>
+                  <a:txBody>
+                    <a:bodyPr/>
+                    <a:lstStyle/>
+                    <a:p>
+                      <a:pPr indent="0" marL="0">
+                        <a:buNone/>
+                      </a:pPr>
                       <a:endParaRPr lang="en-US" sz="950" dirty="0">
                         <a:latin typeface="Arial" charset="0"/>
                         <a:ea typeface="Arial" charset="0"/>
@@ -2490,6 +2585,53 @@
                       <a:pPr indent="0" marL="0">
                         <a:buNone/>
                       </a:pPr>
+                      <a:r>
+                        <a:rPr lang="en-US" sz="900" dirty="0">
+                          <a:solidFill>
+                            <a:srgbClr val="52514E"/>
+                          </a:solidFill>
+                          <a:latin typeface="Arial" pitchFamily="34" charset="0"/>
+                          <a:ea typeface="Arial" pitchFamily="34" charset="-122"/>
+                          <a:cs typeface="Arial" pitchFamily="34" charset="-120"/>
+                        </a:rPr>
+                        <a:t>Sector</a:t>
+                      </a:r>
+                      <a:endParaRPr lang="en-US" sz="900" dirty="0">
+                        <a:latin typeface="Arial" charset="0"/>
+                        <a:ea typeface="Arial" charset="0"/>
+                        <a:cs typeface="Arial" charset="0"/>
+                      </a:endParaRPr>
+                    </a:p>
+                  </a:txBody>
+                  <a:tcPr marL="27432" marR="27432" marT="18288" marB="18288" anchor="ctr">
+                    <a:lnL w="0" cap="flat" cmpd="sng" algn="ctr">
+                      <a:noFill/>
+                    </a:lnL>
+                    <a:lnR w="0" cap="flat" cmpd="sng" algn="ctr">
+                      <a:noFill/>
+                    </a:lnR>
+                    <a:lnT w="0" cap="flat" cmpd="sng" algn="ctr">
+                      <a:noFill/>
+                    </a:lnT>
+                    <a:lnB w="9525" cap="flat" cmpd="sng" algn="ctr">
+                      <a:solidFill>
+                        <a:srgbClr val="E1E0D9"/>
+                      </a:solidFill>
+                      <a:prstDash val="solid"/>
+                      <a:round/>
+                      <a:headEnd type="none" w="med" len="med"/>
+                      <a:tailEnd type="none" w="med" len="med"/>
+                    </a:lnB>
+                  </a:tcPr>
+                </a:tc>
+                <a:tc>
+                  <a:txBody>
+                    <a:bodyPr/>
+                    <a:lstStyle/>
+                    <a:p>
+                      <a:pPr indent="0" marL="0">
+                        <a:buNone/>
+                      </a:pPr>
                       <a:endParaRPr lang="en-US" sz="950" dirty="0">
                         <a:latin typeface="Arial" charset="0"/>
                         <a:ea typeface="Arial" charset="0"/>
@@ -2669,6 +2811,53 @@
                       <a:pPr indent="0" marL="0">
                         <a:buNone/>
                       </a:pPr>
+                      <a:r>
+                        <a:rPr lang="en-US" sz="900" dirty="0">
+                          <a:solidFill>
+                            <a:srgbClr val="52514E"/>
+                          </a:solidFill>
+                          <a:latin typeface="Arial" pitchFamily="34" charset="0"/>
+                          <a:ea typeface="Arial" pitchFamily="34" charset="-122"/>
+                          <a:cs typeface="Arial" pitchFamily="34" charset="-120"/>
+                        </a:rPr>
+                        <a:t>Sector</a:t>
+                      </a:r>
+                      <a:endParaRPr lang="en-US" sz="900" dirty="0">
+                        <a:latin typeface="Arial" charset="0"/>
+                        <a:ea typeface="Arial" charset="0"/>
+                        <a:cs typeface="Arial" charset="0"/>
+                      </a:endParaRPr>
+                    </a:p>
+                  </a:txBody>
+                  <a:tcPr marL="27432" marR="27432" marT="18288" marB="18288" anchor="ctr">
+                    <a:lnL w="0" cap="flat" cmpd="sng" algn="ctr">
+                      <a:noFill/>
+                    </a:lnL>
+                    <a:lnR w="0" cap="flat" cmpd="sng" algn="ctr">
+                      <a:noFill/>
+                    </a:lnR>
+                    <a:lnT w="0" cap="flat" cmpd="sng" algn="ctr">
+                      <a:noFill/>
+                    </a:lnT>
+                    <a:lnB w="9525" cap="flat" cmpd="sng" algn="ctr">
+                      <a:solidFill>
+                        <a:srgbClr val="E1E0D9"/>
+                      </a:solidFill>
+                      <a:prstDash val="solid"/>
+                      <a:round/>
+                      <a:headEnd type="none" w="med" len="med"/>
+                      <a:tailEnd type="none" w="med" len="med"/>
+                    </a:lnB>
+                  </a:tcPr>
+                </a:tc>
+                <a:tc>
+                  <a:txBody>
+                    <a:bodyPr/>
+                    <a:lstStyle/>
+                    <a:p>
+                      <a:pPr indent="0" marL="0">
+                        <a:buNone/>
+                      </a:pPr>
                       <a:endParaRPr lang="en-US" sz="950" dirty="0">
                         <a:latin typeface="Arial" charset="0"/>
                         <a:ea typeface="Arial" charset="0"/>
@@ -2848,6 +3037,53 @@
                       <a:pPr indent="0" marL="0">
                         <a:buNone/>
                       </a:pPr>
+                      <a:r>
+                        <a:rPr lang="en-US" sz="900" dirty="0">
+                          <a:solidFill>
+                            <a:srgbClr val="52514E"/>
+                          </a:solidFill>
+                          <a:latin typeface="Arial" pitchFamily="34" charset="0"/>
+                          <a:ea typeface="Arial" pitchFamily="34" charset="-122"/>
+                          <a:cs typeface="Arial" pitchFamily="34" charset="-120"/>
+                        </a:rPr>
+                        <a:t>Sector</a:t>
+                      </a:r>
+                      <a:endParaRPr lang="en-US" sz="900" dirty="0">
+                        <a:latin typeface="Arial" charset="0"/>
+                        <a:ea typeface="Arial" charset="0"/>
+                        <a:cs typeface="Arial" charset="0"/>
+                      </a:endParaRPr>
+                    </a:p>
+                  </a:txBody>
+                  <a:tcPr marL="27432" marR="27432" marT="18288" marB="18288" anchor="ctr">
+                    <a:lnL w="0" cap="flat" cmpd="sng" algn="ctr">
+                      <a:noFill/>
+                    </a:lnL>
+                    <a:lnR w="0" cap="flat" cmpd="sng" algn="ctr">
+                      <a:noFill/>
+                    </a:lnR>
+                    <a:lnT w="0" cap="flat" cmpd="sng" algn="ctr">
+                      <a:noFill/>
+                    </a:lnT>
+                    <a:lnB w="9525" cap="flat" cmpd="sng" algn="ctr">
+                      <a:solidFill>
+                        <a:srgbClr val="E1E0D9"/>
+                      </a:solidFill>
+                      <a:prstDash val="solid"/>
+                      <a:round/>
+                      <a:headEnd type="none" w="med" len="med"/>
+                      <a:tailEnd type="none" w="med" len="med"/>
+                    </a:lnB>
+                  </a:tcPr>
+                </a:tc>
+                <a:tc>
+                  <a:txBody>
+                    <a:bodyPr/>
+                    <a:lstStyle/>
+                    <a:p>
+                      <a:pPr indent="0" marL="0">
+                        <a:buNone/>
+                      </a:pPr>
                       <a:endParaRPr lang="en-US" sz="950" dirty="0">
                         <a:latin typeface="Arial" charset="0"/>
                         <a:ea typeface="Arial" charset="0"/>
@@ -3027,6 +3263,53 @@
                       <a:pPr indent="0" marL="0">
                         <a:buNone/>
                       </a:pPr>
+                      <a:r>
+                        <a:rPr lang="en-US" sz="900" dirty="0">
+                          <a:solidFill>
+                            <a:srgbClr val="52514E"/>
+                          </a:solidFill>
+                          <a:latin typeface="Arial" pitchFamily="34" charset="0"/>
+                          <a:ea typeface="Arial" pitchFamily="34" charset="-122"/>
+                          <a:cs typeface="Arial" pitchFamily="34" charset="-120"/>
+                        </a:rPr>
+                        <a:t>Sector</a:t>
+                      </a:r>
+                      <a:endParaRPr lang="en-US" sz="900" dirty="0">
+                        <a:latin typeface="Arial" charset="0"/>
+                        <a:ea typeface="Arial" charset="0"/>
+                        <a:cs typeface="Arial" charset="0"/>
+                      </a:endParaRPr>
+                    </a:p>
+                  </a:txBody>
+                  <a:tcPr marL="27432" marR="27432" marT="18288" marB="18288" anchor="ctr">
+                    <a:lnL w="0" cap="flat" cmpd="sng" algn="ctr">
+                      <a:noFill/>
+                    </a:lnL>
+                    <a:lnR w="0" cap="flat" cmpd="sng" algn="ctr">
+                      <a:noFill/>
+                    </a:lnR>
+                    <a:lnT w="0" cap="flat" cmpd="sng" algn="ctr">
+                      <a:noFill/>
+                    </a:lnT>
+                    <a:lnB w="9525" cap="flat" cmpd="sng" algn="ctr">
+                      <a:solidFill>
+                        <a:srgbClr val="E1E0D9"/>
+                      </a:solidFill>
+                      <a:prstDash val="solid"/>
+                      <a:round/>
+                      <a:headEnd type="none" w="med" len="med"/>
+                      <a:tailEnd type="none" w="med" len="med"/>
+                    </a:lnB>
+                  </a:tcPr>
+                </a:tc>
+                <a:tc>
+                  <a:txBody>
+                    <a:bodyPr/>
+                    <a:lstStyle/>
+                    <a:p>
+                      <a:pPr indent="0" marL="0">
+                        <a:buNone/>
+                      </a:pPr>
                       <a:endParaRPr lang="en-US" sz="950" dirty="0">
                         <a:latin typeface="Arial" charset="0"/>
                         <a:ea typeface="Arial" charset="0"/>
@@ -3206,6 +3489,53 @@
                       <a:pPr indent="0" marL="0">
                         <a:buNone/>
                       </a:pPr>
+                      <a:r>
+                        <a:rPr lang="en-US" sz="900" dirty="0">
+                          <a:solidFill>
+                            <a:srgbClr val="52514E"/>
+                          </a:solidFill>
+                          <a:latin typeface="Arial" pitchFamily="34" charset="0"/>
+                          <a:ea typeface="Arial" pitchFamily="34" charset="-122"/>
+                          <a:cs typeface="Arial" pitchFamily="34" charset="-120"/>
+                        </a:rPr>
+                        <a:t>Sector</a:t>
+                      </a:r>
+                      <a:endParaRPr lang="en-US" sz="900" dirty="0">
+                        <a:latin typeface="Arial" charset="0"/>
+                        <a:ea typeface="Arial" charset="0"/>
+                        <a:cs typeface="Arial" charset="0"/>
+                      </a:endParaRPr>
+                    </a:p>
+                  </a:txBody>
+                  <a:tcPr marL="27432" marR="27432" marT="18288" marB="18288" anchor="ctr">
+                    <a:lnL w="0" cap="flat" cmpd="sng" algn="ctr">
+                      <a:noFill/>
+                    </a:lnL>
+                    <a:lnR w="0" cap="flat" cmpd="sng" algn="ctr">
+                      <a:noFill/>
+                    </a:lnR>
+                    <a:lnT w="0" cap="flat" cmpd="sng" algn="ctr">
+                      <a:noFill/>
+                    </a:lnT>
+                    <a:lnB w="9525" cap="flat" cmpd="sng" algn="ctr">
+                      <a:solidFill>
+                        <a:srgbClr val="E1E0D9"/>
+                      </a:solidFill>
+                      <a:prstDash val="solid"/>
+                      <a:round/>
+                      <a:headEnd type="none" w="med" len="med"/>
+                      <a:tailEnd type="none" w="med" len="med"/>
+                    </a:lnB>
+                  </a:tcPr>
+                </a:tc>
+                <a:tc>
+                  <a:txBody>
+                    <a:bodyPr/>
+                    <a:lstStyle/>
+                    <a:p>
+                      <a:pPr indent="0" marL="0">
+                        <a:buNone/>
+                      </a:pPr>
                       <a:endParaRPr lang="en-US" sz="950" dirty="0">
                         <a:latin typeface="Arial" charset="0"/>
                         <a:ea typeface="Arial" charset="0"/>
@@ -3385,6 +3715,53 @@
                       <a:pPr indent="0" marL="0">
                         <a:buNone/>
                       </a:pPr>
+                      <a:r>
+                        <a:rPr lang="en-US" sz="900" dirty="0">
+                          <a:solidFill>
+                            <a:srgbClr val="52514E"/>
+                          </a:solidFill>
+                          <a:latin typeface="Arial" pitchFamily="34" charset="0"/>
+                          <a:ea typeface="Arial" pitchFamily="34" charset="-122"/>
+                          <a:cs typeface="Arial" pitchFamily="34" charset="-120"/>
+                        </a:rPr>
+                        <a:t>Sector</a:t>
+                      </a:r>
+                      <a:endParaRPr lang="en-US" sz="900" dirty="0">
+                        <a:latin typeface="Arial" charset="0"/>
+                        <a:ea typeface="Arial" charset="0"/>
+                        <a:cs typeface="Arial" charset="0"/>
+                      </a:endParaRPr>
+                    </a:p>
+                  </a:txBody>
+                  <a:tcPr marL="27432" marR="27432" marT="18288" marB="18288" anchor="ctr">
+                    <a:lnL w="0" cap="flat" cmpd="sng" algn="ctr">
+                      <a:noFill/>
+                    </a:lnL>
+                    <a:lnR w="0" cap="flat" cmpd="sng" algn="ctr">
+                      <a:noFill/>
+                    </a:lnR>
+                    <a:lnT w="0" cap="flat" cmpd="sng" algn="ctr">
+                      <a:noFill/>
+                    </a:lnT>
+                    <a:lnB w="9525" cap="flat" cmpd="sng" algn="ctr">
+                      <a:solidFill>
+                        <a:srgbClr val="E1E0D9"/>
+                      </a:solidFill>
+                      <a:prstDash val="solid"/>
+                      <a:round/>
+                      <a:headEnd type="none" w="med" len="med"/>
+                      <a:tailEnd type="none" w="med" len="med"/>
+                    </a:lnB>
+                  </a:tcPr>
+                </a:tc>
+                <a:tc>
+                  <a:txBody>
+                    <a:bodyPr/>
+                    <a:lstStyle/>
+                    <a:p>
+                      <a:pPr indent="0" marL="0">
+                        <a:buNone/>
+                      </a:pPr>
                       <a:endParaRPr lang="en-US" sz="950" dirty="0">
                         <a:latin typeface="Arial" charset="0"/>
                         <a:ea typeface="Arial" charset="0"/>
@@ -3564,6 +3941,53 @@
                       <a:pPr indent="0" marL="0">
                         <a:buNone/>
                       </a:pPr>
+                      <a:r>
+                        <a:rPr lang="en-US" sz="900" dirty="0">
+                          <a:solidFill>
+                            <a:srgbClr val="52514E"/>
+                          </a:solidFill>
+                          <a:latin typeface="Arial" pitchFamily="34" charset="0"/>
+                          <a:ea typeface="Arial" pitchFamily="34" charset="-122"/>
+                          <a:cs typeface="Arial" pitchFamily="34" charset="-120"/>
+                        </a:rPr>
+                        <a:t>Sector</a:t>
+                      </a:r>
+                      <a:endParaRPr lang="en-US" sz="900" dirty="0">
+                        <a:latin typeface="Arial" charset="0"/>
+                        <a:ea typeface="Arial" charset="0"/>
+                        <a:cs typeface="Arial" charset="0"/>
+                      </a:endParaRPr>
+                    </a:p>
+                  </a:txBody>
+                  <a:tcPr marL="27432" marR="27432" marT="18288" marB="18288" anchor="ctr">
+                    <a:lnL w="0" cap="flat" cmpd="sng" algn="ctr">
+                      <a:noFill/>
+                    </a:lnL>
+                    <a:lnR w="0" cap="flat" cmpd="sng" algn="ctr">
+                      <a:noFill/>
+                    </a:lnR>
+                    <a:lnT w="0" cap="flat" cmpd="sng" algn="ctr">
+                      <a:noFill/>
+                    </a:lnT>
+                    <a:lnB w="9525" cap="flat" cmpd="sng" algn="ctr">
+                      <a:solidFill>
+                        <a:srgbClr val="E1E0D9"/>
+                      </a:solidFill>
+                      <a:prstDash val="solid"/>
+                      <a:round/>
+                      <a:headEnd type="none" w="med" len="med"/>
+                      <a:tailEnd type="none" w="med" len="med"/>
+                    </a:lnB>
+                  </a:tcPr>
+                </a:tc>
+                <a:tc>
+                  <a:txBody>
+                    <a:bodyPr/>
+                    <a:lstStyle/>
+                    <a:p>
+                      <a:pPr indent="0" marL="0">
+                        <a:buNone/>
+                      </a:pPr>
                       <a:endParaRPr lang="en-US" sz="950" dirty="0">
                         <a:latin typeface="Arial" charset="0"/>
                         <a:ea typeface="Arial" charset="0"/>
@@ -3743,6 +4167,53 @@
                       <a:pPr indent="0" marL="0">
                         <a:buNone/>
                       </a:pPr>
+                      <a:r>
+                        <a:rPr lang="en-US" sz="900" dirty="0">
+                          <a:solidFill>
+                            <a:srgbClr val="52514E"/>
+                          </a:solidFill>
+                          <a:latin typeface="Arial" pitchFamily="34" charset="0"/>
+                          <a:ea typeface="Arial" pitchFamily="34" charset="-122"/>
+                          <a:cs typeface="Arial" pitchFamily="34" charset="-120"/>
+                        </a:rPr>
+                        <a:t>Sector</a:t>
+                      </a:r>
+                      <a:endParaRPr lang="en-US" sz="900" dirty="0">
+                        <a:latin typeface="Arial" charset="0"/>
+                        <a:ea typeface="Arial" charset="0"/>
+                        <a:cs typeface="Arial" charset="0"/>
+                      </a:endParaRPr>
+                    </a:p>
+                  </a:txBody>
+                  <a:tcPr marL="27432" marR="27432" marT="18288" marB="18288" anchor="ctr">
+                    <a:lnL w="0" cap="flat" cmpd="sng" algn="ctr">
+                      <a:noFill/>
+                    </a:lnL>
+                    <a:lnR w="0" cap="flat" cmpd="sng" algn="ctr">
+                      <a:noFill/>
+                    </a:lnR>
+                    <a:lnT w="0" cap="flat" cmpd="sng" algn="ctr">
+                      <a:noFill/>
+                    </a:lnT>
+                    <a:lnB w="9525" cap="flat" cmpd="sng" algn="ctr">
+                      <a:solidFill>
+                        <a:srgbClr val="E1E0D9"/>
+                      </a:solidFill>
+                      <a:prstDash val="solid"/>
+                      <a:round/>
+                      <a:headEnd type="none" w="med" len="med"/>
+                      <a:tailEnd type="none" w="med" len="med"/>
+                    </a:lnB>
+                  </a:tcPr>
+                </a:tc>
+                <a:tc>
+                  <a:txBody>
+                    <a:bodyPr/>
+                    <a:lstStyle/>
+                    <a:p>
+                      <a:pPr indent="0" marL="0">
+                        <a:buNone/>
+                      </a:pPr>
                       <a:endParaRPr lang="en-US" sz="950" dirty="0">
                         <a:latin typeface="Arial" charset="0"/>
                         <a:ea typeface="Arial" charset="0"/>
@@ -3922,6 +4393,53 @@
                       <a:pPr indent="0" marL="0">
                         <a:buNone/>
                       </a:pPr>
+                      <a:r>
+                        <a:rPr lang="en-US" sz="900" dirty="0">
+                          <a:solidFill>
+                            <a:srgbClr val="52514E"/>
+                          </a:solidFill>
+                          <a:latin typeface="Arial" pitchFamily="34" charset="0"/>
+                          <a:ea typeface="Arial" pitchFamily="34" charset="-122"/>
+                          <a:cs typeface="Arial" pitchFamily="34" charset="-120"/>
+                        </a:rPr>
+                        <a:t>Sector</a:t>
+                      </a:r>
+                      <a:endParaRPr lang="en-US" sz="900" dirty="0">
+                        <a:latin typeface="Arial" charset="0"/>
+                        <a:ea typeface="Arial" charset="0"/>
+                        <a:cs typeface="Arial" charset="0"/>
+                      </a:endParaRPr>
+                    </a:p>
+                  </a:txBody>
+                  <a:tcPr marL="27432" marR="27432" marT="18288" marB="18288" anchor="ctr">
+                    <a:lnL w="0" cap="flat" cmpd="sng" algn="ctr">
+                      <a:noFill/>
+                    </a:lnL>
+                    <a:lnR w="0" cap="flat" cmpd="sng" algn="ctr">
+                      <a:noFill/>
+                    </a:lnR>
+                    <a:lnT w="0" cap="flat" cmpd="sng" algn="ctr">
+                      <a:noFill/>
+                    </a:lnT>
+                    <a:lnB w="9525" cap="flat" cmpd="sng" algn="ctr">
+                      <a:solidFill>
+                        <a:srgbClr val="E1E0D9"/>
+                      </a:solidFill>
+                      <a:prstDash val="solid"/>
+                      <a:round/>
+                      <a:headEnd type="none" w="med" len="med"/>
+                      <a:tailEnd type="none" w="med" len="med"/>
+                    </a:lnB>
+                  </a:tcPr>
+                </a:tc>
+                <a:tc>
+                  <a:txBody>
+                    <a:bodyPr/>
+                    <a:lstStyle/>
+                    <a:p>
+                      <a:pPr indent="0" marL="0">
+                        <a:buNone/>
+                      </a:pPr>
                       <a:endParaRPr lang="en-US" sz="950" dirty="0">
                         <a:latin typeface="Arial" charset="0"/>
                         <a:ea typeface="Arial" charset="0"/>
@@ -4101,6 +4619,53 @@
                       <a:pPr indent="0" marL="0">
                         <a:buNone/>
                       </a:pPr>
+                      <a:r>
+                        <a:rPr lang="en-US" sz="900" dirty="0">
+                          <a:solidFill>
+                            <a:srgbClr val="52514E"/>
+                          </a:solidFill>
+                          <a:latin typeface="Arial" pitchFamily="34" charset="0"/>
+                          <a:ea typeface="Arial" pitchFamily="34" charset="-122"/>
+                          <a:cs typeface="Arial" pitchFamily="34" charset="-120"/>
+                        </a:rPr>
+                        <a:t>Sector</a:t>
+                      </a:r>
+                      <a:endParaRPr lang="en-US" sz="900" dirty="0">
+                        <a:latin typeface="Arial" charset="0"/>
+                        <a:ea typeface="Arial" charset="0"/>
+                        <a:cs typeface="Arial" charset="0"/>
+                      </a:endParaRPr>
+                    </a:p>
+                  </a:txBody>
+                  <a:tcPr marL="27432" marR="27432" marT="18288" marB="18288" anchor="ctr">
+                    <a:lnL w="0" cap="flat" cmpd="sng" algn="ctr">
+                      <a:noFill/>
+                    </a:lnL>
+                    <a:lnR w="0" cap="flat" cmpd="sng" algn="ctr">
+                      <a:noFill/>
+                    </a:lnR>
+                    <a:lnT w="0" cap="flat" cmpd="sng" algn="ctr">
+                      <a:noFill/>
+                    </a:lnT>
+                    <a:lnB w="9525" cap="flat" cmpd="sng" algn="ctr">
+                      <a:solidFill>
+                        <a:srgbClr val="E1E0D9"/>
+                      </a:solidFill>
+                      <a:prstDash val="solid"/>
+                      <a:round/>
+                      <a:headEnd type="none" w="med" len="med"/>
+                      <a:tailEnd type="none" w="med" len="med"/>
+                    </a:lnB>
+                  </a:tcPr>
+                </a:tc>
+                <a:tc>
+                  <a:txBody>
+                    <a:bodyPr/>
+                    <a:lstStyle/>
+                    <a:p>
+                      <a:pPr indent="0" marL="0">
+                        <a:buNone/>
+                      </a:pPr>
                       <a:endParaRPr lang="en-US" sz="950" dirty="0">
                         <a:latin typeface="Arial" charset="0"/>
                         <a:ea typeface="Arial" charset="0"/>
@@ -4280,6 +4845,53 @@
                       <a:pPr indent="0" marL="0">
                         <a:buNone/>
                       </a:pPr>
+                      <a:r>
+                        <a:rPr lang="en-US" sz="900" dirty="0">
+                          <a:solidFill>
+                            <a:srgbClr val="52514E"/>
+                          </a:solidFill>
+                          <a:latin typeface="Arial" pitchFamily="34" charset="0"/>
+                          <a:ea typeface="Arial" pitchFamily="34" charset="-122"/>
+                          <a:cs typeface="Arial" pitchFamily="34" charset="-120"/>
+                        </a:rPr>
+                        <a:t>Sector</a:t>
+                      </a:r>
+                      <a:endParaRPr lang="en-US" sz="900" dirty="0">
+                        <a:latin typeface="Arial" charset="0"/>
+                        <a:ea typeface="Arial" charset="0"/>
+                        <a:cs typeface="Arial" charset="0"/>
+                      </a:endParaRPr>
+                    </a:p>
+                  </a:txBody>
+                  <a:tcPr marL="27432" marR="27432" marT="18288" marB="18288" anchor="ctr">
+                    <a:lnL w="0" cap="flat" cmpd="sng" algn="ctr">
+                      <a:noFill/>
+                    </a:lnL>
+                    <a:lnR w="0" cap="flat" cmpd="sng" algn="ctr">
+                      <a:noFill/>
+                    </a:lnR>
+                    <a:lnT w="0" cap="flat" cmpd="sng" algn="ctr">
+                      <a:noFill/>
+                    </a:lnT>
+                    <a:lnB w="9525" cap="flat" cmpd="sng" algn="ctr">
+                      <a:solidFill>
+                        <a:srgbClr val="E1E0D9"/>
+                      </a:solidFill>
+                      <a:prstDash val="solid"/>
+                      <a:round/>
+                      <a:headEnd type="none" w="med" len="med"/>
+                      <a:tailEnd type="none" w="med" len="med"/>
+                    </a:lnB>
+                  </a:tcPr>
+                </a:tc>
+                <a:tc>
+                  <a:txBody>
+                    <a:bodyPr/>
+                    <a:lstStyle/>
+                    <a:p>
+                      <a:pPr indent="0" marL="0">
+                        <a:buNone/>
+                      </a:pPr>
                       <a:endParaRPr lang="en-US" sz="950" dirty="0">
                         <a:latin typeface="Arial" charset="0"/>
                         <a:ea typeface="Arial" charset="0"/>
@@ -4459,6 +5071,53 @@
                       <a:pPr indent="0" marL="0">
                         <a:buNone/>
                       </a:pPr>
+                      <a:r>
+                        <a:rPr lang="en-US" sz="900" dirty="0">
+                          <a:solidFill>
+                            <a:srgbClr val="52514E"/>
+                          </a:solidFill>
+                          <a:latin typeface="Arial" pitchFamily="34" charset="0"/>
+                          <a:ea typeface="Arial" pitchFamily="34" charset="-122"/>
+                          <a:cs typeface="Arial" pitchFamily="34" charset="-120"/>
+                        </a:rPr>
+                        <a:t>Sector</a:t>
+                      </a:r>
+                      <a:endParaRPr lang="en-US" sz="900" dirty="0">
+                        <a:latin typeface="Arial" charset="0"/>
+                        <a:ea typeface="Arial" charset="0"/>
+                        <a:cs typeface="Arial" charset="0"/>
+                      </a:endParaRPr>
+                    </a:p>
+                  </a:txBody>
+                  <a:tcPr marL="27432" marR="27432" marT="18288" marB="18288" anchor="ctr">
+                    <a:lnL w="0" cap="flat" cmpd="sng" algn="ctr">
+                      <a:noFill/>
+                    </a:lnL>
+                    <a:lnR w="0" cap="flat" cmpd="sng" algn="ctr">
+                      <a:noFill/>
+                    </a:lnR>
+                    <a:lnT w="0" cap="flat" cmpd="sng" algn="ctr">
+                      <a:noFill/>
+                    </a:lnT>
+                    <a:lnB w="9525" cap="flat" cmpd="sng" algn="ctr">
+                      <a:solidFill>
+                        <a:srgbClr val="E1E0D9"/>
+                      </a:solidFill>
+                      <a:prstDash val="solid"/>
+                      <a:round/>
+                      <a:headEnd type="none" w="med" len="med"/>
+                      <a:tailEnd type="none" w="med" len="med"/>
+                    </a:lnB>
+                  </a:tcPr>
+                </a:tc>
+                <a:tc>
+                  <a:txBody>
+                    <a:bodyPr/>
+                    <a:lstStyle/>
+                    <a:p>
+                      <a:pPr indent="0" marL="0">
+                        <a:buNone/>
+                      </a:pPr>
                       <a:endParaRPr lang="en-US" sz="950" dirty="0">
                         <a:latin typeface="Arial" charset="0"/>
                         <a:ea typeface="Arial" charset="0"/>
@@ -4594,8 +5253,8 @@
         </p:nvSpPr>
         <p:spPr>
           <a:xfrm>
-            <a:off x="2286000" y="2887218"/>
-            <a:ext cx="932688" cy="219456"/>
+            <a:off x="2624328" y="2887218"/>
+            <a:ext cx="877824" cy="219456"/>
           </a:xfrm>
           <a:prstGeom prst="roundRect">
             <a:avLst>
@@ -4616,8 +5275,8 @@
         </p:nvSpPr>
         <p:spPr>
           <a:xfrm>
-            <a:off x="2286000" y="2887218"/>
-            <a:ext cx="932688" cy="219456"/>
+            <a:off x="2624328" y="2887218"/>
+            <a:ext cx="877824" cy="219456"/>
           </a:xfrm>
           <a:prstGeom prst="rect">
             <a:avLst/>
@@ -4669,8 +5328,8 @@
         </p:nvSpPr>
         <p:spPr>
           <a:xfrm>
-            <a:off x="2286000" y="3230118"/>
-            <a:ext cx="932688" cy="219456"/>
+            <a:off x="2624328" y="3230118"/>
+            <a:ext cx="877824" cy="219456"/>
           </a:xfrm>
           <a:prstGeom prst="roundRect">
             <a:avLst>
@@ -4691,8 +5350,8 @@
         </p:nvSpPr>
         <p:spPr>
           <a:xfrm>
-            <a:off x="2286000" y="3230118"/>
-            <a:ext cx="932688" cy="219456"/>
+            <a:off x="2624328" y="3230118"/>
+            <a:ext cx="877824" cy="219456"/>
           </a:xfrm>
           <a:prstGeom prst="rect">
             <a:avLst/>
@@ -4744,8 +5403,8 @@
         </p:nvSpPr>
         <p:spPr>
           <a:xfrm>
-            <a:off x="2286000" y="3573018"/>
-            <a:ext cx="932688" cy="219456"/>
+            <a:off x="2624328" y="3573018"/>
+            <a:ext cx="877824" cy="219456"/>
           </a:xfrm>
           <a:prstGeom prst="roundRect">
             <a:avLst>
@@ -4766,8 +5425,8 @@
         </p:nvSpPr>
         <p:spPr>
           <a:xfrm>
-            <a:off x="2286000" y="3573018"/>
-            <a:ext cx="932688" cy="219456"/>
+            <a:off x="2624328" y="3573018"/>
+            <a:ext cx="877824" cy="219456"/>
           </a:xfrm>
           <a:prstGeom prst="rect">
             <a:avLst/>
@@ -4819,8 +5478,8 @@
         </p:nvSpPr>
         <p:spPr>
           <a:xfrm>
-            <a:off x="2286000" y="3915918"/>
-            <a:ext cx="932688" cy="219456"/>
+            <a:off x="2624328" y="3915918"/>
+            <a:ext cx="877824" cy="219456"/>
           </a:xfrm>
           <a:prstGeom prst="roundRect">
             <a:avLst>
@@ -4841,8 +5500,8 @@
         </p:nvSpPr>
         <p:spPr>
           <a:xfrm>
-            <a:off x="2286000" y="3915918"/>
-            <a:ext cx="932688" cy="219456"/>
+            <a:off x="2624328" y="3915918"/>
+            <a:ext cx="877824" cy="219456"/>
           </a:xfrm>
           <a:prstGeom prst="rect">
             <a:avLst/>
@@ -4894,8 +5553,8 @@
         </p:nvSpPr>
         <p:spPr>
           <a:xfrm>
-            <a:off x="2286000" y="4258818"/>
-            <a:ext cx="932688" cy="219456"/>
+            <a:off x="2624328" y="4258818"/>
+            <a:ext cx="877824" cy="219456"/>
           </a:xfrm>
           <a:prstGeom prst="roundRect">
             <a:avLst>
@@ -4916,8 +5575,8 @@
         </p:nvSpPr>
         <p:spPr>
           <a:xfrm>
-            <a:off x="2286000" y="4258818"/>
-            <a:ext cx="932688" cy="219456"/>
+            <a:off x="2624328" y="4258818"/>
+            <a:ext cx="877824" cy="219456"/>
           </a:xfrm>
           <a:prstGeom prst="rect">
             <a:avLst/>
@@ -4969,8 +5628,8 @@
         </p:nvSpPr>
         <p:spPr>
           <a:xfrm>
-            <a:off x="2286000" y="4601718"/>
-            <a:ext cx="932688" cy="219456"/>
+            <a:off x="2624328" y="4601718"/>
+            <a:ext cx="877824" cy="219456"/>
           </a:xfrm>
           <a:prstGeom prst="roundRect">
             <a:avLst>
@@ -4991,8 +5650,8 @@
         </p:nvSpPr>
         <p:spPr>
           <a:xfrm>
-            <a:off x="2286000" y="4601718"/>
-            <a:ext cx="932688" cy="219456"/>
+            <a:off x="2624328" y="4601718"/>
+            <a:ext cx="877824" cy="219456"/>
           </a:xfrm>
           <a:prstGeom prst="rect">
             <a:avLst/>
@@ -5044,8 +5703,8 @@
         </p:nvSpPr>
         <p:spPr>
           <a:xfrm>
-            <a:off x="2286000" y="4944618"/>
-            <a:ext cx="1060704" cy="219456"/>
+            <a:off x="2624328" y="4944618"/>
+            <a:ext cx="987552" cy="219456"/>
           </a:xfrm>
           <a:prstGeom prst="roundRect">
             <a:avLst>
@@ -5066,8 +5725,8 @@
         </p:nvSpPr>
         <p:spPr>
           <a:xfrm>
-            <a:off x="2286000" y="4944618"/>
-            <a:ext cx="1060704" cy="219456"/>
+            <a:off x="2624328" y="4944618"/>
+            <a:ext cx="987552" cy="219456"/>
           </a:xfrm>
           <a:prstGeom prst="rect">
             <a:avLst/>
@@ -5119,8 +5778,8 @@
         </p:nvSpPr>
         <p:spPr>
           <a:xfrm>
-            <a:off x="2286000" y="5287518"/>
-            <a:ext cx="1060704" cy="219456"/>
+            <a:off x="2624328" y="5287518"/>
+            <a:ext cx="987552" cy="219456"/>
           </a:xfrm>
           <a:prstGeom prst="roundRect">
             <a:avLst>
@@ -5141,8 +5800,8 @@
         </p:nvSpPr>
         <p:spPr>
           <a:xfrm>
-            <a:off x="2286000" y="5287518"/>
-            <a:ext cx="1060704" cy="219456"/>
+            <a:off x="2624328" y="5287518"/>
+            <a:ext cx="987552" cy="219456"/>
           </a:xfrm>
           <a:prstGeom prst="rect">
             <a:avLst/>
@@ -5194,8 +5853,8 @@
         </p:nvSpPr>
         <p:spPr>
           <a:xfrm>
-            <a:off x="2286000" y="5630418"/>
-            <a:ext cx="1060704" cy="219456"/>
+            <a:off x="2624328" y="5630418"/>
+            <a:ext cx="987552" cy="219456"/>
           </a:xfrm>
           <a:prstGeom prst="roundRect">
             <a:avLst>
@@ -5216,8 +5875,8 @@
         </p:nvSpPr>
         <p:spPr>
           <a:xfrm>
-            <a:off x="2286000" y="5630418"/>
-            <a:ext cx="1060704" cy="219456"/>
+            <a:off x="2624328" y="5630418"/>
+            <a:ext cx="987552" cy="219456"/>
           </a:xfrm>
           <a:prstGeom prst="rect">
             <a:avLst/>
@@ -5269,8 +5928,8 @@
         </p:nvSpPr>
         <p:spPr>
           <a:xfrm>
-            <a:off x="2286000" y="5973318"/>
-            <a:ext cx="731520" cy="219456"/>
+            <a:off x="2624328" y="5973318"/>
+            <a:ext cx="694944" cy="219456"/>
           </a:xfrm>
           <a:prstGeom prst="roundRect">
             <a:avLst>
@@ -5291,8 +5950,8 @@
         </p:nvSpPr>
         <p:spPr>
           <a:xfrm>
-            <a:off x="2286000" y="5973318"/>
-            <a:ext cx="731520" cy="219456"/>
+            <a:off x="2624328" y="5973318"/>
+            <a:ext cx="694944" cy="219456"/>
           </a:xfrm>
           <a:prstGeom prst="rect">
             <a:avLst/>
@@ -5344,8 +6003,8 @@
         </p:nvSpPr>
         <p:spPr>
           <a:xfrm>
-            <a:off x="2286000" y="6316218"/>
-            <a:ext cx="731520" cy="219456"/>
+            <a:off x="2624328" y="6316218"/>
+            <a:ext cx="694944" cy="219456"/>
           </a:xfrm>
           <a:prstGeom prst="roundRect">
             <a:avLst>
@@ -5366,8 +6025,8 @@
         </p:nvSpPr>
         <p:spPr>
           <a:xfrm>
-            <a:off x="2286000" y="6316218"/>
-            <a:ext cx="731520" cy="219456"/>
+            <a:off x="2624328" y="6316218"/>
+            <a:ext cx="694944" cy="219456"/>
           </a:xfrm>
           <a:prstGeom prst="rect">
             <a:avLst/>
@@ -5419,8 +6078,8 @@
         </p:nvSpPr>
         <p:spPr>
           <a:xfrm>
-            <a:off x="2286000" y="6659118"/>
-            <a:ext cx="731520" cy="219456"/>
+            <a:off x="2624328" y="6659118"/>
+            <a:ext cx="694944" cy="219456"/>
           </a:xfrm>
           <a:prstGeom prst="roundRect">
             <a:avLst>
@@ -5441,8 +6100,8 @@
         </p:nvSpPr>
         <p:spPr>
           <a:xfrm>
-            <a:off x="2286000" y="6659118"/>
-            <a:ext cx="731520" cy="219456"/>
+            <a:off x="2624328" y="6659118"/>
+            <a:ext cx="694944" cy="219456"/>
           </a:xfrm>
           <a:prstGeom prst="rect">
             <a:avLst/>
@@ -5494,8 +6153,8 @@
         </p:nvSpPr>
         <p:spPr>
           <a:xfrm>
-            <a:off x="2286000" y="7002018"/>
-            <a:ext cx="731520" cy="219456"/>
+            <a:off x="2624328" y="7002018"/>
+            <a:ext cx="694944" cy="219456"/>
           </a:xfrm>
           <a:prstGeom prst="roundRect">
             <a:avLst>
@@ -5516,8 +6175,8 @@
         </p:nvSpPr>
         <p:spPr>
           <a:xfrm>
-            <a:off x="2286000" y="7002018"/>
-            <a:ext cx="731520" cy="219456"/>
+            <a:off x="2624328" y="7002018"/>
+            <a:ext cx="694944" cy="219456"/>
           </a:xfrm>
           <a:prstGeom prst="rect">
             <a:avLst/>
@@ -5569,7 +6228,7 @@
         </p:nvSpPr>
         <p:spPr>
           <a:xfrm>
-            <a:off x="6126480" y="2162556"/>
+            <a:off x="5742432" y="2162556"/>
             <a:ext cx="274320" cy="187452"/>
           </a:xfrm>
           <a:prstGeom prst="roundRect">
@@ -5596,7 +6255,7 @@
         </p:nvSpPr>
         <p:spPr>
           <a:xfrm>
-            <a:off x="6211153" y="2203795"/>
+            <a:off x="5827105" y="2203795"/>
             <a:ext cx="104973" cy="104973"/>
           </a:xfrm>
           <a:prstGeom prst="ellipse">
@@ -5616,7 +6275,7 @@
         </p:nvSpPr>
         <p:spPr>
           <a:xfrm>
-            <a:off x="6211153" y="2203795"/>
+            <a:off x="5827105" y="2203795"/>
             <a:ext cx="104973" cy="104973"/>
           </a:xfrm>
           <a:prstGeom prst="pie">
@@ -5639,7 +6298,7 @@
         </p:nvSpPr>
         <p:spPr>
           <a:xfrm>
-            <a:off x="6473952" y="2121408"/>
+            <a:off x="6089904" y="2121408"/>
             <a:ext cx="1463040" cy="274320"/>
           </a:xfrm>
           <a:prstGeom prst="rect">
@@ -5731,8 +6390,8 @@
         </p:nvSpPr>
         <p:spPr>
           <a:xfrm>
-            <a:off x="6126480" y="2459736"/>
-            <a:ext cx="3547872" cy="25603"/>
+            <a:off x="5742432" y="2459736"/>
+            <a:ext cx="3931920" cy="25603"/>
           </a:xfrm>
           <a:prstGeom prst="rect">
             <a:avLst/>
@@ -5758,18 +6417,19 @@
           </p:nvPr>
         </p:nvGraphicFramePr>
         <p:xfrm>
-          <a:off x="6126480" y="2569464"/>
-          <a:ext cx="3547872" cy="914400"/>
+          <a:off x="5742432" y="2569464"/>
+          <a:ext cx="3931920" cy="914400"/>
         </p:xfrm>
         <a:graphic>
           <a:graphicData uri="http://schemas.openxmlformats.org/drawingml/2006/table">
             <a:tbl>
               <a:tblPr/>
               <a:tblGrid>
-                <a:gridCol w="932688"/>
-                <a:gridCol w="1133856"/>
-                <a:gridCol w="640080"/>
-                <a:gridCol w="841248"/>
+                <a:gridCol w="859536"/>
+                <a:gridCol w="585216"/>
+                <a:gridCol w="1060704"/>
+                <a:gridCol w="621792"/>
+                <a:gridCol w="804672"/>
               </a:tblGrid>
               <a:tr h="256032">
                 <a:tc>
@@ -5836,6 +6496,53 @@
                           <a:ea typeface="Arial" pitchFamily="34" charset="-122"/>
                           <a:cs typeface="Arial" pitchFamily="34" charset="-120"/>
                         </a:rPr>
+                        <a:t>SECTOR</a:t>
+                      </a:r>
+                      <a:endParaRPr lang="en-US" sz="750" dirty="0">
+                        <a:latin typeface="Arial" charset="0"/>
+                        <a:ea typeface="Arial" charset="0"/>
+                        <a:cs typeface="Arial" charset="0"/>
+                      </a:endParaRPr>
+                    </a:p>
+                  </a:txBody>
+                  <a:tcPr marL="27432" marR="27432" marT="18288" marB="18288" anchor="ctr">
+                    <a:lnL w="0" cap="flat" cmpd="sng" algn="ctr">
+                      <a:noFill/>
+                    </a:lnL>
+                    <a:lnR w="0" cap="flat" cmpd="sng" algn="ctr">
+                      <a:noFill/>
+                    </a:lnR>
+                    <a:lnT w="0" cap="flat" cmpd="sng" algn="ctr">
+                      <a:noFill/>
+                    </a:lnT>
+                    <a:lnB w="15875" cap="flat" cmpd="sng" algn="ctr">
+                      <a:solidFill>
+                        <a:srgbClr val="E1E0D9"/>
+                      </a:solidFill>
+                      <a:prstDash val="solid"/>
+                      <a:round/>
+                      <a:headEnd type="none" w="med" len="med"/>
+                      <a:tailEnd type="none" w="med" len="med"/>
+                    </a:lnB>
+                  </a:tcPr>
+                </a:tc>
+                <a:tc>
+                  <a:txBody>
+                    <a:bodyPr/>
+                    <a:lstStyle/>
+                    <a:p>
+                      <a:pPr indent="0" marL="0">
+                        <a:buNone/>
+                      </a:pPr>
+                      <a:r>
+                        <a:rPr lang="en-US" sz="750" b="1" dirty="0">
+                          <a:solidFill>
+                            <a:srgbClr val="898781"/>
+                          </a:solidFill>
+                          <a:latin typeface="Arial" pitchFamily="34" charset="0"/>
+                          <a:ea typeface="Arial" pitchFamily="34" charset="-122"/>
+                          <a:cs typeface="Arial" pitchFamily="34" charset="-120"/>
+                        </a:rPr>
                         <a:t>STAGE</a:t>
                       </a:r>
                       <a:endParaRPr lang="en-US" sz="750" dirty="0">
@@ -5892,7 +6599,7 @@
                       </a:endParaRPr>
                     </a:p>
                   </a:txBody>
-                  <a:tcPr marL="27432" marR="91440" marT="18288" marB="18288" anchor="ctr">
+                  <a:tcPr marL="27432" marR="73152" marT="18288" marB="18288" anchor="ctr">
                     <a:lnL w="0" cap="flat" cmpd="sng" algn="ctr">
                       <a:noFill/>
                     </a:lnL>
@@ -6017,6 +6724,53 @@
                       <a:pPr indent="0" marL="0">
                         <a:buNone/>
                       </a:pPr>
+                      <a:r>
+                        <a:rPr lang="en-US" sz="900" dirty="0">
+                          <a:solidFill>
+                            <a:srgbClr val="52514E"/>
+                          </a:solidFill>
+                          <a:latin typeface="Arial" pitchFamily="34" charset="0"/>
+                          <a:ea typeface="Arial" pitchFamily="34" charset="-122"/>
+                          <a:cs typeface="Arial" pitchFamily="34" charset="-120"/>
+                        </a:rPr>
+                        <a:t>Sector</a:t>
+                      </a:r>
+                      <a:endParaRPr lang="en-US" sz="900" dirty="0">
+                        <a:latin typeface="Arial" charset="0"/>
+                        <a:ea typeface="Arial" charset="0"/>
+                        <a:cs typeface="Arial" charset="0"/>
+                      </a:endParaRPr>
+                    </a:p>
+                  </a:txBody>
+                  <a:tcPr marL="27432" marR="27432" marT="18288" marB="18288" anchor="ctr">
+                    <a:lnL w="0" cap="flat" cmpd="sng" algn="ctr">
+                      <a:noFill/>
+                    </a:lnL>
+                    <a:lnR w="0" cap="flat" cmpd="sng" algn="ctr">
+                      <a:noFill/>
+                    </a:lnR>
+                    <a:lnT w="0" cap="flat" cmpd="sng" algn="ctr">
+                      <a:noFill/>
+                    </a:lnT>
+                    <a:lnB w="9525" cap="flat" cmpd="sng" algn="ctr">
+                      <a:solidFill>
+                        <a:srgbClr val="E1E0D9"/>
+                      </a:solidFill>
+                      <a:prstDash val="solid"/>
+                      <a:round/>
+                      <a:headEnd type="none" w="med" len="med"/>
+                      <a:tailEnd type="none" w="med" len="med"/>
+                    </a:lnB>
+                  </a:tcPr>
+                </a:tc>
+                <a:tc>
+                  <a:txBody>
+                    <a:bodyPr/>
+                    <a:lstStyle/>
+                    <a:p>
+                      <a:pPr indent="0" marL="0">
+                        <a:buNone/>
+                      </a:pPr>
                       <a:endParaRPr lang="en-US" sz="950" dirty="0">
                         <a:latin typeface="Arial" charset="0"/>
                         <a:ea typeface="Arial" charset="0"/>
@@ -6196,6 +6950,53 @@
                       <a:pPr indent="0" marL="0">
                         <a:buNone/>
                       </a:pPr>
+                      <a:r>
+                        <a:rPr lang="en-US" sz="900" dirty="0">
+                          <a:solidFill>
+                            <a:srgbClr val="52514E"/>
+                          </a:solidFill>
+                          <a:latin typeface="Arial" pitchFamily="34" charset="0"/>
+                          <a:ea typeface="Arial" pitchFamily="34" charset="-122"/>
+                          <a:cs typeface="Arial" pitchFamily="34" charset="-120"/>
+                        </a:rPr>
+                        <a:t>Sector</a:t>
+                      </a:r>
+                      <a:endParaRPr lang="en-US" sz="900" dirty="0">
+                        <a:latin typeface="Arial" charset="0"/>
+                        <a:ea typeface="Arial" charset="0"/>
+                        <a:cs typeface="Arial" charset="0"/>
+                      </a:endParaRPr>
+                    </a:p>
+                  </a:txBody>
+                  <a:tcPr marL="27432" marR="27432" marT="18288" marB="18288" anchor="ctr">
+                    <a:lnL w="0" cap="flat" cmpd="sng" algn="ctr">
+                      <a:noFill/>
+                    </a:lnL>
+                    <a:lnR w="0" cap="flat" cmpd="sng" algn="ctr">
+                      <a:noFill/>
+                    </a:lnR>
+                    <a:lnT w="0" cap="flat" cmpd="sng" algn="ctr">
+                      <a:noFill/>
+                    </a:lnT>
+                    <a:lnB w="9525" cap="flat" cmpd="sng" algn="ctr">
+                      <a:solidFill>
+                        <a:srgbClr val="E1E0D9"/>
+                      </a:solidFill>
+                      <a:prstDash val="solid"/>
+                      <a:round/>
+                      <a:headEnd type="none" w="med" len="med"/>
+                      <a:tailEnd type="none" w="med" len="med"/>
+                    </a:lnB>
+                  </a:tcPr>
+                </a:tc>
+                <a:tc>
+                  <a:txBody>
+                    <a:bodyPr/>
+                    <a:lstStyle/>
+                    <a:p>
+                      <a:pPr indent="0" marL="0">
+                        <a:buNone/>
+                      </a:pPr>
                       <a:endParaRPr lang="en-US" sz="950" dirty="0">
                         <a:latin typeface="Arial" charset="0"/>
                         <a:ea typeface="Arial" charset="0"/>
@@ -6375,6 +7176,53 @@
                       <a:pPr indent="0" marL="0">
                         <a:buNone/>
                       </a:pPr>
+                      <a:r>
+                        <a:rPr lang="en-US" sz="900" dirty="0">
+                          <a:solidFill>
+                            <a:srgbClr val="52514E"/>
+                          </a:solidFill>
+                          <a:latin typeface="Arial" pitchFamily="34" charset="0"/>
+                          <a:ea typeface="Arial" pitchFamily="34" charset="-122"/>
+                          <a:cs typeface="Arial" pitchFamily="34" charset="-120"/>
+                        </a:rPr>
+                        <a:t>Sector</a:t>
+                      </a:r>
+                      <a:endParaRPr lang="en-US" sz="900" dirty="0">
+                        <a:latin typeface="Arial" charset="0"/>
+                        <a:ea typeface="Arial" charset="0"/>
+                        <a:cs typeface="Arial" charset="0"/>
+                      </a:endParaRPr>
+                    </a:p>
+                  </a:txBody>
+                  <a:tcPr marL="27432" marR="27432" marT="18288" marB="18288" anchor="ctr">
+                    <a:lnL w="0" cap="flat" cmpd="sng" algn="ctr">
+                      <a:noFill/>
+                    </a:lnL>
+                    <a:lnR w="0" cap="flat" cmpd="sng" algn="ctr">
+                      <a:noFill/>
+                    </a:lnR>
+                    <a:lnT w="0" cap="flat" cmpd="sng" algn="ctr">
+                      <a:noFill/>
+                    </a:lnT>
+                    <a:lnB w="9525" cap="flat" cmpd="sng" algn="ctr">
+                      <a:solidFill>
+                        <a:srgbClr val="E1E0D9"/>
+                      </a:solidFill>
+                      <a:prstDash val="solid"/>
+                      <a:round/>
+                      <a:headEnd type="none" w="med" len="med"/>
+                      <a:tailEnd type="none" w="med" len="med"/>
+                    </a:lnB>
+                  </a:tcPr>
+                </a:tc>
+                <a:tc>
+                  <a:txBody>
+                    <a:bodyPr/>
+                    <a:lstStyle/>
+                    <a:p>
+                      <a:pPr indent="0" marL="0">
+                        <a:buNone/>
+                      </a:pPr>
                       <a:endParaRPr lang="en-US" sz="950" dirty="0">
                         <a:latin typeface="Arial" charset="0"/>
                         <a:ea typeface="Arial" charset="0"/>
@@ -6554,6 +7402,53 @@
                       <a:pPr indent="0" marL="0">
                         <a:buNone/>
                       </a:pPr>
+                      <a:r>
+                        <a:rPr lang="en-US" sz="900" dirty="0">
+                          <a:solidFill>
+                            <a:srgbClr val="52514E"/>
+                          </a:solidFill>
+                          <a:latin typeface="Arial" pitchFamily="34" charset="0"/>
+                          <a:ea typeface="Arial" pitchFamily="34" charset="-122"/>
+                          <a:cs typeface="Arial" pitchFamily="34" charset="-120"/>
+                        </a:rPr>
+                        <a:t>Sector</a:t>
+                      </a:r>
+                      <a:endParaRPr lang="en-US" sz="900" dirty="0">
+                        <a:latin typeface="Arial" charset="0"/>
+                        <a:ea typeface="Arial" charset="0"/>
+                        <a:cs typeface="Arial" charset="0"/>
+                      </a:endParaRPr>
+                    </a:p>
+                  </a:txBody>
+                  <a:tcPr marL="27432" marR="27432" marT="18288" marB="18288" anchor="ctr">
+                    <a:lnL w="0" cap="flat" cmpd="sng" algn="ctr">
+                      <a:noFill/>
+                    </a:lnL>
+                    <a:lnR w="0" cap="flat" cmpd="sng" algn="ctr">
+                      <a:noFill/>
+                    </a:lnR>
+                    <a:lnT w="0" cap="flat" cmpd="sng" algn="ctr">
+                      <a:noFill/>
+                    </a:lnT>
+                    <a:lnB w="9525" cap="flat" cmpd="sng" algn="ctr">
+                      <a:solidFill>
+                        <a:srgbClr val="E1E0D9"/>
+                      </a:solidFill>
+                      <a:prstDash val="solid"/>
+                      <a:round/>
+                      <a:headEnd type="none" w="med" len="med"/>
+                      <a:tailEnd type="none" w="med" len="med"/>
+                    </a:lnB>
+                  </a:tcPr>
+                </a:tc>
+                <a:tc>
+                  <a:txBody>
+                    <a:bodyPr/>
+                    <a:lstStyle/>
+                    <a:p>
+                      <a:pPr indent="0" marL="0">
+                        <a:buNone/>
+                      </a:pPr>
                       <a:endParaRPr lang="en-US" sz="950" dirty="0">
                         <a:latin typeface="Arial" charset="0"/>
                         <a:ea typeface="Arial" charset="0"/>
@@ -6733,6 +7628,53 @@
                       <a:pPr indent="0" marL="0">
                         <a:buNone/>
                       </a:pPr>
+                      <a:r>
+                        <a:rPr lang="en-US" sz="900" dirty="0">
+                          <a:solidFill>
+                            <a:srgbClr val="52514E"/>
+                          </a:solidFill>
+                          <a:latin typeface="Arial" pitchFamily="34" charset="0"/>
+                          <a:ea typeface="Arial" pitchFamily="34" charset="-122"/>
+                          <a:cs typeface="Arial" pitchFamily="34" charset="-120"/>
+                        </a:rPr>
+                        <a:t>Sector</a:t>
+                      </a:r>
+                      <a:endParaRPr lang="en-US" sz="900" dirty="0">
+                        <a:latin typeface="Arial" charset="0"/>
+                        <a:ea typeface="Arial" charset="0"/>
+                        <a:cs typeface="Arial" charset="0"/>
+                      </a:endParaRPr>
+                    </a:p>
+                  </a:txBody>
+                  <a:tcPr marL="27432" marR="27432" marT="18288" marB="18288" anchor="ctr">
+                    <a:lnL w="0" cap="flat" cmpd="sng" algn="ctr">
+                      <a:noFill/>
+                    </a:lnL>
+                    <a:lnR w="0" cap="flat" cmpd="sng" algn="ctr">
+                      <a:noFill/>
+                    </a:lnR>
+                    <a:lnT w="0" cap="flat" cmpd="sng" algn="ctr">
+                      <a:noFill/>
+                    </a:lnT>
+                    <a:lnB w="9525" cap="flat" cmpd="sng" algn="ctr">
+                      <a:solidFill>
+                        <a:srgbClr val="E1E0D9"/>
+                      </a:solidFill>
+                      <a:prstDash val="solid"/>
+                      <a:round/>
+                      <a:headEnd type="none" w="med" len="med"/>
+                      <a:tailEnd type="none" w="med" len="med"/>
+                    </a:lnB>
+                  </a:tcPr>
+                </a:tc>
+                <a:tc>
+                  <a:txBody>
+                    <a:bodyPr/>
+                    <a:lstStyle/>
+                    <a:p>
+                      <a:pPr indent="0" marL="0">
+                        <a:buNone/>
+                      </a:pPr>
                       <a:endParaRPr lang="en-US" sz="950" dirty="0">
                         <a:latin typeface="Arial" charset="0"/>
                         <a:ea typeface="Arial" charset="0"/>
@@ -6912,6 +7854,53 @@
                       <a:pPr indent="0" marL="0">
                         <a:buNone/>
                       </a:pPr>
+                      <a:r>
+                        <a:rPr lang="en-US" sz="900" dirty="0">
+                          <a:solidFill>
+                            <a:srgbClr val="52514E"/>
+                          </a:solidFill>
+                          <a:latin typeface="Arial" pitchFamily="34" charset="0"/>
+                          <a:ea typeface="Arial" pitchFamily="34" charset="-122"/>
+                          <a:cs typeface="Arial" pitchFamily="34" charset="-120"/>
+                        </a:rPr>
+                        <a:t>Sector</a:t>
+                      </a:r>
+                      <a:endParaRPr lang="en-US" sz="900" dirty="0">
+                        <a:latin typeface="Arial" charset="0"/>
+                        <a:ea typeface="Arial" charset="0"/>
+                        <a:cs typeface="Arial" charset="0"/>
+                      </a:endParaRPr>
+                    </a:p>
+                  </a:txBody>
+                  <a:tcPr marL="27432" marR="27432" marT="18288" marB="18288" anchor="ctr">
+                    <a:lnL w="0" cap="flat" cmpd="sng" algn="ctr">
+                      <a:noFill/>
+                    </a:lnL>
+                    <a:lnR w="0" cap="flat" cmpd="sng" algn="ctr">
+                      <a:noFill/>
+                    </a:lnR>
+                    <a:lnT w="0" cap="flat" cmpd="sng" algn="ctr">
+                      <a:noFill/>
+                    </a:lnT>
+                    <a:lnB w="9525" cap="flat" cmpd="sng" algn="ctr">
+                      <a:solidFill>
+                        <a:srgbClr val="E1E0D9"/>
+                      </a:solidFill>
+                      <a:prstDash val="solid"/>
+                      <a:round/>
+                      <a:headEnd type="none" w="med" len="med"/>
+                      <a:tailEnd type="none" w="med" len="med"/>
+                    </a:lnB>
+                  </a:tcPr>
+                </a:tc>
+                <a:tc>
+                  <a:txBody>
+                    <a:bodyPr/>
+                    <a:lstStyle/>
+                    <a:p>
+                      <a:pPr indent="0" marL="0">
+                        <a:buNone/>
+                      </a:pPr>
                       <a:endParaRPr lang="en-US" sz="950" dirty="0">
                         <a:latin typeface="Arial" charset="0"/>
                         <a:ea typeface="Arial" charset="0"/>
@@ -7047,8 +8036,8 @@
         </p:nvSpPr>
         <p:spPr>
           <a:xfrm>
-            <a:off x="7114032" y="2887218"/>
-            <a:ext cx="1060704" cy="219456"/>
+            <a:off x="7232904" y="2887218"/>
+            <a:ext cx="987552" cy="219456"/>
           </a:xfrm>
           <a:prstGeom prst="roundRect">
             <a:avLst>
@@ -7069,8 +8058,8 @@
         </p:nvSpPr>
         <p:spPr>
           <a:xfrm>
-            <a:off x="7114032" y="2887218"/>
-            <a:ext cx="1060704" cy="219456"/>
+            <a:off x="7232904" y="2887218"/>
+            <a:ext cx="987552" cy="219456"/>
           </a:xfrm>
           <a:prstGeom prst="rect">
             <a:avLst/>
@@ -7122,8 +8111,8 @@
         </p:nvSpPr>
         <p:spPr>
           <a:xfrm>
-            <a:off x="7114032" y="3230118"/>
-            <a:ext cx="1060704" cy="219456"/>
+            <a:off x="7232904" y="3230118"/>
+            <a:ext cx="987552" cy="219456"/>
           </a:xfrm>
           <a:prstGeom prst="roundRect">
             <a:avLst>
@@ -7144,8 +8133,8 @@
         </p:nvSpPr>
         <p:spPr>
           <a:xfrm>
-            <a:off x="7114032" y="3230118"/>
-            <a:ext cx="1060704" cy="219456"/>
+            <a:off x="7232904" y="3230118"/>
+            <a:ext cx="987552" cy="219456"/>
           </a:xfrm>
           <a:prstGeom prst="rect">
             <a:avLst/>
@@ -7197,8 +8186,8 @@
         </p:nvSpPr>
         <p:spPr>
           <a:xfrm>
-            <a:off x="7114032" y="3573018"/>
-            <a:ext cx="1060704" cy="219456"/>
+            <a:off x="7232904" y="3573018"/>
+            <a:ext cx="987552" cy="219456"/>
           </a:xfrm>
           <a:prstGeom prst="roundRect">
             <a:avLst>
@@ -7219,8 +8208,8 @@
         </p:nvSpPr>
         <p:spPr>
           <a:xfrm>
-            <a:off x="7114032" y="3573018"/>
-            <a:ext cx="1060704" cy="219456"/>
+            <a:off x="7232904" y="3573018"/>
+            <a:ext cx="987552" cy="219456"/>
           </a:xfrm>
           <a:prstGeom prst="rect">
             <a:avLst/>
@@ -7272,8 +8261,8 @@
         </p:nvSpPr>
         <p:spPr>
           <a:xfrm>
-            <a:off x="7114032" y="3915918"/>
-            <a:ext cx="731520" cy="219456"/>
+            <a:off x="7232904" y="3915918"/>
+            <a:ext cx="694944" cy="219456"/>
           </a:xfrm>
           <a:prstGeom prst="roundRect">
             <a:avLst>
@@ -7294,8 +8283,8 @@
         </p:nvSpPr>
         <p:spPr>
           <a:xfrm>
-            <a:off x="7114032" y="3915918"/>
-            <a:ext cx="731520" cy="219456"/>
+            <a:off x="7232904" y="3915918"/>
+            <a:ext cx="694944" cy="219456"/>
           </a:xfrm>
           <a:prstGeom prst="rect">
             <a:avLst/>
@@ -7347,8 +8336,8 @@
         </p:nvSpPr>
         <p:spPr>
           <a:xfrm>
-            <a:off x="7114032" y="4258818"/>
-            <a:ext cx="731520" cy="219456"/>
+            <a:off x="7232904" y="4258818"/>
+            <a:ext cx="694944" cy="219456"/>
           </a:xfrm>
           <a:prstGeom prst="roundRect">
             <a:avLst>
@@ -7369,8 +8358,8 @@
         </p:nvSpPr>
         <p:spPr>
           <a:xfrm>
-            <a:off x="7114032" y="4258818"/>
-            <a:ext cx="731520" cy="219456"/>
+            <a:off x="7232904" y="4258818"/>
+            <a:ext cx="694944" cy="219456"/>
           </a:xfrm>
           <a:prstGeom prst="rect">
             <a:avLst/>
@@ -7422,8 +8411,8 @@
         </p:nvSpPr>
         <p:spPr>
           <a:xfrm>
-            <a:off x="7114032" y="4601718"/>
-            <a:ext cx="731520" cy="219456"/>
+            <a:off x="7232904" y="4601718"/>
+            <a:ext cx="694944" cy="219456"/>
           </a:xfrm>
           <a:prstGeom prst="roundRect">
             <a:avLst>
@@ -7444,8 +8433,8 @@
         </p:nvSpPr>
         <p:spPr>
           <a:xfrm>
-            <a:off x="7114032" y="4601718"/>
-            <a:ext cx="731520" cy="219456"/>
+            <a:off x="7232904" y="4601718"/>
+            <a:ext cx="694944" cy="219456"/>
           </a:xfrm>
           <a:prstGeom prst="rect">
             <a:avLst/>
@@ -7613,7 +8602,7 @@
         <p:spPr>
           <a:xfrm>
             <a:off x="10287000" y="2880360"/>
-            <a:ext cx="932688" cy="219456"/>
+            <a:ext cx="877824" cy="219456"/>
           </a:xfrm>
           <a:prstGeom prst="roundRect">
             <a:avLst>
@@ -7635,7 +8624,7 @@
         <p:spPr>
           <a:xfrm>
             <a:off x="10287000" y="2880360"/>
-            <a:ext cx="932688" cy="219456"/>
+            <a:ext cx="877824" cy="219456"/>
           </a:xfrm>
           <a:prstGeom prst="rect">
             <a:avLst/>
@@ -7688,7 +8677,7 @@
         <p:spPr>
           <a:xfrm>
             <a:off x="10287000" y="3200400"/>
-            <a:ext cx="1060704" cy="219456"/>
+            <a:ext cx="987552" cy="219456"/>
           </a:xfrm>
           <a:prstGeom prst="roundRect">
             <a:avLst>
@@ -7710,7 +8699,7 @@
         <p:spPr>
           <a:xfrm>
             <a:off x="10287000" y="3200400"/>
-            <a:ext cx="1060704" cy="219456"/>
+            <a:ext cx="987552" cy="219456"/>
           </a:xfrm>
           <a:prstGeom prst="rect">
             <a:avLst/>
@@ -7763,7 +8752,7 @@
         <p:spPr>
           <a:xfrm>
             <a:off x="10287000" y="3520440"/>
-            <a:ext cx="731520" cy="219456"/>
+            <a:ext cx="694944" cy="219456"/>
           </a:xfrm>
           <a:prstGeom prst="roundRect">
             <a:avLst>
@@ -7785,7 +8774,7 @@
         <p:spPr>
           <a:xfrm>
             <a:off x="10287000" y="3520440"/>
-            <a:ext cx="731520" cy="219456"/>
+            <a:ext cx="694944" cy="219456"/>
           </a:xfrm>
           <a:prstGeom prst="rect">
             <a:avLst/>

--- a/deal-status-onepager/US-Investment-Accelerator-Deal-Status.pptx
+++ b/deal-status-onepager/US-Investment-Accelerator-Deal-Status.pptx
@@ -503,7 +503,7 @@
             <a:r>
               <a:rPr lang="en-US" dirty="0"/>
               <a:t>FILL-IN GUIDE
-1. Type over every gray/placeholder value: Company 1-19, Sector, the $X.X B deal sizes (all in billions), First Last (owner's rep), the summary tiles, and the two '$XX.X B total' figures next to JAPAN and KOREA.
+1. Type over every gray/placeholder value: Company 1-19, Sector, the $X.X B deal sizes (all in billions), First Last (owner's rep), X.X% (warrants), the summary tiles, and the two '$XX.X B total' figures next to JAPAN and KOREA.
 2. Stage tags are already set to the plan: Japan = 6 Announced, 3 Consultation, 4 Active. Korea = 3 Consultation, 3 Active (none announced). To change one anyway, delete it and Ctrl/Cmd-drag a spare tag from the right of the page into place. The spares sit off the page and never print.
 3. Add/remove rows: click in a table, use Table Layout &gt; Insert/Delete Rows. If you change row counts, drag the tags to keep them aligned with their rows, and update the counts in the summary strip.
 4. Rows are grouped by stage: Announced first, then Consultation, then Active.
@@ -1972,7 +1972,7 @@
         </p:nvSpPr>
         <p:spPr>
           <a:xfrm>
-            <a:off x="2761488" y="2171700"/>
+            <a:off x="2148840" y="2171700"/>
             <a:ext cx="2743200" cy="201168"/>
           </a:xfrm>
           <a:prstGeom prst="rect">
@@ -2026,7 +2026,7 @@
         <p:spPr>
           <a:xfrm>
             <a:off x="384048" y="2459736"/>
-            <a:ext cx="5120640" cy="25603"/>
+            <a:ext cx="4507992" cy="25603"/>
           </a:xfrm>
           <a:prstGeom prst="rect">
             <a:avLst/>
@@ -2053,18 +2053,19 @@
         </p:nvGraphicFramePr>
         <p:xfrm>
           <a:off x="384048" y="2569464"/>
-          <a:ext cx="5120640" cy="914400"/>
+          <a:ext cx="4507992" cy="914400"/>
         </p:xfrm>
         <a:graphic>
           <a:graphicData uri="http://schemas.openxmlformats.org/drawingml/2006/table">
             <a:tbl>
               <a:tblPr/>
               <a:tblGrid>
-                <a:gridCol w="1298448"/>
-                <a:gridCol w="896112"/>
-                <a:gridCol w="1097280"/>
-                <a:gridCol w="731520"/>
-                <a:gridCol w="1097280"/>
+                <a:gridCol w="832104"/>
+                <a:gridCol w="566928"/>
+                <a:gridCol w="1042416"/>
+                <a:gridCol w="576072"/>
+                <a:gridCol w="749808"/>
+                <a:gridCol w="740664"/>
               </a:tblGrid>
               <a:tr h="256032">
                 <a:tc>
@@ -2076,7 +2077,7 @@
                         <a:buNone/>
                       </a:pPr>
                       <a:r>
-                        <a:rPr lang="en-US" sz="800" b="1" spc="50" kern="0" dirty="0">
+                        <a:rPr lang="en-US" sz="700" b="1" dirty="0">
                           <a:solidFill>
                             <a:srgbClr val="898781"/>
                           </a:solidFill>
@@ -2086,7 +2087,7 @@
                         </a:rPr>
                         <a:t>COMPANY</a:t>
                       </a:r>
-                      <a:endParaRPr lang="en-US" sz="800" dirty="0">
+                      <a:endParaRPr lang="en-US" sz="700" dirty="0">
                         <a:latin typeface="Arial" charset="0"/>
                         <a:ea typeface="Arial" charset="0"/>
                         <a:cs typeface="Arial" charset="0"/>
@@ -2123,7 +2124,7 @@
                         <a:buNone/>
                       </a:pPr>
                       <a:r>
-                        <a:rPr lang="en-US" sz="800" b="1" spc="50" kern="0" dirty="0">
+                        <a:rPr lang="en-US" sz="700" b="1" dirty="0">
                           <a:solidFill>
                             <a:srgbClr val="898781"/>
                           </a:solidFill>
@@ -2133,7 +2134,7 @@
                         </a:rPr>
                         <a:t>SECTOR</a:t>
                       </a:r>
-                      <a:endParaRPr lang="en-US" sz="800" dirty="0">
+                      <a:endParaRPr lang="en-US" sz="700" dirty="0">
                         <a:latin typeface="Arial" charset="0"/>
                         <a:ea typeface="Arial" charset="0"/>
                         <a:cs typeface="Arial" charset="0"/>
@@ -2170,7 +2171,7 @@
                         <a:buNone/>
                       </a:pPr>
                       <a:r>
-                        <a:rPr lang="en-US" sz="800" b="1" spc="50" kern="0" dirty="0">
+                        <a:rPr lang="en-US" sz="700" b="1" dirty="0">
                           <a:solidFill>
                             <a:srgbClr val="898781"/>
                           </a:solidFill>
@@ -2180,7 +2181,7 @@
                         </a:rPr>
                         <a:t>STAGE</a:t>
                       </a:r>
-                      <a:endParaRPr lang="en-US" sz="800" dirty="0">
+                      <a:endParaRPr lang="en-US" sz="700" dirty="0">
                         <a:latin typeface="Arial" charset="0"/>
                         <a:ea typeface="Arial" charset="0"/>
                         <a:cs typeface="Arial" charset="0"/>
@@ -2217,7 +2218,7 @@
                         <a:buNone/>
                       </a:pPr>
                       <a:r>
-                        <a:rPr lang="en-US" sz="800" b="1" spc="50" kern="0" dirty="0">
+                        <a:rPr lang="en-US" sz="700" b="1" dirty="0">
                           <a:solidFill>
                             <a:srgbClr val="898781"/>
                           </a:solidFill>
@@ -2227,7 +2228,7 @@
                         </a:rPr>
                         <a:t>DEAL SIZE</a:t>
                       </a:r>
-                      <a:endParaRPr lang="en-US" sz="800" dirty="0">
+                      <a:endParaRPr lang="en-US" sz="700" dirty="0">
                         <a:latin typeface="Arial" charset="0"/>
                         <a:ea typeface="Arial" charset="0"/>
                         <a:cs typeface="Arial" charset="0"/>
@@ -2264,7 +2265,7 @@
                         <a:buNone/>
                       </a:pPr>
                       <a:r>
-                        <a:rPr lang="en-US" sz="800" b="1" spc="50" kern="0" dirty="0">
+                        <a:rPr lang="en-US" sz="700" b="1" dirty="0">
                           <a:solidFill>
                             <a:srgbClr val="898781"/>
                           </a:solidFill>
@@ -2274,14 +2275,61 @@
                         </a:rPr>
                         <a:t>OWNER’S REP</a:t>
                       </a:r>
-                      <a:endParaRPr lang="en-US" sz="800" dirty="0">
-                        <a:latin typeface="Arial" charset="0"/>
-                        <a:ea typeface="Arial" charset="0"/>
-                        <a:cs typeface="Arial" charset="0"/>
-                      </a:endParaRPr>
-                    </a:p>
-                  </a:txBody>
-                  <a:tcPr marL="91440" marR="27432" marT="18288" marB="18288" anchor="ctr">
+                      <a:endParaRPr lang="en-US" sz="700" dirty="0">
+                        <a:latin typeface="Arial" charset="0"/>
+                        <a:ea typeface="Arial" charset="0"/>
+                        <a:cs typeface="Arial" charset="0"/>
+                      </a:endParaRPr>
+                    </a:p>
+                  </a:txBody>
+                  <a:tcPr marL="54864" marR="27432" marT="18288" marB="18288" anchor="ctr">
+                    <a:lnL w="0" cap="flat" cmpd="sng" algn="ctr">
+                      <a:noFill/>
+                    </a:lnL>
+                    <a:lnR w="0" cap="flat" cmpd="sng" algn="ctr">
+                      <a:noFill/>
+                    </a:lnR>
+                    <a:lnT w="0" cap="flat" cmpd="sng" algn="ctr">
+                      <a:noFill/>
+                    </a:lnT>
+                    <a:lnB w="15875" cap="flat" cmpd="sng" algn="ctr">
+                      <a:solidFill>
+                        <a:srgbClr val="E1E0D9"/>
+                      </a:solidFill>
+                      <a:prstDash val="solid"/>
+                      <a:round/>
+                      <a:headEnd type="none" w="med" len="med"/>
+                      <a:tailEnd type="none" w="med" len="med"/>
+                    </a:lnB>
+                  </a:tcPr>
+                </a:tc>
+                <a:tc>
+                  <a:txBody>
+                    <a:bodyPr/>
+                    <a:lstStyle/>
+                    <a:p>
+                      <a:pPr algn="r" indent="0" marL="0">
+                        <a:buNone/>
+                      </a:pPr>
+                      <a:r>
+                        <a:rPr lang="en-US" sz="700" b="1" dirty="0">
+                          <a:solidFill>
+                            <a:srgbClr val="898781"/>
+                          </a:solidFill>
+                          <a:latin typeface="Arial" pitchFamily="34" charset="0"/>
+                          <a:ea typeface="Arial" pitchFamily="34" charset="-122"/>
+                          <a:cs typeface="Arial" pitchFamily="34" charset="-120"/>
+                        </a:rPr>
+                        <a:t>WARRANTS %</a:t>
+                      </a:r>
+                      <a:endParaRPr lang="en-US" sz="700" dirty="0">
+                        <a:latin typeface="Arial" charset="0"/>
+                        <a:ea typeface="Arial" charset="0"/>
+                        <a:cs typeface="Arial" charset="0"/>
+                      </a:endParaRPr>
+                    </a:p>
+                  </a:txBody>
+                  <a:tcPr marL="27432" marR="73152" marT="18288" marB="18288" anchor="ctr">
                     <a:lnL w="0" cap="flat" cmpd="sng" algn="ctr">
                       <a:noFill/>
                     </a:lnL>
@@ -2507,7 +2555,54 @@
                       </a:endParaRPr>
                     </a:p>
                   </a:txBody>
-                  <a:tcPr marL="109728" marR="27432" marT="18288" marB="18288" anchor="ctr">
+                  <a:tcPr marL="54864" marR="27432" marT="18288" marB="18288" anchor="ctr">
+                    <a:lnL w="0" cap="flat" cmpd="sng" algn="ctr">
+                      <a:noFill/>
+                    </a:lnL>
+                    <a:lnR w="0" cap="flat" cmpd="sng" algn="ctr">
+                      <a:noFill/>
+                    </a:lnR>
+                    <a:lnT w="0" cap="flat" cmpd="sng" algn="ctr">
+                      <a:noFill/>
+                    </a:lnT>
+                    <a:lnB w="9525" cap="flat" cmpd="sng" algn="ctr">
+                      <a:solidFill>
+                        <a:srgbClr val="E1E0D9"/>
+                      </a:solidFill>
+                      <a:prstDash val="solid"/>
+                      <a:round/>
+                      <a:headEnd type="none" w="med" len="med"/>
+                      <a:tailEnd type="none" w="med" len="med"/>
+                    </a:lnB>
+                  </a:tcPr>
+                </a:tc>
+                <a:tc>
+                  <a:txBody>
+                    <a:bodyPr/>
+                    <a:lstStyle/>
+                    <a:p>
+                      <a:pPr algn="r" indent="0" marL="0">
+                        <a:buNone/>
+                      </a:pPr>
+                      <a:r>
+                        <a:rPr lang="en-US" sz="950" dirty="0">
+                          <a:solidFill>
+                            <a:srgbClr val="0B0B0B"/>
+                          </a:solidFill>
+                          <a:latin typeface="Arial" pitchFamily="34" charset="0"/>
+                          <a:ea typeface="Arial" pitchFamily="34" charset="-122"/>
+                          <a:cs typeface="Arial" pitchFamily="34" charset="-120"/>
+                        </a:rPr>
+                        <a:t>X.X%</a:t>
+                      </a:r>
+                      <a:endParaRPr lang="en-US" sz="950" dirty="0">
+                        <a:latin typeface="Arial" charset="0"/>
+                        <a:ea typeface="Arial" charset="0"/>
+                        <a:cs typeface="Arial" charset="0"/>
+                      </a:endParaRPr>
+                    </a:p>
+                  </a:txBody>
+                  <a:tcPr marL="27432" marR="91440" marT="18288" marB="18288" anchor="ctr">
                     <a:lnL w="0" cap="flat" cmpd="sng" algn="ctr">
                       <a:noFill/>
                     </a:lnL>
@@ -2733,7 +2828,54 @@
                       </a:endParaRPr>
                     </a:p>
                   </a:txBody>
-                  <a:tcPr marL="109728" marR="27432" marT="18288" marB="18288" anchor="ctr">
+                  <a:tcPr marL="54864" marR="27432" marT="18288" marB="18288" anchor="ctr">
+                    <a:lnL w="0" cap="flat" cmpd="sng" algn="ctr">
+                      <a:noFill/>
+                    </a:lnL>
+                    <a:lnR w="0" cap="flat" cmpd="sng" algn="ctr">
+                      <a:noFill/>
+                    </a:lnR>
+                    <a:lnT w="0" cap="flat" cmpd="sng" algn="ctr">
+                      <a:noFill/>
+                    </a:lnT>
+                    <a:lnB w="9525" cap="flat" cmpd="sng" algn="ctr">
+                      <a:solidFill>
+                        <a:srgbClr val="E1E0D9"/>
+                      </a:solidFill>
+                      <a:prstDash val="solid"/>
+                      <a:round/>
+                      <a:headEnd type="none" w="med" len="med"/>
+                      <a:tailEnd type="none" w="med" len="med"/>
+                    </a:lnB>
+                  </a:tcPr>
+                </a:tc>
+                <a:tc>
+                  <a:txBody>
+                    <a:bodyPr/>
+                    <a:lstStyle/>
+                    <a:p>
+                      <a:pPr algn="r" indent="0" marL="0">
+                        <a:buNone/>
+                      </a:pPr>
+                      <a:r>
+                        <a:rPr lang="en-US" sz="950" dirty="0">
+                          <a:solidFill>
+                            <a:srgbClr val="0B0B0B"/>
+                          </a:solidFill>
+                          <a:latin typeface="Arial" pitchFamily="34" charset="0"/>
+                          <a:ea typeface="Arial" pitchFamily="34" charset="-122"/>
+                          <a:cs typeface="Arial" pitchFamily="34" charset="-120"/>
+                        </a:rPr>
+                        <a:t>X.X%</a:t>
+                      </a:r>
+                      <a:endParaRPr lang="en-US" sz="950" dirty="0">
+                        <a:latin typeface="Arial" charset="0"/>
+                        <a:ea typeface="Arial" charset="0"/>
+                        <a:cs typeface="Arial" charset="0"/>
+                      </a:endParaRPr>
+                    </a:p>
+                  </a:txBody>
+                  <a:tcPr marL="27432" marR="91440" marT="18288" marB="18288" anchor="ctr">
                     <a:lnL w="0" cap="flat" cmpd="sng" algn="ctr">
                       <a:noFill/>
                     </a:lnL>
@@ -2959,7 +3101,54 @@
                       </a:endParaRPr>
                     </a:p>
                   </a:txBody>
-                  <a:tcPr marL="109728" marR="27432" marT="18288" marB="18288" anchor="ctr">
+                  <a:tcPr marL="54864" marR="27432" marT="18288" marB="18288" anchor="ctr">
+                    <a:lnL w="0" cap="flat" cmpd="sng" algn="ctr">
+                      <a:noFill/>
+                    </a:lnL>
+                    <a:lnR w="0" cap="flat" cmpd="sng" algn="ctr">
+                      <a:noFill/>
+                    </a:lnR>
+                    <a:lnT w="0" cap="flat" cmpd="sng" algn="ctr">
+                      <a:noFill/>
+                    </a:lnT>
+                    <a:lnB w="9525" cap="flat" cmpd="sng" algn="ctr">
+                      <a:solidFill>
+                        <a:srgbClr val="E1E0D9"/>
+                      </a:solidFill>
+                      <a:prstDash val="solid"/>
+                      <a:round/>
+                      <a:headEnd type="none" w="med" len="med"/>
+                      <a:tailEnd type="none" w="med" len="med"/>
+                    </a:lnB>
+                  </a:tcPr>
+                </a:tc>
+                <a:tc>
+                  <a:txBody>
+                    <a:bodyPr/>
+                    <a:lstStyle/>
+                    <a:p>
+                      <a:pPr algn="r" indent="0" marL="0">
+                        <a:buNone/>
+                      </a:pPr>
+                      <a:r>
+                        <a:rPr lang="en-US" sz="950" dirty="0">
+                          <a:solidFill>
+                            <a:srgbClr val="0B0B0B"/>
+                          </a:solidFill>
+                          <a:latin typeface="Arial" pitchFamily="34" charset="0"/>
+                          <a:ea typeface="Arial" pitchFamily="34" charset="-122"/>
+                          <a:cs typeface="Arial" pitchFamily="34" charset="-120"/>
+                        </a:rPr>
+                        <a:t>X.X%</a:t>
+                      </a:r>
+                      <a:endParaRPr lang="en-US" sz="950" dirty="0">
+                        <a:latin typeface="Arial" charset="0"/>
+                        <a:ea typeface="Arial" charset="0"/>
+                        <a:cs typeface="Arial" charset="0"/>
+                      </a:endParaRPr>
+                    </a:p>
+                  </a:txBody>
+                  <a:tcPr marL="27432" marR="91440" marT="18288" marB="18288" anchor="ctr">
                     <a:lnL w="0" cap="flat" cmpd="sng" algn="ctr">
                       <a:noFill/>
                     </a:lnL>
@@ -3185,7 +3374,54 @@
                       </a:endParaRPr>
                     </a:p>
                   </a:txBody>
-                  <a:tcPr marL="109728" marR="27432" marT="18288" marB="18288" anchor="ctr">
+                  <a:tcPr marL="54864" marR="27432" marT="18288" marB="18288" anchor="ctr">
+                    <a:lnL w="0" cap="flat" cmpd="sng" algn="ctr">
+                      <a:noFill/>
+                    </a:lnL>
+                    <a:lnR w="0" cap="flat" cmpd="sng" algn="ctr">
+                      <a:noFill/>
+                    </a:lnR>
+                    <a:lnT w="0" cap="flat" cmpd="sng" algn="ctr">
+                      <a:noFill/>
+                    </a:lnT>
+                    <a:lnB w="9525" cap="flat" cmpd="sng" algn="ctr">
+                      <a:solidFill>
+                        <a:srgbClr val="E1E0D9"/>
+                      </a:solidFill>
+                      <a:prstDash val="solid"/>
+                      <a:round/>
+                      <a:headEnd type="none" w="med" len="med"/>
+                      <a:tailEnd type="none" w="med" len="med"/>
+                    </a:lnB>
+                  </a:tcPr>
+                </a:tc>
+                <a:tc>
+                  <a:txBody>
+                    <a:bodyPr/>
+                    <a:lstStyle/>
+                    <a:p>
+                      <a:pPr algn="r" indent="0" marL="0">
+                        <a:buNone/>
+                      </a:pPr>
+                      <a:r>
+                        <a:rPr lang="en-US" sz="950" dirty="0">
+                          <a:solidFill>
+                            <a:srgbClr val="0B0B0B"/>
+                          </a:solidFill>
+                          <a:latin typeface="Arial" pitchFamily="34" charset="0"/>
+                          <a:ea typeface="Arial" pitchFamily="34" charset="-122"/>
+                          <a:cs typeface="Arial" pitchFamily="34" charset="-120"/>
+                        </a:rPr>
+                        <a:t>X.X%</a:t>
+                      </a:r>
+                      <a:endParaRPr lang="en-US" sz="950" dirty="0">
+                        <a:latin typeface="Arial" charset="0"/>
+                        <a:ea typeface="Arial" charset="0"/>
+                        <a:cs typeface="Arial" charset="0"/>
+                      </a:endParaRPr>
+                    </a:p>
+                  </a:txBody>
+                  <a:tcPr marL="27432" marR="91440" marT="18288" marB="18288" anchor="ctr">
                     <a:lnL w="0" cap="flat" cmpd="sng" algn="ctr">
                       <a:noFill/>
                     </a:lnL>
@@ -3411,7 +3647,54 @@
                       </a:endParaRPr>
                     </a:p>
                   </a:txBody>
-                  <a:tcPr marL="109728" marR="27432" marT="18288" marB="18288" anchor="ctr">
+                  <a:tcPr marL="54864" marR="27432" marT="18288" marB="18288" anchor="ctr">
+                    <a:lnL w="0" cap="flat" cmpd="sng" algn="ctr">
+                      <a:noFill/>
+                    </a:lnL>
+                    <a:lnR w="0" cap="flat" cmpd="sng" algn="ctr">
+                      <a:noFill/>
+                    </a:lnR>
+                    <a:lnT w="0" cap="flat" cmpd="sng" algn="ctr">
+                      <a:noFill/>
+                    </a:lnT>
+                    <a:lnB w="9525" cap="flat" cmpd="sng" algn="ctr">
+                      <a:solidFill>
+                        <a:srgbClr val="E1E0D9"/>
+                      </a:solidFill>
+                      <a:prstDash val="solid"/>
+                      <a:round/>
+                      <a:headEnd type="none" w="med" len="med"/>
+                      <a:tailEnd type="none" w="med" len="med"/>
+                    </a:lnB>
+                  </a:tcPr>
+                </a:tc>
+                <a:tc>
+                  <a:txBody>
+                    <a:bodyPr/>
+                    <a:lstStyle/>
+                    <a:p>
+                      <a:pPr algn="r" indent="0" marL="0">
+                        <a:buNone/>
+                      </a:pPr>
+                      <a:r>
+                        <a:rPr lang="en-US" sz="950" dirty="0">
+                          <a:solidFill>
+                            <a:srgbClr val="0B0B0B"/>
+                          </a:solidFill>
+                          <a:latin typeface="Arial" pitchFamily="34" charset="0"/>
+                          <a:ea typeface="Arial" pitchFamily="34" charset="-122"/>
+                          <a:cs typeface="Arial" pitchFamily="34" charset="-120"/>
+                        </a:rPr>
+                        <a:t>X.X%</a:t>
+                      </a:r>
+                      <a:endParaRPr lang="en-US" sz="950" dirty="0">
+                        <a:latin typeface="Arial" charset="0"/>
+                        <a:ea typeface="Arial" charset="0"/>
+                        <a:cs typeface="Arial" charset="0"/>
+                      </a:endParaRPr>
+                    </a:p>
+                  </a:txBody>
+                  <a:tcPr marL="27432" marR="91440" marT="18288" marB="18288" anchor="ctr">
                     <a:lnL w="0" cap="flat" cmpd="sng" algn="ctr">
                       <a:noFill/>
                     </a:lnL>
@@ -3637,7 +3920,54 @@
                       </a:endParaRPr>
                     </a:p>
                   </a:txBody>
-                  <a:tcPr marL="109728" marR="27432" marT="18288" marB="18288" anchor="ctr">
+                  <a:tcPr marL="54864" marR="27432" marT="18288" marB="18288" anchor="ctr">
+                    <a:lnL w="0" cap="flat" cmpd="sng" algn="ctr">
+                      <a:noFill/>
+                    </a:lnL>
+                    <a:lnR w="0" cap="flat" cmpd="sng" algn="ctr">
+                      <a:noFill/>
+                    </a:lnR>
+                    <a:lnT w="0" cap="flat" cmpd="sng" algn="ctr">
+                      <a:noFill/>
+                    </a:lnT>
+                    <a:lnB w="9525" cap="flat" cmpd="sng" algn="ctr">
+                      <a:solidFill>
+                        <a:srgbClr val="E1E0D9"/>
+                      </a:solidFill>
+                      <a:prstDash val="solid"/>
+                      <a:round/>
+                      <a:headEnd type="none" w="med" len="med"/>
+                      <a:tailEnd type="none" w="med" len="med"/>
+                    </a:lnB>
+                  </a:tcPr>
+                </a:tc>
+                <a:tc>
+                  <a:txBody>
+                    <a:bodyPr/>
+                    <a:lstStyle/>
+                    <a:p>
+                      <a:pPr algn="r" indent="0" marL="0">
+                        <a:buNone/>
+                      </a:pPr>
+                      <a:r>
+                        <a:rPr lang="en-US" sz="950" dirty="0">
+                          <a:solidFill>
+                            <a:srgbClr val="0B0B0B"/>
+                          </a:solidFill>
+                          <a:latin typeface="Arial" pitchFamily="34" charset="0"/>
+                          <a:ea typeface="Arial" pitchFamily="34" charset="-122"/>
+                          <a:cs typeface="Arial" pitchFamily="34" charset="-120"/>
+                        </a:rPr>
+                        <a:t>X.X%</a:t>
+                      </a:r>
+                      <a:endParaRPr lang="en-US" sz="950" dirty="0">
+                        <a:latin typeface="Arial" charset="0"/>
+                        <a:ea typeface="Arial" charset="0"/>
+                        <a:cs typeface="Arial" charset="0"/>
+                      </a:endParaRPr>
+                    </a:p>
+                  </a:txBody>
+                  <a:tcPr marL="27432" marR="91440" marT="18288" marB="18288" anchor="ctr">
                     <a:lnL w="0" cap="flat" cmpd="sng" algn="ctr">
                       <a:noFill/>
                     </a:lnL>
@@ -3863,7 +4193,54 @@
                       </a:endParaRPr>
                     </a:p>
                   </a:txBody>
-                  <a:tcPr marL="109728" marR="27432" marT="18288" marB="18288" anchor="ctr">
+                  <a:tcPr marL="54864" marR="27432" marT="18288" marB="18288" anchor="ctr">
+                    <a:lnL w="0" cap="flat" cmpd="sng" algn="ctr">
+                      <a:noFill/>
+                    </a:lnL>
+                    <a:lnR w="0" cap="flat" cmpd="sng" algn="ctr">
+                      <a:noFill/>
+                    </a:lnR>
+                    <a:lnT w="0" cap="flat" cmpd="sng" algn="ctr">
+                      <a:noFill/>
+                    </a:lnT>
+                    <a:lnB w="9525" cap="flat" cmpd="sng" algn="ctr">
+                      <a:solidFill>
+                        <a:srgbClr val="E1E0D9"/>
+                      </a:solidFill>
+                      <a:prstDash val="solid"/>
+                      <a:round/>
+                      <a:headEnd type="none" w="med" len="med"/>
+                      <a:tailEnd type="none" w="med" len="med"/>
+                    </a:lnB>
+                  </a:tcPr>
+                </a:tc>
+                <a:tc>
+                  <a:txBody>
+                    <a:bodyPr/>
+                    <a:lstStyle/>
+                    <a:p>
+                      <a:pPr algn="r" indent="0" marL="0">
+                        <a:buNone/>
+                      </a:pPr>
+                      <a:r>
+                        <a:rPr lang="en-US" sz="950" dirty="0">
+                          <a:solidFill>
+                            <a:srgbClr val="0B0B0B"/>
+                          </a:solidFill>
+                          <a:latin typeface="Arial" pitchFamily="34" charset="0"/>
+                          <a:ea typeface="Arial" pitchFamily="34" charset="-122"/>
+                          <a:cs typeface="Arial" pitchFamily="34" charset="-120"/>
+                        </a:rPr>
+                        <a:t>X.X%</a:t>
+                      </a:r>
+                      <a:endParaRPr lang="en-US" sz="950" dirty="0">
+                        <a:latin typeface="Arial" charset="0"/>
+                        <a:ea typeface="Arial" charset="0"/>
+                        <a:cs typeface="Arial" charset="0"/>
+                      </a:endParaRPr>
+                    </a:p>
+                  </a:txBody>
+                  <a:tcPr marL="27432" marR="91440" marT="18288" marB="18288" anchor="ctr">
                     <a:lnL w="0" cap="flat" cmpd="sng" algn="ctr">
                       <a:noFill/>
                     </a:lnL>
@@ -4089,7 +4466,54 @@
                       </a:endParaRPr>
                     </a:p>
                   </a:txBody>
-                  <a:tcPr marL="109728" marR="27432" marT="18288" marB="18288" anchor="ctr">
+                  <a:tcPr marL="54864" marR="27432" marT="18288" marB="18288" anchor="ctr">
+                    <a:lnL w="0" cap="flat" cmpd="sng" algn="ctr">
+                      <a:noFill/>
+                    </a:lnL>
+                    <a:lnR w="0" cap="flat" cmpd="sng" algn="ctr">
+                      <a:noFill/>
+                    </a:lnR>
+                    <a:lnT w="0" cap="flat" cmpd="sng" algn="ctr">
+                      <a:noFill/>
+                    </a:lnT>
+                    <a:lnB w="9525" cap="flat" cmpd="sng" algn="ctr">
+                      <a:solidFill>
+                        <a:srgbClr val="E1E0D9"/>
+                      </a:solidFill>
+                      <a:prstDash val="solid"/>
+                      <a:round/>
+                      <a:headEnd type="none" w="med" len="med"/>
+                      <a:tailEnd type="none" w="med" len="med"/>
+                    </a:lnB>
+                  </a:tcPr>
+                </a:tc>
+                <a:tc>
+                  <a:txBody>
+                    <a:bodyPr/>
+                    <a:lstStyle/>
+                    <a:p>
+                      <a:pPr algn="r" indent="0" marL="0">
+                        <a:buNone/>
+                      </a:pPr>
+                      <a:r>
+                        <a:rPr lang="en-US" sz="950" dirty="0">
+                          <a:solidFill>
+                            <a:srgbClr val="0B0B0B"/>
+                          </a:solidFill>
+                          <a:latin typeface="Arial" pitchFamily="34" charset="0"/>
+                          <a:ea typeface="Arial" pitchFamily="34" charset="-122"/>
+                          <a:cs typeface="Arial" pitchFamily="34" charset="-120"/>
+                        </a:rPr>
+                        <a:t>X.X%</a:t>
+                      </a:r>
+                      <a:endParaRPr lang="en-US" sz="950" dirty="0">
+                        <a:latin typeface="Arial" charset="0"/>
+                        <a:ea typeface="Arial" charset="0"/>
+                        <a:cs typeface="Arial" charset="0"/>
+                      </a:endParaRPr>
+                    </a:p>
+                  </a:txBody>
+                  <a:tcPr marL="27432" marR="91440" marT="18288" marB="18288" anchor="ctr">
                     <a:lnL w="0" cap="flat" cmpd="sng" algn="ctr">
                       <a:noFill/>
                     </a:lnL>
@@ -4315,7 +4739,54 @@
                       </a:endParaRPr>
                     </a:p>
                   </a:txBody>
-                  <a:tcPr marL="109728" marR="27432" marT="18288" marB="18288" anchor="ctr">
+                  <a:tcPr marL="54864" marR="27432" marT="18288" marB="18288" anchor="ctr">
+                    <a:lnL w="0" cap="flat" cmpd="sng" algn="ctr">
+                      <a:noFill/>
+                    </a:lnL>
+                    <a:lnR w="0" cap="flat" cmpd="sng" algn="ctr">
+                      <a:noFill/>
+                    </a:lnR>
+                    <a:lnT w="0" cap="flat" cmpd="sng" algn="ctr">
+                      <a:noFill/>
+                    </a:lnT>
+                    <a:lnB w="9525" cap="flat" cmpd="sng" algn="ctr">
+                      <a:solidFill>
+                        <a:srgbClr val="E1E0D9"/>
+                      </a:solidFill>
+                      <a:prstDash val="solid"/>
+                      <a:round/>
+                      <a:headEnd type="none" w="med" len="med"/>
+                      <a:tailEnd type="none" w="med" len="med"/>
+                    </a:lnB>
+                  </a:tcPr>
+                </a:tc>
+                <a:tc>
+                  <a:txBody>
+                    <a:bodyPr/>
+                    <a:lstStyle/>
+                    <a:p>
+                      <a:pPr algn="r" indent="0" marL="0">
+                        <a:buNone/>
+                      </a:pPr>
+                      <a:r>
+                        <a:rPr lang="en-US" sz="950" dirty="0">
+                          <a:solidFill>
+                            <a:srgbClr val="0B0B0B"/>
+                          </a:solidFill>
+                          <a:latin typeface="Arial" pitchFamily="34" charset="0"/>
+                          <a:ea typeface="Arial" pitchFamily="34" charset="-122"/>
+                          <a:cs typeface="Arial" pitchFamily="34" charset="-120"/>
+                        </a:rPr>
+                        <a:t>X.X%</a:t>
+                      </a:r>
+                      <a:endParaRPr lang="en-US" sz="950" dirty="0">
+                        <a:latin typeface="Arial" charset="0"/>
+                        <a:ea typeface="Arial" charset="0"/>
+                        <a:cs typeface="Arial" charset="0"/>
+                      </a:endParaRPr>
+                    </a:p>
+                  </a:txBody>
+                  <a:tcPr marL="27432" marR="91440" marT="18288" marB="18288" anchor="ctr">
                     <a:lnL w="0" cap="flat" cmpd="sng" algn="ctr">
                       <a:noFill/>
                     </a:lnL>
@@ -4541,7 +5012,54 @@
                       </a:endParaRPr>
                     </a:p>
                   </a:txBody>
-                  <a:tcPr marL="109728" marR="27432" marT="18288" marB="18288" anchor="ctr">
+                  <a:tcPr marL="54864" marR="27432" marT="18288" marB="18288" anchor="ctr">
+                    <a:lnL w="0" cap="flat" cmpd="sng" algn="ctr">
+                      <a:noFill/>
+                    </a:lnL>
+                    <a:lnR w="0" cap="flat" cmpd="sng" algn="ctr">
+                      <a:noFill/>
+                    </a:lnR>
+                    <a:lnT w="0" cap="flat" cmpd="sng" algn="ctr">
+                      <a:noFill/>
+                    </a:lnT>
+                    <a:lnB w="9525" cap="flat" cmpd="sng" algn="ctr">
+                      <a:solidFill>
+                        <a:srgbClr val="E1E0D9"/>
+                      </a:solidFill>
+                      <a:prstDash val="solid"/>
+                      <a:round/>
+                      <a:headEnd type="none" w="med" len="med"/>
+                      <a:tailEnd type="none" w="med" len="med"/>
+                    </a:lnB>
+                  </a:tcPr>
+                </a:tc>
+                <a:tc>
+                  <a:txBody>
+                    <a:bodyPr/>
+                    <a:lstStyle/>
+                    <a:p>
+                      <a:pPr algn="r" indent="0" marL="0">
+                        <a:buNone/>
+                      </a:pPr>
+                      <a:r>
+                        <a:rPr lang="en-US" sz="950" dirty="0">
+                          <a:solidFill>
+                            <a:srgbClr val="0B0B0B"/>
+                          </a:solidFill>
+                          <a:latin typeface="Arial" pitchFamily="34" charset="0"/>
+                          <a:ea typeface="Arial" pitchFamily="34" charset="-122"/>
+                          <a:cs typeface="Arial" pitchFamily="34" charset="-120"/>
+                        </a:rPr>
+                        <a:t>X.X%</a:t>
+                      </a:r>
+                      <a:endParaRPr lang="en-US" sz="950" dirty="0">
+                        <a:latin typeface="Arial" charset="0"/>
+                        <a:ea typeface="Arial" charset="0"/>
+                        <a:cs typeface="Arial" charset="0"/>
+                      </a:endParaRPr>
+                    </a:p>
+                  </a:txBody>
+                  <a:tcPr marL="27432" marR="91440" marT="18288" marB="18288" anchor="ctr">
                     <a:lnL w="0" cap="flat" cmpd="sng" algn="ctr">
                       <a:noFill/>
                     </a:lnL>
@@ -4767,7 +5285,54 @@
                       </a:endParaRPr>
                     </a:p>
                   </a:txBody>
-                  <a:tcPr marL="109728" marR="27432" marT="18288" marB="18288" anchor="ctr">
+                  <a:tcPr marL="54864" marR="27432" marT="18288" marB="18288" anchor="ctr">
+                    <a:lnL w="0" cap="flat" cmpd="sng" algn="ctr">
+                      <a:noFill/>
+                    </a:lnL>
+                    <a:lnR w="0" cap="flat" cmpd="sng" algn="ctr">
+                      <a:noFill/>
+                    </a:lnR>
+                    <a:lnT w="0" cap="flat" cmpd="sng" algn="ctr">
+                      <a:noFill/>
+                    </a:lnT>
+                    <a:lnB w="9525" cap="flat" cmpd="sng" algn="ctr">
+                      <a:solidFill>
+                        <a:srgbClr val="E1E0D9"/>
+                      </a:solidFill>
+                      <a:prstDash val="solid"/>
+                      <a:round/>
+                      <a:headEnd type="none" w="med" len="med"/>
+                      <a:tailEnd type="none" w="med" len="med"/>
+                    </a:lnB>
+                  </a:tcPr>
+                </a:tc>
+                <a:tc>
+                  <a:txBody>
+                    <a:bodyPr/>
+                    <a:lstStyle/>
+                    <a:p>
+                      <a:pPr algn="r" indent="0" marL="0">
+                        <a:buNone/>
+                      </a:pPr>
+                      <a:r>
+                        <a:rPr lang="en-US" sz="950" dirty="0">
+                          <a:solidFill>
+                            <a:srgbClr val="0B0B0B"/>
+                          </a:solidFill>
+                          <a:latin typeface="Arial" pitchFamily="34" charset="0"/>
+                          <a:ea typeface="Arial" pitchFamily="34" charset="-122"/>
+                          <a:cs typeface="Arial" pitchFamily="34" charset="-120"/>
+                        </a:rPr>
+                        <a:t>X.X%</a:t>
+                      </a:r>
+                      <a:endParaRPr lang="en-US" sz="950" dirty="0">
+                        <a:latin typeface="Arial" charset="0"/>
+                        <a:ea typeface="Arial" charset="0"/>
+                        <a:cs typeface="Arial" charset="0"/>
+                      </a:endParaRPr>
+                    </a:p>
+                  </a:txBody>
+                  <a:tcPr marL="27432" marR="91440" marT="18288" marB="18288" anchor="ctr">
                     <a:lnL w="0" cap="flat" cmpd="sng" algn="ctr">
                       <a:noFill/>
                     </a:lnL>
@@ -4993,7 +5558,54 @@
                       </a:endParaRPr>
                     </a:p>
                   </a:txBody>
-                  <a:tcPr marL="109728" marR="27432" marT="18288" marB="18288" anchor="ctr">
+                  <a:tcPr marL="54864" marR="27432" marT="18288" marB="18288" anchor="ctr">
+                    <a:lnL w="0" cap="flat" cmpd="sng" algn="ctr">
+                      <a:noFill/>
+                    </a:lnL>
+                    <a:lnR w="0" cap="flat" cmpd="sng" algn="ctr">
+                      <a:noFill/>
+                    </a:lnR>
+                    <a:lnT w="0" cap="flat" cmpd="sng" algn="ctr">
+                      <a:noFill/>
+                    </a:lnT>
+                    <a:lnB w="9525" cap="flat" cmpd="sng" algn="ctr">
+                      <a:solidFill>
+                        <a:srgbClr val="E1E0D9"/>
+                      </a:solidFill>
+                      <a:prstDash val="solid"/>
+                      <a:round/>
+                      <a:headEnd type="none" w="med" len="med"/>
+                      <a:tailEnd type="none" w="med" len="med"/>
+                    </a:lnB>
+                  </a:tcPr>
+                </a:tc>
+                <a:tc>
+                  <a:txBody>
+                    <a:bodyPr/>
+                    <a:lstStyle/>
+                    <a:p>
+                      <a:pPr algn="r" indent="0" marL="0">
+                        <a:buNone/>
+                      </a:pPr>
+                      <a:r>
+                        <a:rPr lang="en-US" sz="950" dirty="0">
+                          <a:solidFill>
+                            <a:srgbClr val="0B0B0B"/>
+                          </a:solidFill>
+                          <a:latin typeface="Arial" pitchFamily="34" charset="0"/>
+                          <a:ea typeface="Arial" pitchFamily="34" charset="-122"/>
+                          <a:cs typeface="Arial" pitchFamily="34" charset="-120"/>
+                        </a:rPr>
+                        <a:t>X.X%</a:t>
+                      </a:r>
+                      <a:endParaRPr lang="en-US" sz="950" dirty="0">
+                        <a:latin typeface="Arial" charset="0"/>
+                        <a:ea typeface="Arial" charset="0"/>
+                        <a:cs typeface="Arial" charset="0"/>
+                      </a:endParaRPr>
+                    </a:p>
+                  </a:txBody>
+                  <a:tcPr marL="27432" marR="91440" marT="18288" marB="18288" anchor="ctr">
                     <a:lnL w="0" cap="flat" cmpd="sng" algn="ctr">
                       <a:noFill/>
                     </a:lnL>
@@ -5219,7 +5831,54 @@
                       </a:endParaRPr>
                     </a:p>
                   </a:txBody>
-                  <a:tcPr marL="109728" marR="27432" marT="18288" marB="18288" anchor="ctr">
+                  <a:tcPr marL="54864" marR="27432" marT="18288" marB="18288" anchor="ctr">
+                    <a:lnL w="0" cap="flat" cmpd="sng" algn="ctr">
+                      <a:noFill/>
+                    </a:lnL>
+                    <a:lnR w="0" cap="flat" cmpd="sng" algn="ctr">
+                      <a:noFill/>
+                    </a:lnR>
+                    <a:lnT w="0" cap="flat" cmpd="sng" algn="ctr">
+                      <a:noFill/>
+                    </a:lnT>
+                    <a:lnB w="9525" cap="flat" cmpd="sng" algn="ctr">
+                      <a:solidFill>
+                        <a:srgbClr val="E1E0D9"/>
+                      </a:solidFill>
+                      <a:prstDash val="solid"/>
+                      <a:round/>
+                      <a:headEnd type="none" w="med" len="med"/>
+                      <a:tailEnd type="none" w="med" len="med"/>
+                    </a:lnB>
+                  </a:tcPr>
+                </a:tc>
+                <a:tc>
+                  <a:txBody>
+                    <a:bodyPr/>
+                    <a:lstStyle/>
+                    <a:p>
+                      <a:pPr algn="r" indent="0" marL="0">
+                        <a:buNone/>
+                      </a:pPr>
+                      <a:r>
+                        <a:rPr lang="en-US" sz="950" dirty="0">
+                          <a:solidFill>
+                            <a:srgbClr val="0B0B0B"/>
+                          </a:solidFill>
+                          <a:latin typeface="Arial" pitchFamily="34" charset="0"/>
+                          <a:ea typeface="Arial" pitchFamily="34" charset="-122"/>
+                          <a:cs typeface="Arial" pitchFamily="34" charset="-120"/>
+                        </a:rPr>
+                        <a:t>X.X%</a:t>
+                      </a:r>
+                      <a:endParaRPr lang="en-US" sz="950" dirty="0">
+                        <a:latin typeface="Arial" charset="0"/>
+                        <a:ea typeface="Arial" charset="0"/>
+                        <a:cs typeface="Arial" charset="0"/>
+                      </a:endParaRPr>
+                    </a:p>
+                  </a:txBody>
+                  <a:tcPr marL="27432" marR="91440" marT="18288" marB="18288" anchor="ctr">
                     <a:lnL w="0" cap="flat" cmpd="sng" algn="ctr">
                       <a:noFill/>
                     </a:lnL>
@@ -5253,7 +5912,7 @@
         </p:nvSpPr>
         <p:spPr>
           <a:xfrm>
-            <a:off x="2624328" y="2887218"/>
+            <a:off x="1828800" y="2887218"/>
             <a:ext cx="877824" cy="219456"/>
           </a:xfrm>
           <a:prstGeom prst="roundRect">
@@ -5275,7 +5934,7 @@
         </p:nvSpPr>
         <p:spPr>
           <a:xfrm>
-            <a:off x="2624328" y="2887218"/>
+            <a:off x="1828800" y="2887218"/>
             <a:ext cx="877824" cy="219456"/>
           </a:xfrm>
           <a:prstGeom prst="rect">
@@ -5328,7 +5987,7 @@
         </p:nvSpPr>
         <p:spPr>
           <a:xfrm>
-            <a:off x="2624328" y="3230118"/>
+            <a:off x="1828800" y="3230118"/>
             <a:ext cx="877824" cy="219456"/>
           </a:xfrm>
           <a:prstGeom prst="roundRect">
@@ -5350,7 +6009,7 @@
         </p:nvSpPr>
         <p:spPr>
           <a:xfrm>
-            <a:off x="2624328" y="3230118"/>
+            <a:off x="1828800" y="3230118"/>
             <a:ext cx="877824" cy="219456"/>
           </a:xfrm>
           <a:prstGeom prst="rect">
@@ -5403,7 +6062,7 @@
         </p:nvSpPr>
         <p:spPr>
           <a:xfrm>
-            <a:off x="2624328" y="3573018"/>
+            <a:off x="1828800" y="3573018"/>
             <a:ext cx="877824" cy="219456"/>
           </a:xfrm>
           <a:prstGeom prst="roundRect">
@@ -5425,7 +6084,7 @@
         </p:nvSpPr>
         <p:spPr>
           <a:xfrm>
-            <a:off x="2624328" y="3573018"/>
+            <a:off x="1828800" y="3573018"/>
             <a:ext cx="877824" cy="219456"/>
           </a:xfrm>
           <a:prstGeom prst="rect">
@@ -5478,7 +6137,7 @@
         </p:nvSpPr>
         <p:spPr>
           <a:xfrm>
-            <a:off x="2624328" y="3915918"/>
+            <a:off x="1828800" y="3915918"/>
             <a:ext cx="877824" cy="219456"/>
           </a:xfrm>
           <a:prstGeom prst="roundRect">
@@ -5500,7 +6159,7 @@
         </p:nvSpPr>
         <p:spPr>
           <a:xfrm>
-            <a:off x="2624328" y="3915918"/>
+            <a:off x="1828800" y="3915918"/>
             <a:ext cx="877824" cy="219456"/>
           </a:xfrm>
           <a:prstGeom prst="rect">
@@ -5553,7 +6212,7 @@
         </p:nvSpPr>
         <p:spPr>
           <a:xfrm>
-            <a:off x="2624328" y="4258818"/>
+            <a:off x="1828800" y="4258818"/>
             <a:ext cx="877824" cy="219456"/>
           </a:xfrm>
           <a:prstGeom prst="roundRect">
@@ -5575,7 +6234,7 @@
         </p:nvSpPr>
         <p:spPr>
           <a:xfrm>
-            <a:off x="2624328" y="4258818"/>
+            <a:off x="1828800" y="4258818"/>
             <a:ext cx="877824" cy="219456"/>
           </a:xfrm>
           <a:prstGeom prst="rect">
@@ -5628,7 +6287,7 @@
         </p:nvSpPr>
         <p:spPr>
           <a:xfrm>
-            <a:off x="2624328" y="4601718"/>
+            <a:off x="1828800" y="4601718"/>
             <a:ext cx="877824" cy="219456"/>
           </a:xfrm>
           <a:prstGeom prst="roundRect">
@@ -5650,7 +6309,7 @@
         </p:nvSpPr>
         <p:spPr>
           <a:xfrm>
-            <a:off x="2624328" y="4601718"/>
+            <a:off x="1828800" y="4601718"/>
             <a:ext cx="877824" cy="219456"/>
           </a:xfrm>
           <a:prstGeom prst="rect">
@@ -5703,7 +6362,7 @@
         </p:nvSpPr>
         <p:spPr>
           <a:xfrm>
-            <a:off x="2624328" y="4944618"/>
+            <a:off x="1828800" y="4944618"/>
             <a:ext cx="987552" cy="219456"/>
           </a:xfrm>
           <a:prstGeom prst="roundRect">
@@ -5725,7 +6384,7 @@
         </p:nvSpPr>
         <p:spPr>
           <a:xfrm>
-            <a:off x="2624328" y="4944618"/>
+            <a:off x="1828800" y="4944618"/>
             <a:ext cx="987552" cy="219456"/>
           </a:xfrm>
           <a:prstGeom prst="rect">
@@ -5778,7 +6437,7 @@
         </p:nvSpPr>
         <p:spPr>
           <a:xfrm>
-            <a:off x="2624328" y="5287518"/>
+            <a:off x="1828800" y="5287518"/>
             <a:ext cx="987552" cy="219456"/>
           </a:xfrm>
           <a:prstGeom prst="roundRect">
@@ -5800,7 +6459,7 @@
         </p:nvSpPr>
         <p:spPr>
           <a:xfrm>
-            <a:off x="2624328" y="5287518"/>
+            <a:off x="1828800" y="5287518"/>
             <a:ext cx="987552" cy="219456"/>
           </a:xfrm>
           <a:prstGeom prst="rect">
@@ -5853,7 +6512,7 @@
         </p:nvSpPr>
         <p:spPr>
           <a:xfrm>
-            <a:off x="2624328" y="5630418"/>
+            <a:off x="1828800" y="5630418"/>
             <a:ext cx="987552" cy="219456"/>
           </a:xfrm>
           <a:prstGeom prst="roundRect">
@@ -5875,7 +6534,7 @@
         </p:nvSpPr>
         <p:spPr>
           <a:xfrm>
-            <a:off x="2624328" y="5630418"/>
+            <a:off x="1828800" y="5630418"/>
             <a:ext cx="987552" cy="219456"/>
           </a:xfrm>
           <a:prstGeom prst="rect">
@@ -5928,7 +6587,7 @@
         </p:nvSpPr>
         <p:spPr>
           <a:xfrm>
-            <a:off x="2624328" y="5973318"/>
+            <a:off x="1828800" y="5973318"/>
             <a:ext cx="694944" cy="219456"/>
           </a:xfrm>
           <a:prstGeom prst="roundRect">
@@ -5950,7 +6609,7 @@
         </p:nvSpPr>
         <p:spPr>
           <a:xfrm>
-            <a:off x="2624328" y="5973318"/>
+            <a:off x="1828800" y="5973318"/>
             <a:ext cx="694944" cy="219456"/>
           </a:xfrm>
           <a:prstGeom prst="rect">
@@ -6003,7 +6662,7 @@
         </p:nvSpPr>
         <p:spPr>
           <a:xfrm>
-            <a:off x="2624328" y="6316218"/>
+            <a:off x="1828800" y="6316218"/>
             <a:ext cx="694944" cy="219456"/>
           </a:xfrm>
           <a:prstGeom prst="roundRect">
@@ -6025,7 +6684,7 @@
         </p:nvSpPr>
         <p:spPr>
           <a:xfrm>
-            <a:off x="2624328" y="6316218"/>
+            <a:off x="1828800" y="6316218"/>
             <a:ext cx="694944" cy="219456"/>
           </a:xfrm>
           <a:prstGeom prst="rect">
@@ -6078,7 +6737,7 @@
         </p:nvSpPr>
         <p:spPr>
           <a:xfrm>
-            <a:off x="2624328" y="6659118"/>
+            <a:off x="1828800" y="6659118"/>
             <a:ext cx="694944" cy="219456"/>
           </a:xfrm>
           <a:prstGeom prst="roundRect">
@@ -6100,7 +6759,7 @@
         </p:nvSpPr>
         <p:spPr>
           <a:xfrm>
-            <a:off x="2624328" y="6659118"/>
+            <a:off x="1828800" y="6659118"/>
             <a:ext cx="694944" cy="219456"/>
           </a:xfrm>
           <a:prstGeom prst="rect">
@@ -6153,7 +6812,7 @@
         </p:nvSpPr>
         <p:spPr>
           <a:xfrm>
-            <a:off x="2624328" y="7002018"/>
+            <a:off x="1828800" y="7002018"/>
             <a:ext cx="694944" cy="219456"/>
           </a:xfrm>
           <a:prstGeom prst="roundRect">
@@ -6175,7 +6834,7 @@
         </p:nvSpPr>
         <p:spPr>
           <a:xfrm>
-            <a:off x="2624328" y="7002018"/>
+            <a:off x="1828800" y="7002018"/>
             <a:ext cx="694944" cy="219456"/>
           </a:xfrm>
           <a:prstGeom prst="rect">
@@ -6228,7 +6887,7 @@
         </p:nvSpPr>
         <p:spPr>
           <a:xfrm>
-            <a:off x="5742432" y="2162556"/>
+            <a:off x="5166360" y="2162556"/>
             <a:ext cx="274320" cy="187452"/>
           </a:xfrm>
           <a:prstGeom prst="roundRect">
@@ -6255,7 +6914,7 @@
         </p:nvSpPr>
         <p:spPr>
           <a:xfrm>
-            <a:off x="5827105" y="2203795"/>
+            <a:off x="5251033" y="2203795"/>
             <a:ext cx="104973" cy="104973"/>
           </a:xfrm>
           <a:prstGeom prst="ellipse">
@@ -6275,7 +6934,7 @@
         </p:nvSpPr>
         <p:spPr>
           <a:xfrm>
-            <a:off x="5827105" y="2203795"/>
+            <a:off x="5251033" y="2203795"/>
             <a:ext cx="104973" cy="104973"/>
           </a:xfrm>
           <a:prstGeom prst="pie">
@@ -6298,7 +6957,7 @@
         </p:nvSpPr>
         <p:spPr>
           <a:xfrm>
-            <a:off x="6089904" y="2121408"/>
+            <a:off x="5513832" y="2121408"/>
             <a:ext cx="1463040" cy="274320"/>
           </a:xfrm>
           <a:prstGeom prst="rect">
@@ -6390,8 +7049,8 @@
         </p:nvSpPr>
         <p:spPr>
           <a:xfrm>
-            <a:off x="5742432" y="2459736"/>
-            <a:ext cx="3931920" cy="25603"/>
+            <a:off x="5166360" y="2459736"/>
+            <a:ext cx="4507992" cy="25603"/>
           </a:xfrm>
           <a:prstGeom prst="rect">
             <a:avLst/>
@@ -6417,19 +7076,20 @@
           </p:nvPr>
         </p:nvGraphicFramePr>
         <p:xfrm>
-          <a:off x="5742432" y="2569464"/>
-          <a:ext cx="3931920" cy="914400"/>
+          <a:off x="5166360" y="2569464"/>
+          <a:ext cx="4507992" cy="914400"/>
         </p:xfrm>
         <a:graphic>
           <a:graphicData uri="http://schemas.openxmlformats.org/drawingml/2006/table">
             <a:tbl>
               <a:tblPr/>
               <a:tblGrid>
-                <a:gridCol w="859536"/>
-                <a:gridCol w="585216"/>
-                <a:gridCol w="1060704"/>
-                <a:gridCol w="621792"/>
-                <a:gridCol w="804672"/>
+                <a:gridCol w="832104"/>
+                <a:gridCol w="566928"/>
+                <a:gridCol w="1042416"/>
+                <a:gridCol w="576072"/>
+                <a:gridCol w="749808"/>
+                <a:gridCol w="740664"/>
               </a:tblGrid>
               <a:tr h="256032">
                 <a:tc>
@@ -6441,7 +7101,7 @@
                         <a:buNone/>
                       </a:pPr>
                       <a:r>
-                        <a:rPr lang="en-US" sz="750" b="1" dirty="0">
+                        <a:rPr lang="en-US" sz="700" b="1" dirty="0">
                           <a:solidFill>
                             <a:srgbClr val="898781"/>
                           </a:solidFill>
@@ -6451,7 +7111,7 @@
                         </a:rPr>
                         <a:t>COMPANY</a:t>
                       </a:r>
-                      <a:endParaRPr lang="en-US" sz="750" dirty="0">
+                      <a:endParaRPr lang="en-US" sz="700" dirty="0">
                         <a:latin typeface="Arial" charset="0"/>
                         <a:ea typeface="Arial" charset="0"/>
                         <a:cs typeface="Arial" charset="0"/>
@@ -6488,7 +7148,7 @@
                         <a:buNone/>
                       </a:pPr>
                       <a:r>
-                        <a:rPr lang="en-US" sz="750" b="1" dirty="0">
+                        <a:rPr lang="en-US" sz="700" b="1" dirty="0">
                           <a:solidFill>
                             <a:srgbClr val="898781"/>
                           </a:solidFill>
@@ -6498,7 +7158,7 @@
                         </a:rPr>
                         <a:t>SECTOR</a:t>
                       </a:r>
-                      <a:endParaRPr lang="en-US" sz="750" dirty="0">
+                      <a:endParaRPr lang="en-US" sz="700" dirty="0">
                         <a:latin typeface="Arial" charset="0"/>
                         <a:ea typeface="Arial" charset="0"/>
                         <a:cs typeface="Arial" charset="0"/>
@@ -6535,7 +7195,7 @@
                         <a:buNone/>
                       </a:pPr>
                       <a:r>
-                        <a:rPr lang="en-US" sz="750" b="1" dirty="0">
+                        <a:rPr lang="en-US" sz="700" b="1" dirty="0">
                           <a:solidFill>
                             <a:srgbClr val="898781"/>
                           </a:solidFill>
@@ -6545,7 +7205,7 @@
                         </a:rPr>
                         <a:t>STAGE</a:t>
                       </a:r>
-                      <a:endParaRPr lang="en-US" sz="750" dirty="0">
+                      <a:endParaRPr lang="en-US" sz="700" dirty="0">
                         <a:latin typeface="Arial" charset="0"/>
                         <a:ea typeface="Arial" charset="0"/>
                         <a:cs typeface="Arial" charset="0"/>
@@ -6582,7 +7242,7 @@
                         <a:buNone/>
                       </a:pPr>
                       <a:r>
-                        <a:rPr lang="en-US" sz="750" b="1" dirty="0">
+                        <a:rPr lang="en-US" sz="700" b="1" dirty="0">
                           <a:solidFill>
                             <a:srgbClr val="898781"/>
                           </a:solidFill>
@@ -6592,7 +7252,7 @@
                         </a:rPr>
                         <a:t>DEAL SIZE</a:t>
                       </a:r>
-                      <a:endParaRPr lang="en-US" sz="750" dirty="0">
+                      <a:endParaRPr lang="en-US" sz="700" dirty="0">
                         <a:latin typeface="Arial" charset="0"/>
                         <a:ea typeface="Arial" charset="0"/>
                         <a:cs typeface="Arial" charset="0"/>
@@ -6629,7 +7289,7 @@
                         <a:buNone/>
                       </a:pPr>
                       <a:r>
-                        <a:rPr lang="en-US" sz="750" b="1" dirty="0">
+                        <a:rPr lang="en-US" sz="700" b="1" dirty="0">
                           <a:solidFill>
                             <a:srgbClr val="898781"/>
                           </a:solidFill>
@@ -6639,14 +7299,61 @@
                         </a:rPr>
                         <a:t>OWNER’S REP</a:t>
                       </a:r>
-                      <a:endParaRPr lang="en-US" sz="750" dirty="0">
-                        <a:latin typeface="Arial" charset="0"/>
-                        <a:ea typeface="Arial" charset="0"/>
-                        <a:cs typeface="Arial" charset="0"/>
-                      </a:endParaRPr>
-                    </a:p>
-                  </a:txBody>
-                  <a:tcPr marL="91440" marR="27432" marT="18288" marB="18288" anchor="ctr">
+                      <a:endParaRPr lang="en-US" sz="700" dirty="0">
+                        <a:latin typeface="Arial" charset="0"/>
+                        <a:ea typeface="Arial" charset="0"/>
+                        <a:cs typeface="Arial" charset="0"/>
+                      </a:endParaRPr>
+                    </a:p>
+                  </a:txBody>
+                  <a:tcPr marL="54864" marR="27432" marT="18288" marB="18288" anchor="ctr">
+                    <a:lnL w="0" cap="flat" cmpd="sng" algn="ctr">
+                      <a:noFill/>
+                    </a:lnL>
+                    <a:lnR w="0" cap="flat" cmpd="sng" algn="ctr">
+                      <a:noFill/>
+                    </a:lnR>
+                    <a:lnT w="0" cap="flat" cmpd="sng" algn="ctr">
+                      <a:noFill/>
+                    </a:lnT>
+                    <a:lnB w="15875" cap="flat" cmpd="sng" algn="ctr">
+                      <a:solidFill>
+                        <a:srgbClr val="E1E0D9"/>
+                      </a:solidFill>
+                      <a:prstDash val="solid"/>
+                      <a:round/>
+                      <a:headEnd type="none" w="med" len="med"/>
+                      <a:tailEnd type="none" w="med" len="med"/>
+                    </a:lnB>
+                  </a:tcPr>
+                </a:tc>
+                <a:tc>
+                  <a:txBody>
+                    <a:bodyPr/>
+                    <a:lstStyle/>
+                    <a:p>
+                      <a:pPr algn="r" indent="0" marL="0">
+                        <a:buNone/>
+                      </a:pPr>
+                      <a:r>
+                        <a:rPr lang="en-US" sz="700" b="1" dirty="0">
+                          <a:solidFill>
+                            <a:srgbClr val="898781"/>
+                          </a:solidFill>
+                          <a:latin typeface="Arial" pitchFamily="34" charset="0"/>
+                          <a:ea typeface="Arial" pitchFamily="34" charset="-122"/>
+                          <a:cs typeface="Arial" pitchFamily="34" charset="-120"/>
+                        </a:rPr>
+                        <a:t>WARRANTS %</a:t>
+                      </a:r>
+                      <a:endParaRPr lang="en-US" sz="700" dirty="0">
+                        <a:latin typeface="Arial" charset="0"/>
+                        <a:ea typeface="Arial" charset="0"/>
+                        <a:cs typeface="Arial" charset="0"/>
+                      </a:endParaRPr>
+                    </a:p>
+                  </a:txBody>
+                  <a:tcPr marL="27432" marR="73152" marT="18288" marB="18288" anchor="ctr">
                     <a:lnL w="0" cap="flat" cmpd="sng" algn="ctr">
                       <a:noFill/>
                     </a:lnL>
@@ -6872,7 +7579,54 @@
                       </a:endParaRPr>
                     </a:p>
                   </a:txBody>
-                  <a:tcPr marL="109728" marR="27432" marT="18288" marB="18288" anchor="ctr">
+                  <a:tcPr marL="54864" marR="27432" marT="18288" marB="18288" anchor="ctr">
+                    <a:lnL w="0" cap="flat" cmpd="sng" algn="ctr">
+                      <a:noFill/>
+                    </a:lnL>
+                    <a:lnR w="0" cap="flat" cmpd="sng" algn="ctr">
+                      <a:noFill/>
+                    </a:lnR>
+                    <a:lnT w="0" cap="flat" cmpd="sng" algn="ctr">
+                      <a:noFill/>
+                    </a:lnT>
+                    <a:lnB w="9525" cap="flat" cmpd="sng" algn="ctr">
+                      <a:solidFill>
+                        <a:srgbClr val="E1E0D9"/>
+                      </a:solidFill>
+                      <a:prstDash val="solid"/>
+                      <a:round/>
+                      <a:headEnd type="none" w="med" len="med"/>
+                      <a:tailEnd type="none" w="med" len="med"/>
+                    </a:lnB>
+                  </a:tcPr>
+                </a:tc>
+                <a:tc>
+                  <a:txBody>
+                    <a:bodyPr/>
+                    <a:lstStyle/>
+                    <a:p>
+                      <a:pPr algn="r" indent="0" marL="0">
+                        <a:buNone/>
+                      </a:pPr>
+                      <a:r>
+                        <a:rPr lang="en-US" sz="950" dirty="0">
+                          <a:solidFill>
+                            <a:srgbClr val="0B0B0B"/>
+                          </a:solidFill>
+                          <a:latin typeface="Arial" pitchFamily="34" charset="0"/>
+                          <a:ea typeface="Arial" pitchFamily="34" charset="-122"/>
+                          <a:cs typeface="Arial" pitchFamily="34" charset="-120"/>
+                        </a:rPr>
+                        <a:t>X.X%</a:t>
+                      </a:r>
+                      <a:endParaRPr lang="en-US" sz="950" dirty="0">
+                        <a:latin typeface="Arial" charset="0"/>
+                        <a:ea typeface="Arial" charset="0"/>
+                        <a:cs typeface="Arial" charset="0"/>
+                      </a:endParaRPr>
+                    </a:p>
+                  </a:txBody>
+                  <a:tcPr marL="27432" marR="91440" marT="18288" marB="18288" anchor="ctr">
                     <a:lnL w="0" cap="flat" cmpd="sng" algn="ctr">
                       <a:noFill/>
                     </a:lnL>
@@ -7098,7 +7852,54 @@
                       </a:endParaRPr>
                     </a:p>
                   </a:txBody>
-                  <a:tcPr marL="109728" marR="27432" marT="18288" marB="18288" anchor="ctr">
+                  <a:tcPr marL="54864" marR="27432" marT="18288" marB="18288" anchor="ctr">
+                    <a:lnL w="0" cap="flat" cmpd="sng" algn="ctr">
+                      <a:noFill/>
+                    </a:lnL>
+                    <a:lnR w="0" cap="flat" cmpd="sng" algn="ctr">
+                      <a:noFill/>
+                    </a:lnR>
+                    <a:lnT w="0" cap="flat" cmpd="sng" algn="ctr">
+                      <a:noFill/>
+                    </a:lnT>
+                    <a:lnB w="9525" cap="flat" cmpd="sng" algn="ctr">
+                      <a:solidFill>
+                        <a:srgbClr val="E1E0D9"/>
+                      </a:solidFill>
+                      <a:prstDash val="solid"/>
+                      <a:round/>
+                      <a:headEnd type="none" w="med" len="med"/>
+                      <a:tailEnd type="none" w="med" len="med"/>
+                    </a:lnB>
+                  </a:tcPr>
+                </a:tc>
+                <a:tc>
+                  <a:txBody>
+                    <a:bodyPr/>
+                    <a:lstStyle/>
+                    <a:p>
+                      <a:pPr algn="r" indent="0" marL="0">
+                        <a:buNone/>
+                      </a:pPr>
+                      <a:r>
+                        <a:rPr lang="en-US" sz="950" dirty="0">
+                          <a:solidFill>
+                            <a:srgbClr val="0B0B0B"/>
+                          </a:solidFill>
+                          <a:latin typeface="Arial" pitchFamily="34" charset="0"/>
+                          <a:ea typeface="Arial" pitchFamily="34" charset="-122"/>
+                          <a:cs typeface="Arial" pitchFamily="34" charset="-120"/>
+                        </a:rPr>
+                        <a:t>X.X%</a:t>
+                      </a:r>
+                      <a:endParaRPr lang="en-US" sz="950" dirty="0">
+                        <a:latin typeface="Arial" charset="0"/>
+                        <a:ea typeface="Arial" charset="0"/>
+                        <a:cs typeface="Arial" charset="0"/>
+                      </a:endParaRPr>
+                    </a:p>
+                  </a:txBody>
+                  <a:tcPr marL="27432" marR="91440" marT="18288" marB="18288" anchor="ctr">
                     <a:lnL w="0" cap="flat" cmpd="sng" algn="ctr">
                       <a:noFill/>
                     </a:lnL>
@@ -7324,7 +8125,54 @@
                       </a:endParaRPr>
                     </a:p>
                   </a:txBody>
-                  <a:tcPr marL="109728" marR="27432" marT="18288" marB="18288" anchor="ctr">
+                  <a:tcPr marL="54864" marR="27432" marT="18288" marB="18288" anchor="ctr">
+                    <a:lnL w="0" cap="flat" cmpd="sng" algn="ctr">
+                      <a:noFill/>
+                    </a:lnL>
+                    <a:lnR w="0" cap="flat" cmpd="sng" algn="ctr">
+                      <a:noFill/>
+                    </a:lnR>
+                    <a:lnT w="0" cap="flat" cmpd="sng" algn="ctr">
+                      <a:noFill/>
+                    </a:lnT>
+                    <a:lnB w="9525" cap="flat" cmpd="sng" algn="ctr">
+                      <a:solidFill>
+                        <a:srgbClr val="E1E0D9"/>
+                      </a:solidFill>
+                      <a:prstDash val="solid"/>
+                      <a:round/>
+                      <a:headEnd type="none" w="med" len="med"/>
+                      <a:tailEnd type="none" w="med" len="med"/>
+                    </a:lnB>
+                  </a:tcPr>
+                </a:tc>
+                <a:tc>
+                  <a:txBody>
+                    <a:bodyPr/>
+                    <a:lstStyle/>
+                    <a:p>
+                      <a:pPr algn="r" indent="0" marL="0">
+                        <a:buNone/>
+                      </a:pPr>
+                      <a:r>
+                        <a:rPr lang="en-US" sz="950" dirty="0">
+                          <a:solidFill>
+                            <a:srgbClr val="0B0B0B"/>
+                          </a:solidFill>
+                          <a:latin typeface="Arial" pitchFamily="34" charset="0"/>
+                          <a:ea typeface="Arial" pitchFamily="34" charset="-122"/>
+                          <a:cs typeface="Arial" pitchFamily="34" charset="-120"/>
+                        </a:rPr>
+                        <a:t>X.X%</a:t>
+                      </a:r>
+                      <a:endParaRPr lang="en-US" sz="950" dirty="0">
+                        <a:latin typeface="Arial" charset="0"/>
+                        <a:ea typeface="Arial" charset="0"/>
+                        <a:cs typeface="Arial" charset="0"/>
+                      </a:endParaRPr>
+                    </a:p>
+                  </a:txBody>
+                  <a:tcPr marL="27432" marR="91440" marT="18288" marB="18288" anchor="ctr">
                     <a:lnL w="0" cap="flat" cmpd="sng" algn="ctr">
                       <a:noFill/>
                     </a:lnL>
@@ -7550,7 +8398,54 @@
                       </a:endParaRPr>
                     </a:p>
                   </a:txBody>
-                  <a:tcPr marL="109728" marR="27432" marT="18288" marB="18288" anchor="ctr">
+                  <a:tcPr marL="54864" marR="27432" marT="18288" marB="18288" anchor="ctr">
+                    <a:lnL w="0" cap="flat" cmpd="sng" algn="ctr">
+                      <a:noFill/>
+                    </a:lnL>
+                    <a:lnR w="0" cap="flat" cmpd="sng" algn="ctr">
+                      <a:noFill/>
+                    </a:lnR>
+                    <a:lnT w="0" cap="flat" cmpd="sng" algn="ctr">
+                      <a:noFill/>
+                    </a:lnT>
+                    <a:lnB w="9525" cap="flat" cmpd="sng" algn="ctr">
+                      <a:solidFill>
+                        <a:srgbClr val="E1E0D9"/>
+                      </a:solidFill>
+                      <a:prstDash val="solid"/>
+                      <a:round/>
+                      <a:headEnd type="none" w="med" len="med"/>
+                      <a:tailEnd type="none" w="med" len="med"/>
+                    </a:lnB>
+                  </a:tcPr>
+                </a:tc>
+                <a:tc>
+                  <a:txBody>
+                    <a:bodyPr/>
+                    <a:lstStyle/>
+                    <a:p>
+                      <a:pPr algn="r" indent="0" marL="0">
+                        <a:buNone/>
+                      </a:pPr>
+                      <a:r>
+                        <a:rPr lang="en-US" sz="950" dirty="0">
+                          <a:solidFill>
+                            <a:srgbClr val="0B0B0B"/>
+                          </a:solidFill>
+                          <a:latin typeface="Arial" pitchFamily="34" charset="0"/>
+                          <a:ea typeface="Arial" pitchFamily="34" charset="-122"/>
+                          <a:cs typeface="Arial" pitchFamily="34" charset="-120"/>
+                        </a:rPr>
+                        <a:t>X.X%</a:t>
+                      </a:r>
+                      <a:endParaRPr lang="en-US" sz="950" dirty="0">
+                        <a:latin typeface="Arial" charset="0"/>
+                        <a:ea typeface="Arial" charset="0"/>
+                        <a:cs typeface="Arial" charset="0"/>
+                      </a:endParaRPr>
+                    </a:p>
+                  </a:txBody>
+                  <a:tcPr marL="27432" marR="91440" marT="18288" marB="18288" anchor="ctr">
                     <a:lnL w="0" cap="flat" cmpd="sng" algn="ctr">
                       <a:noFill/>
                     </a:lnL>
@@ -7776,7 +8671,54 @@
                       </a:endParaRPr>
                     </a:p>
                   </a:txBody>
-                  <a:tcPr marL="109728" marR="27432" marT="18288" marB="18288" anchor="ctr">
+                  <a:tcPr marL="54864" marR="27432" marT="18288" marB="18288" anchor="ctr">
+                    <a:lnL w="0" cap="flat" cmpd="sng" algn="ctr">
+                      <a:noFill/>
+                    </a:lnL>
+                    <a:lnR w="0" cap="flat" cmpd="sng" algn="ctr">
+                      <a:noFill/>
+                    </a:lnR>
+                    <a:lnT w="0" cap="flat" cmpd="sng" algn="ctr">
+                      <a:noFill/>
+                    </a:lnT>
+                    <a:lnB w="9525" cap="flat" cmpd="sng" algn="ctr">
+                      <a:solidFill>
+                        <a:srgbClr val="E1E0D9"/>
+                      </a:solidFill>
+                      <a:prstDash val="solid"/>
+                      <a:round/>
+                      <a:headEnd type="none" w="med" len="med"/>
+                      <a:tailEnd type="none" w="med" len="med"/>
+                    </a:lnB>
+                  </a:tcPr>
+                </a:tc>
+                <a:tc>
+                  <a:txBody>
+                    <a:bodyPr/>
+                    <a:lstStyle/>
+                    <a:p>
+                      <a:pPr algn="r" indent="0" marL="0">
+                        <a:buNone/>
+                      </a:pPr>
+                      <a:r>
+                        <a:rPr lang="en-US" sz="950" dirty="0">
+                          <a:solidFill>
+                            <a:srgbClr val="0B0B0B"/>
+                          </a:solidFill>
+                          <a:latin typeface="Arial" pitchFamily="34" charset="0"/>
+                          <a:ea typeface="Arial" pitchFamily="34" charset="-122"/>
+                          <a:cs typeface="Arial" pitchFamily="34" charset="-120"/>
+                        </a:rPr>
+                        <a:t>X.X%</a:t>
+                      </a:r>
+                      <a:endParaRPr lang="en-US" sz="950" dirty="0">
+                        <a:latin typeface="Arial" charset="0"/>
+                        <a:ea typeface="Arial" charset="0"/>
+                        <a:cs typeface="Arial" charset="0"/>
+                      </a:endParaRPr>
+                    </a:p>
+                  </a:txBody>
+                  <a:tcPr marL="27432" marR="91440" marT="18288" marB="18288" anchor="ctr">
                     <a:lnL w="0" cap="flat" cmpd="sng" algn="ctr">
                       <a:noFill/>
                     </a:lnL>
@@ -8002,7 +8944,54 @@
                       </a:endParaRPr>
                     </a:p>
                   </a:txBody>
-                  <a:tcPr marL="109728" marR="27432" marT="18288" marB="18288" anchor="ctr">
+                  <a:tcPr marL="54864" marR="27432" marT="18288" marB="18288" anchor="ctr">
+                    <a:lnL w="0" cap="flat" cmpd="sng" algn="ctr">
+                      <a:noFill/>
+                    </a:lnL>
+                    <a:lnR w="0" cap="flat" cmpd="sng" algn="ctr">
+                      <a:noFill/>
+                    </a:lnR>
+                    <a:lnT w="0" cap="flat" cmpd="sng" algn="ctr">
+                      <a:noFill/>
+                    </a:lnT>
+                    <a:lnB w="9525" cap="flat" cmpd="sng" algn="ctr">
+                      <a:solidFill>
+                        <a:srgbClr val="E1E0D9"/>
+                      </a:solidFill>
+                      <a:prstDash val="solid"/>
+                      <a:round/>
+                      <a:headEnd type="none" w="med" len="med"/>
+                      <a:tailEnd type="none" w="med" len="med"/>
+                    </a:lnB>
+                  </a:tcPr>
+                </a:tc>
+                <a:tc>
+                  <a:txBody>
+                    <a:bodyPr/>
+                    <a:lstStyle/>
+                    <a:p>
+                      <a:pPr algn="r" indent="0" marL="0">
+                        <a:buNone/>
+                      </a:pPr>
+                      <a:r>
+                        <a:rPr lang="en-US" sz="950" dirty="0">
+                          <a:solidFill>
+                            <a:srgbClr val="0B0B0B"/>
+                          </a:solidFill>
+                          <a:latin typeface="Arial" pitchFamily="34" charset="0"/>
+                          <a:ea typeface="Arial" pitchFamily="34" charset="-122"/>
+                          <a:cs typeface="Arial" pitchFamily="34" charset="-120"/>
+                        </a:rPr>
+                        <a:t>X.X%</a:t>
+                      </a:r>
+                      <a:endParaRPr lang="en-US" sz="950" dirty="0">
+                        <a:latin typeface="Arial" charset="0"/>
+                        <a:ea typeface="Arial" charset="0"/>
+                        <a:cs typeface="Arial" charset="0"/>
+                      </a:endParaRPr>
+                    </a:p>
+                  </a:txBody>
+                  <a:tcPr marL="27432" marR="91440" marT="18288" marB="18288" anchor="ctr">
                     <a:lnL w="0" cap="flat" cmpd="sng" algn="ctr">
                       <a:noFill/>
                     </a:lnL>
@@ -8036,7 +9025,7 @@
         </p:nvSpPr>
         <p:spPr>
           <a:xfrm>
-            <a:off x="7232904" y="2887218"/>
+            <a:off x="6611112" y="2887218"/>
             <a:ext cx="987552" cy="219456"/>
           </a:xfrm>
           <a:prstGeom prst="roundRect">
@@ -8058,7 +9047,7 @@
         </p:nvSpPr>
         <p:spPr>
           <a:xfrm>
-            <a:off x="7232904" y="2887218"/>
+            <a:off x="6611112" y="2887218"/>
             <a:ext cx="987552" cy="219456"/>
           </a:xfrm>
           <a:prstGeom prst="rect">
@@ -8111,7 +9100,7 @@
         </p:nvSpPr>
         <p:spPr>
           <a:xfrm>
-            <a:off x="7232904" y="3230118"/>
+            <a:off x="6611112" y="3230118"/>
             <a:ext cx="987552" cy="219456"/>
           </a:xfrm>
           <a:prstGeom prst="roundRect">
@@ -8133,7 +9122,7 @@
         </p:nvSpPr>
         <p:spPr>
           <a:xfrm>
-            <a:off x="7232904" y="3230118"/>
+            <a:off x="6611112" y="3230118"/>
             <a:ext cx="987552" cy="219456"/>
           </a:xfrm>
           <a:prstGeom prst="rect">
@@ -8186,7 +9175,7 @@
         </p:nvSpPr>
         <p:spPr>
           <a:xfrm>
-            <a:off x="7232904" y="3573018"/>
+            <a:off x="6611112" y="3573018"/>
             <a:ext cx="987552" cy="219456"/>
           </a:xfrm>
           <a:prstGeom prst="roundRect">
@@ -8208,7 +9197,7 @@
         </p:nvSpPr>
         <p:spPr>
           <a:xfrm>
-            <a:off x="7232904" y="3573018"/>
+            <a:off x="6611112" y="3573018"/>
             <a:ext cx="987552" cy="219456"/>
           </a:xfrm>
           <a:prstGeom prst="rect">
@@ -8261,7 +9250,7 @@
         </p:nvSpPr>
         <p:spPr>
           <a:xfrm>
-            <a:off x="7232904" y="3915918"/>
+            <a:off x="6611112" y="3915918"/>
             <a:ext cx="694944" cy="219456"/>
           </a:xfrm>
           <a:prstGeom prst="roundRect">
@@ -8283,7 +9272,7 @@
         </p:nvSpPr>
         <p:spPr>
           <a:xfrm>
-            <a:off x="7232904" y="3915918"/>
+            <a:off x="6611112" y="3915918"/>
             <a:ext cx="694944" cy="219456"/>
           </a:xfrm>
           <a:prstGeom prst="rect">
@@ -8336,7 +9325,7 @@
         </p:nvSpPr>
         <p:spPr>
           <a:xfrm>
-            <a:off x="7232904" y="4258818"/>
+            <a:off x="6611112" y="4258818"/>
             <a:ext cx="694944" cy="219456"/>
           </a:xfrm>
           <a:prstGeom prst="roundRect">
@@ -8358,7 +9347,7 @@
         </p:nvSpPr>
         <p:spPr>
           <a:xfrm>
-            <a:off x="7232904" y="4258818"/>
+            <a:off x="6611112" y="4258818"/>
             <a:ext cx="694944" cy="219456"/>
           </a:xfrm>
           <a:prstGeom prst="rect">
@@ -8411,7 +9400,7 @@
         </p:nvSpPr>
         <p:spPr>
           <a:xfrm>
-            <a:off x="7232904" y="4601718"/>
+            <a:off x="6611112" y="4601718"/>
             <a:ext cx="694944" cy="219456"/>
           </a:xfrm>
           <a:prstGeom prst="roundRect">
@@ -8433,7 +9422,7 @@
         </p:nvSpPr>
         <p:spPr>
           <a:xfrm>
-            <a:off x="7232904" y="4601718"/>
+            <a:off x="6611112" y="4601718"/>
             <a:ext cx="694944" cy="219456"/>
           </a:xfrm>
           <a:prstGeom prst="rect">
